--- a/decks/friendship-breakups-lesson-v2.pptx
+++ b/decks/friendship-breakups-lesson-v2.pptx
@@ -17,6 +17,7 @@
     <p:sldId id="265" r:id="rId17"/>
     <p:sldId id="266" r:id="rId18"/>
     <p:sldId id="267" r:id="rId19"/>
+    <p:sldId id="268" r:id="rId20"/>
   </p:sldIdLst>
   <p:sldSz cx="12192000" cy="6858000" type="screen4x3"/>
   <p:notesSz cx="6858000" cy="9144000"/>
@@ -513,7 +514,77 @@
           <a:lstStyle/>
           <a:p>
             <a:r>
-              <a:t>This page and the next three are hidden. They stay in the deck for you and are skipped when you present.</a:t>
+              <a:t>This page is hidden and skipped when you present. The full plan, care notes and research are on the hidden pages at the end of the deck, if you want them.</a:t>
+            </a:r>
+          </a:p>
+        </p:txBody>
+      </p:sp>
+      <p:sp>
+        <p:nvSpPr>
+          <p:cNvPr id="4" name="Slide Number Placeholder 3"/>
+          <p:cNvSpPr>
+            <a:spLocks noGrp="1"/>
+          </p:cNvSpPr>
+          <p:nvPr>
+            <p:ph type="sldNum" idx="5" sz="quarter"/>
+          </p:nvPr>
+        </p:nvSpPr>
+        <p:spPr/>
+      </p:sp>
+    </p:spTree>
+  </p:cSld>
+  <p:clrMapOvr>
+    <a:masterClrMapping/>
+  </p:clrMapOvr>
+</p:notes>
+</file>
+
+<file path=ppt/notesSlides/notesSlide10.xml><?xml version="1.0" encoding="utf-8"?>
+<p:notes xmlns:a="http://schemas.openxmlformats.org/drawingml/2006/main" xmlns:p="http://schemas.openxmlformats.org/presentationml/2006/main" xmlns:r="http://schemas.openxmlformats.org/officeDocument/2006/relationships">
+  <p:cSld>
+    <p:spTree>
+      <p:nvGrpSpPr>
+        <p:cNvPr id="1" name=""/>
+        <p:cNvGrpSpPr/>
+        <p:nvPr/>
+      </p:nvGrpSpPr>
+      <p:grpSpPr>
+        <a:xfrm>
+          <a:off x="0" y="0"/>
+          <a:ext cx="0" cy="0"/>
+          <a:chOff x="0" y="0"/>
+          <a:chExt cx="0" cy="0"/>
+        </a:xfrm>
+      </p:grpSpPr>
+      <p:sp>
+        <p:nvSpPr>
+          <p:cNvPr id="2" name="Slide Image Placeholder 1"/>
+          <p:cNvSpPr>
+            <a:spLocks noGrp="1"/>
+          </p:cNvSpPr>
+          <p:nvPr>
+            <p:ph type="sldImg" idx="2"/>
+          </p:nvPr>
+        </p:nvSpPr>
+        <p:spPr/>
+      </p:sp>
+      <p:sp>
+        <p:nvSpPr>
+          <p:cNvPr id="3" name="Notes Placeholder 2"/>
+          <p:cNvSpPr>
+            <a:spLocks noGrp="1"/>
+          </p:cNvSpPr>
+          <p:nvPr>
+            <p:ph type="body" idx="3" sz="quarter"/>
+          </p:nvPr>
+        </p:nvSpPr>
+        <p:spPr/>
+        <p:txBody>
+          <a:bodyPr/>
+          <a:lstStyle/>
+          <a:p>
+            <a:r>
+              <a:t>If you want more: this page and the next three are hidden and skipped when you present.</a:t>
             </a:r>
           </a:p>
         </p:txBody>
@@ -4165,7 +4236,7 @@
                 </a:solidFill>
                 <a:latin typeface="Inter Tight"/>
               </a:rPr>
-              <a:t>TEACHER PAGE  ·  skipped when you present  ·  Lesson plan</a:t>
+              <a:t>TEACHER PAGE  ·  skipped when you present  ·  Before you start</a:t>
             </a:r>
           </a:p>
         </p:txBody>
@@ -4256,8 +4327,8 @@
         </p:nvSpPr>
         <p:spPr>
           <a:xfrm>
-            <a:off x="548640" y="1828800"/>
-            <a:ext cx="5120640" cy="4389120"/>
+            <a:off x="548640" y="2011680"/>
+            <a:ext cx="11064240" cy="4206240"/>
           </a:xfrm>
           <a:prstGeom prst="rect">
             <a:avLst/>
@@ -4272,43 +4343,43 @@
           <a:p>
             <a:pPr algn="l">
               <a:spcAft>
-                <a:spcPts val="675"/>
-              </a:spcAft>
-            </a:pPr>
-            <a:r>
-              <a:rPr sz="1100" b="1" i="0">
+                <a:spcPts val="900"/>
+              </a:spcAft>
+            </a:pPr>
+            <a:r>
+              <a:rPr sz="1200" b="1" i="0">
                 <a:solidFill>
                   <a:srgbClr val="0B2D5B"/>
                 </a:solidFill>
                 <a:latin typeface="Inter Tight"/>
               </a:rPr>
-              <a:t>GOAL</a:t>
-            </a:r>
-          </a:p>
-          <a:p>
-            <a:pPr algn="l">
-              <a:spcAft>
-                <a:spcPts val="675"/>
-              </a:spcAft>
-            </a:pPr>
-            <a:r>
-              <a:rPr sz="1500" b="0" i="0">
+              <a:t>BEFORE YOU START</a:t>
+            </a:r>
+          </a:p>
+          <a:p>
+            <a:pPr algn="l">
+              <a:spcAft>
+                <a:spcPts val="900"/>
+              </a:spcAft>
+            </a:pPr>
+            <a:r>
+              <a:rPr sz="2000" b="0" i="0">
                 <a:solidFill>
                   <a:srgbClr val="1C1B19"/>
                 </a:solidFill>
                 <a:latin typeface="Source Serif 4"/>
               </a:rPr>
-              <a:t>Students can explain why a friendship ending hurts like an injury and why endings are so common in the teen years, name a feeling specifically, and weigh repair, reset, or release. Nobody shares a real friendship.</a:t>
-            </a:r>
-          </a:p>
-          <a:p>
-            <a:pPr algn="l">
-              <a:spcAft>
-                <a:spcPts val="675"/>
-              </a:spcAft>
-            </a:pPr>
-            <a:r>
-              <a:rPr sz="1500" b="0" i="0">
+              <a:t>Students learn why losing a friend hurts like an injury, how common it is in the teen years, and how to weigh repair, reset, or release. Bring index cards, use only the slide scenarios since former friends may be sitting in the same circle, and never suggest anyone owes a second chance.</a:t>
+            </a:r>
+          </a:p>
+          <a:p>
+            <a:pPr algn="l">
+              <a:spcAft>
+                <a:spcPts val="900"/>
+              </a:spcAft>
+            </a:pPr>
+            <a:r>
+              <a:rPr sz="2000" b="0" i="0">
                 <a:solidFill>
                   <a:srgbClr val="1C1B19"/>
                 </a:solidFill>
@@ -4320,277 +4391,33 @@
           <a:p>
             <a:pPr algn="l">
               <a:spcAft>
-                <a:spcPts val="675"/>
-              </a:spcAft>
-            </a:pPr>
-            <a:r>
-              <a:rPr sz="1100" b="1" i="0">
+                <a:spcPts val="900"/>
+              </a:spcAft>
+            </a:pPr>
+            <a:r>
+              <a:rPr sz="1200" b="1" i="0">
                 <a:solidFill>
                   <a:srgbClr val="0B2D5B"/>
                 </a:solidFill>
                 <a:latin typeface="Inter Tight"/>
               </a:rPr>
-              <a:t>MATERIALS</a:t>
-            </a:r>
-          </a:p>
-          <a:p>
-            <a:pPr algn="l">
-              <a:spcAft>
-                <a:spcPts val="675"/>
-              </a:spcAft>
-            </a:pPr>
-            <a:r>
-              <a:rPr sz="1500" b="0" i="0">
+              <a:t>EVERY STUDENT IN THE ROOM</a:t>
+            </a:r>
+          </a:p>
+          <a:p>
+            <a:pPr algn="l">
+              <a:spcAft>
+                <a:spcPts val="900"/>
+              </a:spcAft>
+            </a:pPr>
+            <a:r>
+              <a:rPr sz="2000" b="0" i="0">
                 <a:solidFill>
                   <a:srgbClr val="1C1B19"/>
                 </a:solidFill>
                 <a:latin typeface="Source Serif 4"/>
               </a:rPr>
-              <a:t>Scrap paper for the opening guess</a:t>
-            </a:r>
-          </a:p>
-          <a:p>
-            <a:pPr algn="l">
-              <a:spcAft>
-                <a:spcPts val="675"/>
-              </a:spcAft>
-            </a:pPr>
-            <a:r>
-              <a:rPr sz="1500" b="0" i="0">
-                <a:solidFill>
-                  <a:srgbClr val="1C1B19"/>
-                </a:solidFill>
-                <a:latin typeface="Source Serif 4"/>
-              </a:rPr>
-              <a:t>Index cards for the private reflection</a:t>
-            </a:r>
-          </a:p>
-          <a:p>
-            <a:pPr algn="l">
-              <a:spcAft>
-                <a:spcPts val="675"/>
-              </a:spcAft>
-            </a:pPr>
-            <a:r>
-              <a:rPr sz="1500" b="0" i="0">
-                <a:solidFill>
-                  <a:srgbClr val="1C1B19"/>
-                </a:solidFill>
-                <a:latin typeface="Source Serif 4"/>
-              </a:rPr>
-              <a:t>The student page link (last slide) to share after advisory</a:t>
-            </a:r>
-          </a:p>
-        </p:txBody>
-      </p:sp>
-      <p:sp>
-        <p:nvSpPr>
-          <p:cNvPr id="7" name="TextBox 6"/>
-          <p:cNvSpPr txBox="1"/>
-          <p:nvPr/>
-        </p:nvSpPr>
-        <p:spPr>
-          <a:xfrm>
-            <a:off x="6126480" y="1828800"/>
-            <a:ext cx="5486400" cy="4389120"/>
-          </a:xfrm>
-          <a:prstGeom prst="rect">
-            <a:avLst/>
-          </a:prstGeom>
-          <a:noFill/>
-        </p:spPr>
-        <p:txBody>
-          <a:bodyPr wrap="square" anchor="t" lIns="0" rIns="0" tIns="0" bIns="0">
-            <a:spAutoFit/>
-          </a:bodyPr>
-          <a:lstStyle/>
-          <a:p>
-            <a:pPr algn="l">
-              <a:spcAft>
-                <a:spcPts val="630"/>
-              </a:spcAft>
-            </a:pPr>
-            <a:r>
-              <a:rPr sz="1100" b="1" i="0">
-                <a:solidFill>
-                  <a:srgbClr val="0B2D5B"/>
-                </a:solidFill>
-                <a:latin typeface="Inter Tight"/>
-              </a:rPr>
-              <a:t>FLOW</a:t>
-            </a:r>
-          </a:p>
-          <a:p>
-            <a:pPr algn="l">
-              <a:spcAft>
-                <a:spcPts val="630"/>
-              </a:spcAft>
-            </a:pPr>
-            <a:r>
-              <a:rPr sz="1300" b="1" i="0">
-                <a:solidFill>
-                  <a:srgbClr val="F47B20"/>
-                </a:solidFill>
-                <a:latin typeface="Inter Tight"/>
-              </a:rPr>
-              <a:t>6 min   </a:t>
-            </a:r>
-            <a:r>
-              <a:rPr sz="1400" b="0" i="0">
-                <a:solidFill>
-                  <a:srgbClr val="1C1B19"/>
-                </a:solidFill>
-                <a:latin typeface="Source Serif 4"/>
-              </a:rPr>
-              <a:t>The guess and the real number (anonymous)</a:t>
-            </a:r>
-          </a:p>
-          <a:p>
-            <a:pPr algn="l">
-              <a:spcAft>
-                <a:spcPts val="630"/>
-              </a:spcAft>
-            </a:pPr>
-            <a:r>
-              <a:rPr sz="1300" b="1" i="0">
-                <a:solidFill>
-                  <a:srgbClr val="F47B20"/>
-                </a:solidFill>
-                <a:latin typeface="Inter Tight"/>
-              </a:rPr>
-              <a:t>5 min   </a:t>
-            </a:r>
-            <a:r>
-              <a:rPr sz="1400" b="0" i="0">
-                <a:solidFill>
-                  <a:srgbClr val="1C1B19"/>
-                </a:solidFill>
-                <a:latin typeface="Source Serif 4"/>
-              </a:rPr>
-              <a:t>Why it hurts, and what helps</a:t>
-            </a:r>
-          </a:p>
-          <a:p>
-            <a:pPr algn="l">
-              <a:spcAft>
-                <a:spcPts val="630"/>
-              </a:spcAft>
-            </a:pPr>
-            <a:r>
-              <a:rPr sz="1300" b="1" i="0">
-                <a:solidFill>
-                  <a:srgbClr val="F47B20"/>
-                </a:solidFill>
-                <a:latin typeface="Inter Tight"/>
-              </a:rPr>
-              <a:t>4 min   </a:t>
-            </a:r>
-            <a:r>
-              <a:rPr sz="1400" b="0" i="0">
-                <a:solidFill>
-                  <a:srgbClr val="1C1B19"/>
-                </a:solidFill>
-                <a:latin typeface="Source Serif 4"/>
-              </a:rPr>
-              <a:t>Repair, reset, or release? (pairs)</a:t>
-            </a:r>
-          </a:p>
-          <a:p>
-            <a:pPr algn="l">
-              <a:spcAft>
-                <a:spcPts val="630"/>
-              </a:spcAft>
-            </a:pPr>
-            <a:r>
-              <a:rPr sz="1300" b="1" i="0">
-                <a:solidFill>
-                  <a:srgbClr val="F47B20"/>
-                </a:solidFill>
-                <a:latin typeface="Inter Tight"/>
-              </a:rPr>
-              <a:t>3 min   </a:t>
-            </a:r>
-            <a:r>
-              <a:rPr sz="1400" b="0" i="0">
-                <a:solidFill>
-                  <a:srgbClr val="1C1B19"/>
-                </a:solidFill>
-                <a:latin typeface="Source Serif 4"/>
-              </a:rPr>
-              <a:t>One specific word (private)</a:t>
-            </a:r>
-          </a:p>
-          <a:p>
-            <a:pPr algn="l">
-              <a:spcAft>
-                <a:spcPts val="630"/>
-              </a:spcAft>
-            </a:pPr>
-            <a:r>
-              <a:rPr sz="1300" b="1" i="0">
-                <a:solidFill>
-                  <a:srgbClr val="F47B20"/>
-                </a:solidFill>
-                <a:latin typeface="Inter Tight"/>
-              </a:rPr>
-              <a:t>2 min   </a:t>
-            </a:r>
-            <a:r>
-              <a:rPr sz="1400" b="0" i="0">
-                <a:solidFill>
-                  <a:srgbClr val="1C1B19"/>
-                </a:solidFill>
-                <a:latin typeface="Source Serif 4"/>
-              </a:rPr>
-              <a:t>Waves, and the student page</a:t>
-            </a:r>
-          </a:p>
-          <a:p>
-            <a:pPr algn="l">
-              <a:spcAft>
-                <a:spcPts val="630"/>
-              </a:spcAft>
-            </a:pPr>
-            <a:r>
-              <a:rPr sz="1400" b="0" i="0">
-                <a:solidFill>
-                  <a:srgbClr val="1C1B19"/>
-                </a:solidFill>
-                <a:latin typeface="Source Serif 4"/>
-              </a:rPr>
-              <a:t/>
-            </a:r>
-          </a:p>
-          <a:p>
-            <a:pPr algn="l">
-              <a:spcAft>
-                <a:spcPts val="630"/>
-              </a:spcAft>
-            </a:pPr>
-            <a:r>
-              <a:rPr sz="1100" b="1" i="0">
-                <a:solidFill>
-                  <a:srgbClr val="0B2D5B"/>
-                </a:solidFill>
-                <a:latin typeface="Inter Tight"/>
-              </a:rPr>
-              <a:t>SHORT ON TIME (10-MINUTE CHECK-IN)</a:t>
-            </a:r>
-          </a:p>
-          <a:p>
-            <a:pPr algn="l">
-              <a:spcAft>
-                <a:spcPts val="630"/>
-              </a:spcAft>
-            </a:pPr>
-            <a:r>
-              <a:rPr sz="1400" b="0" i="0">
-                <a:solidFill>
-                  <a:srgbClr val="1C1B19"/>
-                </a:solidFill>
-                <a:latin typeface="Source Serif 4"/>
-              </a:rPr>
-              <a:t>The guess and the real number (3), why it hurts (2), repair, reset, or release with one scenario (3), waves and the student page (2).</a:t>
+              <a:t>Friendship breakups ripple through shared teams, neighborhoods and faith communities, and for an autistic student or a student who just moved, one ending can take out most of their social world.</a:t>
             </a:r>
           </a:p>
         </p:txBody>
@@ -4604,6 +4431,2226 @@
 </file>
 
 <file path=ppt/slides/slide10.xml><?xml version="1.0" encoding="utf-8"?>
+<p:sld xmlns:a="http://schemas.openxmlformats.org/drawingml/2006/main" xmlns:p="http://schemas.openxmlformats.org/presentationml/2006/main" xmlns:r="http://schemas.openxmlformats.org/officeDocument/2006/relationships" show="0">
+  <p:cSld>
+    <p:bg>
+      <p:bgPr>
+        <a:solidFill>
+          <a:srgbClr val="EEEBE4"/>
+        </a:solidFill>
+        <a:effectLst/>
+      </p:bgPr>
+    </p:bg>
+    <p:spTree>
+      <p:nvGrpSpPr>
+        <p:cNvPr id="1" name=""/>
+        <p:cNvGrpSpPr/>
+        <p:nvPr/>
+      </p:nvGrpSpPr>
+      <p:grpSpPr/>
+      <p:sp>
+        <p:nvSpPr>
+          <p:cNvPr id="2" name="Rectangle 1"/>
+          <p:cNvSpPr/>
+          <p:nvPr/>
+        </p:nvSpPr>
+        <p:spPr>
+          <a:xfrm>
+            <a:off x="0" y="0"/>
+            <a:ext cx="12191695" cy="384048"/>
+          </a:xfrm>
+          <a:prstGeom prst="rect">
+            <a:avLst/>
+          </a:prstGeom>
+          <a:solidFill>
+            <a:srgbClr val="0B2D5B"/>
+          </a:solidFill>
+          <a:ln>
+            <a:noFill/>
+          </a:ln>
+          <a:effectLst/>
+        </p:spPr>
+        <p:style>
+          <a:lnRef idx="1">
+            <a:schemeClr val="accent1"/>
+          </a:lnRef>
+          <a:fillRef idx="3">
+            <a:schemeClr val="accent1"/>
+          </a:fillRef>
+          <a:effectRef idx="2">
+            <a:schemeClr val="accent1"/>
+          </a:effectRef>
+          <a:fontRef idx="minor">
+            <a:schemeClr val="lt1"/>
+          </a:fontRef>
+        </p:style>
+        <p:txBody>
+          <a:bodyPr rtlCol="0" anchor="ctr"/>
+          <a:lstStyle/>
+          <a:p>
+            <a:pPr algn="ctr"/>
+          </a:p>
+        </p:txBody>
+      </p:sp>
+      <p:sp>
+        <p:nvSpPr>
+          <p:cNvPr id="3" name="TextBox 2"/>
+          <p:cNvSpPr txBox="1"/>
+          <p:nvPr/>
+        </p:nvSpPr>
+        <p:spPr>
+          <a:xfrm>
+            <a:off x="548640" y="100584"/>
+            <a:ext cx="10972800" cy="274320"/>
+          </a:xfrm>
+          <a:prstGeom prst="rect">
+            <a:avLst/>
+          </a:prstGeom>
+          <a:noFill/>
+        </p:spPr>
+        <p:txBody>
+          <a:bodyPr wrap="square" anchor="t" lIns="0" rIns="0" tIns="0" bIns="0">
+            <a:spAutoFit/>
+          </a:bodyPr>
+          <a:lstStyle/>
+          <a:p>
+            <a:pPr algn="l">
+              <a:spcAft>
+                <a:spcPts val="495"/>
+              </a:spcAft>
+            </a:pPr>
+            <a:r>
+              <a:rPr sz="1100" b="1" i="0">
+                <a:solidFill>
+                  <a:srgbClr val="FFFFFF"/>
+                </a:solidFill>
+                <a:latin typeface="Inter Tight"/>
+              </a:rPr>
+              <a:t>TEACHER PAGE  ·  skipped when you present  ·  Lesson plan</a:t>
+            </a:r>
+          </a:p>
+        </p:txBody>
+      </p:sp>
+      <p:sp>
+        <p:nvSpPr>
+          <p:cNvPr id="4" name="TextBox 3"/>
+          <p:cNvSpPr txBox="1"/>
+          <p:nvPr/>
+        </p:nvSpPr>
+        <p:spPr>
+          <a:xfrm>
+            <a:off x="548640" y="685800"/>
+            <a:ext cx="10972800" cy="731520"/>
+          </a:xfrm>
+          <a:prstGeom prst="rect">
+            <a:avLst/>
+          </a:prstGeom>
+          <a:noFill/>
+        </p:spPr>
+        <p:txBody>
+          <a:bodyPr wrap="square" anchor="t" lIns="0" rIns="0" tIns="0" bIns="0">
+            <a:spAutoFit/>
+          </a:bodyPr>
+          <a:lstStyle/>
+          <a:p>
+            <a:pPr algn="l">
+              <a:spcAft>
+                <a:spcPts val="1530"/>
+              </a:spcAft>
+            </a:pPr>
+            <a:r>
+              <a:rPr sz="3400" b="1" i="0">
+                <a:solidFill>
+                  <a:srgbClr val="1C1B19"/>
+                </a:solidFill>
+                <a:latin typeface="Source Serif 4"/>
+              </a:rPr>
+              <a:t>Friendship Breakups</a:t>
+            </a:r>
+          </a:p>
+        </p:txBody>
+      </p:sp>
+      <p:sp>
+        <p:nvSpPr>
+          <p:cNvPr id="5" name="TextBox 4"/>
+          <p:cNvSpPr txBox="1"/>
+          <p:nvPr/>
+        </p:nvSpPr>
+        <p:spPr>
+          <a:xfrm>
+            <a:off x="548640" y="1325880"/>
+            <a:ext cx="10972800" cy="365760"/>
+          </a:xfrm>
+          <a:prstGeom prst="rect">
+            <a:avLst/>
+          </a:prstGeom>
+          <a:noFill/>
+        </p:spPr>
+        <p:txBody>
+          <a:bodyPr wrap="square" anchor="t" lIns="0" rIns="0" tIns="0" bIns="0">
+            <a:spAutoFit/>
+          </a:bodyPr>
+          <a:lstStyle/>
+          <a:p>
+            <a:pPr algn="l">
+              <a:spcAft>
+                <a:spcPts val="630"/>
+              </a:spcAft>
+            </a:pPr>
+            <a:r>
+              <a:rPr sz="1400" b="0" i="0">
+                <a:solidFill>
+                  <a:srgbClr val="5D5A54"/>
+                </a:solidFill>
+                <a:latin typeface="Inter Tight"/>
+              </a:rPr>
+              <a:t>Upper School  ·  20 minutes (fits a 30-minute advisory, with time for your opening check-in; 10-minute version below)  ·  Any grade</a:t>
+            </a:r>
+          </a:p>
+        </p:txBody>
+      </p:sp>
+      <p:sp>
+        <p:nvSpPr>
+          <p:cNvPr id="6" name="TextBox 5"/>
+          <p:cNvSpPr txBox="1"/>
+          <p:nvPr/>
+        </p:nvSpPr>
+        <p:spPr>
+          <a:xfrm>
+            <a:off x="548640" y="1828800"/>
+            <a:ext cx="5120640" cy="4389120"/>
+          </a:xfrm>
+          <a:prstGeom prst="rect">
+            <a:avLst/>
+          </a:prstGeom>
+          <a:noFill/>
+        </p:spPr>
+        <p:txBody>
+          <a:bodyPr wrap="square" anchor="t" lIns="0" rIns="0" tIns="0" bIns="0">
+            <a:spAutoFit/>
+          </a:bodyPr>
+          <a:lstStyle/>
+          <a:p>
+            <a:pPr algn="l">
+              <a:spcAft>
+                <a:spcPts val="675"/>
+              </a:spcAft>
+            </a:pPr>
+            <a:r>
+              <a:rPr sz="1100" b="1" i="0">
+                <a:solidFill>
+                  <a:srgbClr val="0B2D5B"/>
+                </a:solidFill>
+                <a:latin typeface="Inter Tight"/>
+              </a:rPr>
+              <a:t>GOAL</a:t>
+            </a:r>
+          </a:p>
+          <a:p>
+            <a:pPr algn="l">
+              <a:spcAft>
+                <a:spcPts val="675"/>
+              </a:spcAft>
+            </a:pPr>
+            <a:r>
+              <a:rPr sz="1500" b="0" i="0">
+                <a:solidFill>
+                  <a:srgbClr val="1C1B19"/>
+                </a:solidFill>
+                <a:latin typeface="Source Serif 4"/>
+              </a:rPr>
+              <a:t>Students can explain why a friendship ending hurts like an injury and why endings are so common in the teen years, name a feeling specifically, and weigh repair, reset, or release. Nobody shares a real friendship.</a:t>
+            </a:r>
+          </a:p>
+          <a:p>
+            <a:pPr algn="l">
+              <a:spcAft>
+                <a:spcPts val="675"/>
+              </a:spcAft>
+            </a:pPr>
+            <a:r>
+              <a:rPr sz="1500" b="0" i="0">
+                <a:solidFill>
+                  <a:srgbClr val="1C1B19"/>
+                </a:solidFill>
+                <a:latin typeface="Source Serif 4"/>
+              </a:rPr>
+              <a:t/>
+            </a:r>
+          </a:p>
+          <a:p>
+            <a:pPr algn="l">
+              <a:spcAft>
+                <a:spcPts val="675"/>
+              </a:spcAft>
+            </a:pPr>
+            <a:r>
+              <a:rPr sz="1100" b="1" i="0">
+                <a:solidFill>
+                  <a:srgbClr val="0B2D5B"/>
+                </a:solidFill>
+                <a:latin typeface="Inter Tight"/>
+              </a:rPr>
+              <a:t>MATERIALS</a:t>
+            </a:r>
+          </a:p>
+          <a:p>
+            <a:pPr algn="l">
+              <a:spcAft>
+                <a:spcPts val="675"/>
+              </a:spcAft>
+            </a:pPr>
+            <a:r>
+              <a:rPr sz="1500" b="0" i="0">
+                <a:solidFill>
+                  <a:srgbClr val="1C1B19"/>
+                </a:solidFill>
+                <a:latin typeface="Source Serif 4"/>
+              </a:rPr>
+              <a:t>Scrap paper for the opening guess</a:t>
+            </a:r>
+          </a:p>
+          <a:p>
+            <a:pPr algn="l">
+              <a:spcAft>
+                <a:spcPts val="675"/>
+              </a:spcAft>
+            </a:pPr>
+            <a:r>
+              <a:rPr sz="1500" b="0" i="0">
+                <a:solidFill>
+                  <a:srgbClr val="1C1B19"/>
+                </a:solidFill>
+                <a:latin typeface="Source Serif 4"/>
+              </a:rPr>
+              <a:t>Index cards for the private reflection</a:t>
+            </a:r>
+          </a:p>
+          <a:p>
+            <a:pPr algn="l">
+              <a:spcAft>
+                <a:spcPts val="675"/>
+              </a:spcAft>
+            </a:pPr>
+            <a:r>
+              <a:rPr sz="1500" b="0" i="0">
+                <a:solidFill>
+                  <a:srgbClr val="1C1B19"/>
+                </a:solidFill>
+                <a:latin typeface="Source Serif 4"/>
+              </a:rPr>
+              <a:t>The student page link (last slide) to share after advisory</a:t>
+            </a:r>
+          </a:p>
+        </p:txBody>
+      </p:sp>
+      <p:sp>
+        <p:nvSpPr>
+          <p:cNvPr id="7" name="TextBox 6"/>
+          <p:cNvSpPr txBox="1"/>
+          <p:nvPr/>
+        </p:nvSpPr>
+        <p:spPr>
+          <a:xfrm>
+            <a:off x="6126480" y="1828800"/>
+            <a:ext cx="5486400" cy="4389120"/>
+          </a:xfrm>
+          <a:prstGeom prst="rect">
+            <a:avLst/>
+          </a:prstGeom>
+          <a:noFill/>
+        </p:spPr>
+        <p:txBody>
+          <a:bodyPr wrap="square" anchor="t" lIns="0" rIns="0" tIns="0" bIns="0">
+            <a:spAutoFit/>
+          </a:bodyPr>
+          <a:lstStyle/>
+          <a:p>
+            <a:pPr algn="l">
+              <a:spcAft>
+                <a:spcPts val="630"/>
+              </a:spcAft>
+            </a:pPr>
+            <a:r>
+              <a:rPr sz="1100" b="1" i="0">
+                <a:solidFill>
+                  <a:srgbClr val="0B2D5B"/>
+                </a:solidFill>
+                <a:latin typeface="Inter Tight"/>
+              </a:rPr>
+              <a:t>FLOW</a:t>
+            </a:r>
+          </a:p>
+          <a:p>
+            <a:pPr algn="l">
+              <a:spcAft>
+                <a:spcPts val="630"/>
+              </a:spcAft>
+            </a:pPr>
+            <a:r>
+              <a:rPr sz="1300" b="1" i="0">
+                <a:solidFill>
+                  <a:srgbClr val="F47B20"/>
+                </a:solidFill>
+                <a:latin typeface="Inter Tight"/>
+              </a:rPr>
+              <a:t>6 min   </a:t>
+            </a:r>
+            <a:r>
+              <a:rPr sz="1400" b="0" i="0">
+                <a:solidFill>
+                  <a:srgbClr val="1C1B19"/>
+                </a:solidFill>
+                <a:latin typeface="Source Serif 4"/>
+              </a:rPr>
+              <a:t>The guess and the real number (anonymous)</a:t>
+            </a:r>
+          </a:p>
+          <a:p>
+            <a:pPr algn="l">
+              <a:spcAft>
+                <a:spcPts val="630"/>
+              </a:spcAft>
+            </a:pPr>
+            <a:r>
+              <a:rPr sz="1300" b="1" i="0">
+                <a:solidFill>
+                  <a:srgbClr val="F47B20"/>
+                </a:solidFill>
+                <a:latin typeface="Inter Tight"/>
+              </a:rPr>
+              <a:t>5 min   </a:t>
+            </a:r>
+            <a:r>
+              <a:rPr sz="1400" b="0" i="0">
+                <a:solidFill>
+                  <a:srgbClr val="1C1B19"/>
+                </a:solidFill>
+                <a:latin typeface="Source Serif 4"/>
+              </a:rPr>
+              <a:t>Why it hurts, and what helps</a:t>
+            </a:r>
+          </a:p>
+          <a:p>
+            <a:pPr algn="l">
+              <a:spcAft>
+                <a:spcPts val="630"/>
+              </a:spcAft>
+            </a:pPr>
+            <a:r>
+              <a:rPr sz="1300" b="1" i="0">
+                <a:solidFill>
+                  <a:srgbClr val="F47B20"/>
+                </a:solidFill>
+                <a:latin typeface="Inter Tight"/>
+              </a:rPr>
+              <a:t>4 min   </a:t>
+            </a:r>
+            <a:r>
+              <a:rPr sz="1400" b="0" i="0">
+                <a:solidFill>
+                  <a:srgbClr val="1C1B19"/>
+                </a:solidFill>
+                <a:latin typeface="Source Serif 4"/>
+              </a:rPr>
+              <a:t>Repair, reset, or release? (pairs)</a:t>
+            </a:r>
+          </a:p>
+          <a:p>
+            <a:pPr algn="l">
+              <a:spcAft>
+                <a:spcPts val="630"/>
+              </a:spcAft>
+            </a:pPr>
+            <a:r>
+              <a:rPr sz="1300" b="1" i="0">
+                <a:solidFill>
+                  <a:srgbClr val="F47B20"/>
+                </a:solidFill>
+                <a:latin typeface="Inter Tight"/>
+              </a:rPr>
+              <a:t>3 min   </a:t>
+            </a:r>
+            <a:r>
+              <a:rPr sz="1400" b="0" i="0">
+                <a:solidFill>
+                  <a:srgbClr val="1C1B19"/>
+                </a:solidFill>
+                <a:latin typeface="Source Serif 4"/>
+              </a:rPr>
+              <a:t>One specific word (private)</a:t>
+            </a:r>
+          </a:p>
+          <a:p>
+            <a:pPr algn="l">
+              <a:spcAft>
+                <a:spcPts val="630"/>
+              </a:spcAft>
+            </a:pPr>
+            <a:r>
+              <a:rPr sz="1300" b="1" i="0">
+                <a:solidFill>
+                  <a:srgbClr val="F47B20"/>
+                </a:solidFill>
+                <a:latin typeface="Inter Tight"/>
+              </a:rPr>
+              <a:t>2 min   </a:t>
+            </a:r>
+            <a:r>
+              <a:rPr sz="1400" b="0" i="0">
+                <a:solidFill>
+                  <a:srgbClr val="1C1B19"/>
+                </a:solidFill>
+                <a:latin typeface="Source Serif 4"/>
+              </a:rPr>
+              <a:t>Waves, and the student page</a:t>
+            </a:r>
+          </a:p>
+          <a:p>
+            <a:pPr algn="l">
+              <a:spcAft>
+                <a:spcPts val="630"/>
+              </a:spcAft>
+            </a:pPr>
+            <a:r>
+              <a:rPr sz="1400" b="0" i="0">
+                <a:solidFill>
+                  <a:srgbClr val="1C1B19"/>
+                </a:solidFill>
+                <a:latin typeface="Source Serif 4"/>
+              </a:rPr>
+              <a:t/>
+            </a:r>
+          </a:p>
+          <a:p>
+            <a:pPr algn="l">
+              <a:spcAft>
+                <a:spcPts val="630"/>
+              </a:spcAft>
+            </a:pPr>
+            <a:r>
+              <a:rPr sz="1100" b="1" i="0">
+                <a:solidFill>
+                  <a:srgbClr val="0B2D5B"/>
+                </a:solidFill>
+                <a:latin typeface="Inter Tight"/>
+              </a:rPr>
+              <a:t>SHORT ON TIME (10-MINUTE CHECK-IN)</a:t>
+            </a:r>
+          </a:p>
+          <a:p>
+            <a:pPr algn="l">
+              <a:spcAft>
+                <a:spcPts val="630"/>
+              </a:spcAft>
+            </a:pPr>
+            <a:r>
+              <a:rPr sz="1400" b="0" i="0">
+                <a:solidFill>
+                  <a:srgbClr val="1C1B19"/>
+                </a:solidFill>
+                <a:latin typeface="Source Serif 4"/>
+              </a:rPr>
+              <a:t>The guess and the real number (3), why it hurts (2), repair, reset, or release with one scenario (3), waves and the student page (2).</a:t>
+            </a:r>
+          </a:p>
+        </p:txBody>
+      </p:sp>
+    </p:spTree>
+  </p:cSld>
+  <p:clrMapOvr>
+    <a:masterClrMapping/>
+  </p:clrMapOvr>
+</p:sld>
+</file>
+
+<file path=ppt/slides/slide11.xml><?xml version="1.0" encoding="utf-8"?>
+<p:sld xmlns:a="http://schemas.openxmlformats.org/drawingml/2006/main" xmlns:p="http://schemas.openxmlformats.org/presentationml/2006/main" xmlns:r="http://schemas.openxmlformats.org/officeDocument/2006/relationships" show="0">
+  <p:cSld>
+    <p:bg>
+      <p:bgPr>
+        <a:solidFill>
+          <a:srgbClr val="EEEBE4"/>
+        </a:solidFill>
+        <a:effectLst/>
+      </p:bgPr>
+    </p:bg>
+    <p:spTree>
+      <p:nvGrpSpPr>
+        <p:cNvPr id="1" name=""/>
+        <p:cNvGrpSpPr/>
+        <p:nvPr/>
+      </p:nvGrpSpPr>
+      <p:grpSpPr/>
+      <p:sp>
+        <p:nvSpPr>
+          <p:cNvPr id="2" name="Rectangle 1"/>
+          <p:cNvSpPr/>
+          <p:nvPr/>
+        </p:nvSpPr>
+        <p:spPr>
+          <a:xfrm>
+            <a:off x="0" y="0"/>
+            <a:ext cx="12191695" cy="384048"/>
+          </a:xfrm>
+          <a:prstGeom prst="rect">
+            <a:avLst/>
+          </a:prstGeom>
+          <a:solidFill>
+            <a:srgbClr val="0B2D5B"/>
+          </a:solidFill>
+          <a:ln>
+            <a:noFill/>
+          </a:ln>
+          <a:effectLst/>
+        </p:spPr>
+        <p:style>
+          <a:lnRef idx="1">
+            <a:schemeClr val="accent1"/>
+          </a:lnRef>
+          <a:fillRef idx="3">
+            <a:schemeClr val="accent1"/>
+          </a:fillRef>
+          <a:effectRef idx="2">
+            <a:schemeClr val="accent1"/>
+          </a:effectRef>
+          <a:fontRef idx="minor">
+            <a:schemeClr val="lt1"/>
+          </a:fontRef>
+        </p:style>
+        <p:txBody>
+          <a:bodyPr rtlCol="0" anchor="ctr"/>
+          <a:lstStyle/>
+          <a:p>
+            <a:pPr algn="ctr"/>
+          </a:p>
+        </p:txBody>
+      </p:sp>
+      <p:sp>
+        <p:nvSpPr>
+          <p:cNvPr id="3" name="TextBox 2"/>
+          <p:cNvSpPr txBox="1"/>
+          <p:nvPr/>
+        </p:nvSpPr>
+        <p:spPr>
+          <a:xfrm>
+            <a:off x="548640" y="100584"/>
+            <a:ext cx="10972800" cy="274320"/>
+          </a:xfrm>
+          <a:prstGeom prst="rect">
+            <a:avLst/>
+          </a:prstGeom>
+          <a:noFill/>
+        </p:spPr>
+        <p:txBody>
+          <a:bodyPr wrap="square" anchor="t" lIns="0" rIns="0" tIns="0" bIns="0">
+            <a:spAutoFit/>
+          </a:bodyPr>
+          <a:lstStyle/>
+          <a:p>
+            <a:pPr algn="l">
+              <a:spcAft>
+                <a:spcPts val="495"/>
+              </a:spcAft>
+            </a:pPr>
+            <a:r>
+              <a:rPr sz="1100" b="1" i="0">
+                <a:solidFill>
+                  <a:srgbClr val="FFFFFF"/>
+                </a:solidFill>
+                <a:latin typeface="Inter Tight"/>
+              </a:rPr>
+              <a:t>TEACHER PAGE  ·  skipped when you present  ·  Before you teach</a:t>
+            </a:r>
+          </a:p>
+        </p:txBody>
+      </p:sp>
+      <p:sp>
+        <p:nvSpPr>
+          <p:cNvPr id="4" name="TextBox 3"/>
+          <p:cNvSpPr txBox="1"/>
+          <p:nvPr/>
+        </p:nvSpPr>
+        <p:spPr>
+          <a:xfrm>
+            <a:off x="548640" y="685800"/>
+            <a:ext cx="10972800" cy="640080"/>
+          </a:xfrm>
+          <a:prstGeom prst="rect">
+            <a:avLst/>
+          </a:prstGeom>
+          <a:noFill/>
+        </p:spPr>
+        <p:txBody>
+          <a:bodyPr wrap="square" anchor="t" lIns="0" rIns="0" tIns="0" bIns="0">
+            <a:spAutoFit/>
+          </a:bodyPr>
+          <a:lstStyle/>
+          <a:p>
+            <a:pPr algn="l">
+              <a:spcAft>
+                <a:spcPts val="1350"/>
+              </a:spcAft>
+            </a:pPr>
+            <a:r>
+              <a:rPr sz="3000" b="1" i="0">
+                <a:solidFill>
+                  <a:srgbClr val="1C1B19"/>
+                </a:solidFill>
+                <a:latin typeface="Source Serif 4"/>
+              </a:rPr>
+              <a:t>Before you teach</a:t>
+            </a:r>
+          </a:p>
+        </p:txBody>
+      </p:sp>
+      <p:sp>
+        <p:nvSpPr>
+          <p:cNvPr id="5" name="TextBox 4"/>
+          <p:cNvSpPr txBox="1"/>
+          <p:nvPr/>
+        </p:nvSpPr>
+        <p:spPr>
+          <a:xfrm>
+            <a:off x="548640" y="1463040"/>
+            <a:ext cx="5394960" cy="4937760"/>
+          </a:xfrm>
+          <a:prstGeom prst="rect">
+            <a:avLst/>
+          </a:prstGeom>
+          <a:noFill/>
+        </p:spPr>
+        <p:txBody>
+          <a:bodyPr wrap="square" anchor="t" lIns="0" rIns="0" tIns="0" bIns="0">
+            <a:spAutoFit/>
+          </a:bodyPr>
+          <a:lstStyle/>
+          <a:p>
+            <a:pPr algn="l">
+              <a:spcAft>
+                <a:spcPts val="585"/>
+              </a:spcAft>
+            </a:pPr>
+            <a:r>
+              <a:rPr sz="1500" b="1" i="0">
+                <a:solidFill>
+                  <a:srgbClr val="1C1B19"/>
+                </a:solidFill>
+                <a:latin typeface="Source Serif 4"/>
+              </a:rPr>
+              <a:t>Former friends may be in the same circle.</a:t>
+            </a:r>
+          </a:p>
+          <a:p>
+            <a:pPr algn="l">
+              <a:spcAft>
+                <a:spcPts val="585"/>
+              </a:spcAft>
+            </a:pPr>
+            <a:r>
+              <a:rPr sz="1300" b="0" i="0">
+                <a:solidFill>
+                  <a:srgbClr val="1C1B19"/>
+                </a:solidFill>
+                <a:latin typeface="Source Serif 4"/>
+              </a:rPr>
+              <a:t>Advisory groups are small, and two people who used to be close may sit across from each other. Use only the slide scenarios. Don't ask for stories, names, or what happened.</a:t>
+            </a:r>
+          </a:p>
+          <a:p>
+            <a:pPr algn="l">
+              <a:spcAft>
+                <a:spcPts val="585"/>
+              </a:spcAft>
+            </a:pPr>
+            <a:r>
+              <a:rPr sz="1300" b="0" i="0">
+                <a:solidFill>
+                  <a:srgbClr val="1C1B19"/>
+                </a:solidFill>
+                <a:latin typeface="Source Serif 4"/>
+              </a:rPr>
+              <a:t/>
+            </a:r>
+          </a:p>
+          <a:p>
+            <a:pPr algn="l">
+              <a:spcAft>
+                <a:spcPts val="585"/>
+              </a:spcAft>
+            </a:pPr>
+            <a:r>
+              <a:rPr sz="1500" b="1" i="0">
+                <a:solidFill>
+                  <a:srgbClr val="1C1B19"/>
+                </a:solidFill>
+                <a:latin typeface="Source Serif 4"/>
+              </a:rPr>
+              <a:t>Don't push repair.</a:t>
+            </a:r>
+          </a:p>
+          <a:p>
+            <a:pPr algn="l">
+              <a:spcAft>
+                <a:spcPts val="585"/>
+              </a:spcAft>
+            </a:pPr>
+            <a:r>
+              <a:rPr sz="1300" b="0" i="0">
+                <a:solidFill>
+                  <a:srgbClr val="1C1B19"/>
+                </a:solidFill>
+                <a:latin typeface="Source Serif 4"/>
+              </a:rPr>
+              <a:t>Some friendships should end. Present repair, reset and release as equal choices, and never suggest a student owes anyone a second chance.</a:t>
+            </a:r>
+          </a:p>
+          <a:p>
+            <a:pPr algn="l">
+              <a:spcAft>
+                <a:spcPts val="585"/>
+              </a:spcAft>
+            </a:pPr>
+            <a:r>
+              <a:rPr sz="1300" b="0" i="0">
+                <a:solidFill>
+                  <a:srgbClr val="1C1B19"/>
+                </a:solidFill>
+                <a:latin typeface="Source Serif 4"/>
+              </a:rPr>
+              <a:t/>
+            </a:r>
+          </a:p>
+          <a:p>
+            <a:pPr algn="l">
+              <a:spcAft>
+                <a:spcPts val="585"/>
+              </a:spcAft>
+            </a:pPr>
+            <a:r>
+              <a:rPr sz="1500" b="1" i="0">
+                <a:solidFill>
+                  <a:srgbClr val="1C1B19"/>
+                </a:solidFill>
+                <a:latin typeface="Source Serif 4"/>
+              </a:rPr>
+              <a:t>Unsafe friendships go to an adult.</a:t>
+            </a:r>
+          </a:p>
+          <a:p>
+            <a:pPr algn="l">
+              <a:spcAft>
+                <a:spcPts val="585"/>
+              </a:spcAft>
+            </a:pPr>
+            <a:r>
+              <a:rPr sz="1300" b="0" i="0">
+                <a:solidFill>
+                  <a:srgbClr val="1C1B19"/>
+                </a:solidFill>
+                <a:latin typeface="Source Serif 4"/>
+              </a:rPr>
+              <a:t>If a student says a friendship was controlling or threatening, or that an old group is targeting them online or in person, thank them, move on, and follow up privately that day with a counselor or dean.</a:t>
+            </a:r>
+          </a:p>
+          <a:p>
+            <a:pPr algn="l">
+              <a:spcAft>
+                <a:spcPts val="585"/>
+              </a:spcAft>
+            </a:pPr>
+            <a:r>
+              <a:rPr sz="1300" b="0" i="0">
+                <a:solidFill>
+                  <a:srgbClr val="1C1B19"/>
+                </a:solidFill>
+                <a:latin typeface="Source Serif 4"/>
+              </a:rPr>
+              <a:t/>
+            </a:r>
+          </a:p>
+        </p:txBody>
+      </p:sp>
+      <p:sp>
+        <p:nvSpPr>
+          <p:cNvPr id="6" name="TextBox 5"/>
+          <p:cNvSpPr txBox="1"/>
+          <p:nvPr/>
+        </p:nvSpPr>
+        <p:spPr>
+          <a:xfrm>
+            <a:off x="6217920" y="1463040"/>
+            <a:ext cx="5394960" cy="4937760"/>
+          </a:xfrm>
+          <a:prstGeom prst="rect">
+            <a:avLst/>
+          </a:prstGeom>
+          <a:noFill/>
+        </p:spPr>
+        <p:txBody>
+          <a:bodyPr wrap="square" anchor="t" lIns="0" rIns="0" tIns="0" bIns="0">
+            <a:spAutoFit/>
+          </a:bodyPr>
+          <a:lstStyle/>
+          <a:p>
+            <a:pPr algn="l">
+              <a:spcAft>
+                <a:spcPts val="585"/>
+              </a:spcAft>
+            </a:pPr>
+            <a:r>
+              <a:rPr sz="1500" b="1" i="0">
+                <a:solidFill>
+                  <a:srgbClr val="1C1B19"/>
+                </a:solidFill>
+                <a:latin typeface="Source Serif 4"/>
+              </a:rPr>
+              <a:t>Sadness that lasts goes to a counselor.</a:t>
+            </a:r>
+          </a:p>
+          <a:p>
+            <a:pPr algn="l">
+              <a:spcAft>
+                <a:spcPts val="585"/>
+              </a:spcAft>
+            </a:pPr>
+            <a:r>
+              <a:rPr sz="1300" b="0" i="0">
+                <a:solidFill>
+                  <a:srgbClr val="1C1B19"/>
+                </a:solidFill>
+                <a:latin typeface="Source Serif 4"/>
+              </a:rPr>
+              <a:t>The student page names sadness most days for more than two weeks, and big changes in sleep, eating or grades. Don't ask about these in the circle. Any disclosure goes to a counselor the same day.</a:t>
+            </a:r>
+          </a:p>
+          <a:p>
+            <a:pPr algn="l">
+              <a:spcAft>
+                <a:spcPts val="585"/>
+              </a:spcAft>
+            </a:pPr>
+            <a:r>
+              <a:rPr sz="1300" b="0" i="0">
+                <a:solidFill>
+                  <a:srgbClr val="1C1B19"/>
+                </a:solidFill>
+                <a:latin typeface="Source Serif 4"/>
+              </a:rPr>
+              <a:t/>
+            </a:r>
+          </a:p>
+          <a:p>
+            <a:pPr algn="l">
+              <a:spcAft>
+                <a:spcPts val="585"/>
+              </a:spcAft>
+            </a:pPr>
+            <a:r>
+              <a:rPr sz="1500" b="1" i="0">
+                <a:solidFill>
+                  <a:srgbClr val="1C1B19"/>
+                </a:solidFill>
+                <a:latin typeface="Source Serif 4"/>
+              </a:rPr>
+              <a:t>Leave room for the one who ended it.</a:t>
+            </a:r>
+          </a:p>
+          <a:p>
+            <a:pPr algn="l">
+              <a:spcAft>
+                <a:spcPts val="585"/>
+              </a:spcAft>
+            </a:pPr>
+            <a:r>
+              <a:rPr sz="1300" b="0" i="0">
+                <a:solidFill>
+                  <a:srgbClr val="1C1B19"/>
+                </a:solidFill>
+                <a:latin typeface="Source Serif 4"/>
+              </a:rPr>
+              <a:t>Students who stepped away may feel guilty or get cast as the bad guy. Lena's card gives them a way in: you can know it was right and still miss someone.</a:t>
+            </a:r>
+          </a:p>
+          <a:p>
+            <a:pPr algn="l">
+              <a:spcAft>
+                <a:spcPts val="585"/>
+              </a:spcAft>
+            </a:pPr>
+            <a:r>
+              <a:rPr sz="1300" b="0" i="0">
+                <a:solidFill>
+                  <a:srgbClr val="1C1B19"/>
+                </a:solidFill>
+                <a:latin typeface="Source Serif 4"/>
+              </a:rPr>
+              <a:t/>
+            </a:r>
+          </a:p>
+          <a:p>
+            <a:pPr algn="l">
+              <a:spcAft>
+                <a:spcPts val="585"/>
+              </a:spcAft>
+            </a:pPr>
+            <a:r>
+              <a:rPr sz="1500" b="1" i="0">
+                <a:solidFill>
+                  <a:srgbClr val="1C1B19"/>
+                </a:solidFill>
+                <a:latin typeface="Source Serif 4"/>
+              </a:rPr>
+              <a:t>Keep the brain science light.</a:t>
+            </a:r>
+          </a:p>
+          <a:p>
+            <a:pPr algn="l">
+              <a:spcAft>
+                <a:spcPts val="585"/>
+              </a:spcAft>
+            </a:pPr>
+            <a:r>
+              <a:rPr sz="1300" b="0" i="0">
+                <a:solidFill>
+                  <a:srgbClr val="1C1B19"/>
+                </a:solidFill>
+                <a:latin typeface="Source Serif 4"/>
+              </a:rPr>
+              <a:t>The point is that the hurt is real. Some of the brain findings are debated, so say "researchers found" and skip the anatomy if time is short.</a:t>
+            </a:r>
+          </a:p>
+          <a:p>
+            <a:pPr algn="l">
+              <a:spcAft>
+                <a:spcPts val="585"/>
+              </a:spcAft>
+            </a:pPr>
+            <a:r>
+              <a:rPr sz="1300" b="0" i="0">
+                <a:solidFill>
+                  <a:srgbClr val="1C1B19"/>
+                </a:solidFill>
+                <a:latin typeface="Source Serif 4"/>
+              </a:rPr>
+              <a:t/>
+            </a:r>
+          </a:p>
+        </p:txBody>
+      </p:sp>
+    </p:spTree>
+  </p:cSld>
+  <p:clrMapOvr>
+    <a:masterClrMapping/>
+  </p:clrMapOvr>
+</p:sld>
+</file>
+
+<file path=ppt/slides/slide12.xml><?xml version="1.0" encoding="utf-8"?>
+<p:sld xmlns:a="http://schemas.openxmlformats.org/drawingml/2006/main" xmlns:p="http://schemas.openxmlformats.org/presentationml/2006/main" xmlns:r="http://schemas.openxmlformats.org/officeDocument/2006/relationships" show="0">
+  <p:cSld>
+    <p:bg>
+      <p:bgPr>
+        <a:solidFill>
+          <a:srgbClr val="EEEBE4"/>
+        </a:solidFill>
+        <a:effectLst/>
+      </p:bgPr>
+    </p:bg>
+    <p:spTree>
+      <p:nvGrpSpPr>
+        <p:cNvPr id="1" name=""/>
+        <p:cNvGrpSpPr/>
+        <p:nvPr/>
+      </p:nvGrpSpPr>
+      <p:grpSpPr/>
+      <p:sp>
+        <p:nvSpPr>
+          <p:cNvPr id="2" name="Rectangle 1"/>
+          <p:cNvSpPr/>
+          <p:nvPr/>
+        </p:nvSpPr>
+        <p:spPr>
+          <a:xfrm>
+            <a:off x="0" y="0"/>
+            <a:ext cx="12191695" cy="384048"/>
+          </a:xfrm>
+          <a:prstGeom prst="rect">
+            <a:avLst/>
+          </a:prstGeom>
+          <a:solidFill>
+            <a:srgbClr val="0B2D5B"/>
+          </a:solidFill>
+          <a:ln>
+            <a:noFill/>
+          </a:ln>
+          <a:effectLst/>
+        </p:spPr>
+        <p:style>
+          <a:lnRef idx="1">
+            <a:schemeClr val="accent1"/>
+          </a:lnRef>
+          <a:fillRef idx="3">
+            <a:schemeClr val="accent1"/>
+          </a:fillRef>
+          <a:effectRef idx="2">
+            <a:schemeClr val="accent1"/>
+          </a:effectRef>
+          <a:fontRef idx="minor">
+            <a:schemeClr val="lt1"/>
+          </a:fontRef>
+        </p:style>
+        <p:txBody>
+          <a:bodyPr rtlCol="0" anchor="ctr"/>
+          <a:lstStyle/>
+          <a:p>
+            <a:pPr algn="ctr"/>
+          </a:p>
+        </p:txBody>
+      </p:sp>
+      <p:sp>
+        <p:nvSpPr>
+          <p:cNvPr id="3" name="TextBox 2"/>
+          <p:cNvSpPr txBox="1"/>
+          <p:nvPr/>
+        </p:nvSpPr>
+        <p:spPr>
+          <a:xfrm>
+            <a:off x="548640" y="100584"/>
+            <a:ext cx="10972800" cy="274320"/>
+          </a:xfrm>
+          <a:prstGeom prst="rect">
+            <a:avLst/>
+          </a:prstGeom>
+          <a:noFill/>
+        </p:spPr>
+        <p:txBody>
+          <a:bodyPr wrap="square" anchor="t" lIns="0" rIns="0" tIns="0" bIns="0">
+            <a:spAutoFit/>
+          </a:bodyPr>
+          <a:lstStyle/>
+          <a:p>
+            <a:pPr algn="l">
+              <a:spcAft>
+                <a:spcPts val="495"/>
+              </a:spcAft>
+            </a:pPr>
+            <a:r>
+              <a:rPr sz="1100" b="1" i="0">
+                <a:solidFill>
+                  <a:srgbClr val="FFFFFF"/>
+                </a:solidFill>
+                <a:latin typeface="Inter Tight"/>
+              </a:rPr>
+              <a:t>TEACHER PAGE  ·  skipped when you present  ·  Every student in the room</a:t>
+            </a:r>
+          </a:p>
+        </p:txBody>
+      </p:sp>
+      <p:sp>
+        <p:nvSpPr>
+          <p:cNvPr id="4" name="TextBox 3"/>
+          <p:cNvSpPr txBox="1"/>
+          <p:nvPr/>
+        </p:nvSpPr>
+        <p:spPr>
+          <a:xfrm>
+            <a:off x="548640" y="685800"/>
+            <a:ext cx="10972800" cy="640080"/>
+          </a:xfrm>
+          <a:prstGeom prst="rect">
+            <a:avLst/>
+          </a:prstGeom>
+          <a:noFill/>
+        </p:spPr>
+        <p:txBody>
+          <a:bodyPr wrap="square" anchor="t" lIns="0" rIns="0" tIns="0" bIns="0">
+            <a:spAutoFit/>
+          </a:bodyPr>
+          <a:lstStyle/>
+          <a:p>
+            <a:pPr algn="l">
+              <a:spcAft>
+                <a:spcPts val="1350"/>
+              </a:spcAft>
+            </a:pPr>
+            <a:r>
+              <a:rPr sz="3000" b="1" i="0">
+                <a:solidFill>
+                  <a:srgbClr val="1C1B19"/>
+                </a:solidFill>
+                <a:latin typeface="Source Serif 4"/>
+              </a:rPr>
+              <a:t>Every student in the room</a:t>
+            </a:r>
+          </a:p>
+        </p:txBody>
+      </p:sp>
+      <p:sp>
+        <p:nvSpPr>
+          <p:cNvPr id="5" name="TextBox 4"/>
+          <p:cNvSpPr txBox="1"/>
+          <p:nvPr/>
+        </p:nvSpPr>
+        <p:spPr>
+          <a:xfrm>
+            <a:off x="548640" y="1325880"/>
+            <a:ext cx="10972800" cy="365760"/>
+          </a:xfrm>
+          <a:prstGeom prst="rect">
+            <a:avLst/>
+          </a:prstGeom>
+          <a:noFill/>
+        </p:spPr>
+        <p:txBody>
+          <a:bodyPr wrap="square" anchor="t" lIns="0" rIns="0" tIns="0" bIns="0">
+            <a:spAutoFit/>
+          </a:bodyPr>
+          <a:lstStyle/>
+          <a:p>
+            <a:pPr algn="l">
+              <a:spcAft>
+                <a:spcPts val="630"/>
+              </a:spcAft>
+            </a:pPr>
+            <a:r>
+              <a:rPr sz="1400" b="0" i="0">
+                <a:solidFill>
+                  <a:srgbClr val="5D5A54"/>
+                </a:solidFill>
+                <a:latin typeface="Inter Tight"/>
+              </a:rPr>
+              <a:t>Culture, family, identity, ability and money: what to keep in mind for this topic.</a:t>
+            </a:r>
+          </a:p>
+        </p:txBody>
+      </p:sp>
+      <p:sp>
+        <p:nvSpPr>
+          <p:cNvPr id="6" name="TextBox 5"/>
+          <p:cNvSpPr txBox="1"/>
+          <p:nvPr/>
+        </p:nvSpPr>
+        <p:spPr>
+          <a:xfrm>
+            <a:off x="548640" y="1828800"/>
+            <a:ext cx="5394960" cy="4572000"/>
+          </a:xfrm>
+          <a:prstGeom prst="rect">
+            <a:avLst/>
+          </a:prstGeom>
+          <a:noFill/>
+        </p:spPr>
+        <p:txBody>
+          <a:bodyPr wrap="square" anchor="t" lIns="0" rIns="0" tIns="0" bIns="0">
+            <a:spAutoFit/>
+          </a:bodyPr>
+          <a:lstStyle/>
+          <a:p>
+            <a:pPr algn="l">
+              <a:spcAft>
+                <a:spcPts val="585"/>
+              </a:spcAft>
+            </a:pPr>
+            <a:r>
+              <a:rPr sz="1500" b="1" i="0">
+                <a:solidFill>
+                  <a:srgbClr val="1C1B19"/>
+                </a:solidFill>
+                <a:latin typeface="Source Serif 4"/>
+              </a:rPr>
+              <a:t>It ripples through shared communities.</a:t>
+            </a:r>
+          </a:p>
+          <a:p>
+            <a:pPr algn="l">
+              <a:spcAft>
+                <a:spcPts val="585"/>
+              </a:spcAft>
+            </a:pPr>
+            <a:r>
+              <a:rPr sz="1300" b="0" i="0">
+                <a:solidFill>
+                  <a:srgbClr val="1C1B19"/>
+                </a:solidFill>
+                <a:latin typeface="Source Serif 4"/>
+              </a:rPr>
+              <a:t>Two friends may share a religious community, a neighborhood, a team, or families who know each other. An ending can change where a student feels comfortable going, including a place of worship. Name that as part of the loss.</a:t>
+            </a:r>
+          </a:p>
+          <a:p>
+            <a:pPr algn="l">
+              <a:spcAft>
+                <a:spcPts val="585"/>
+              </a:spcAft>
+            </a:pPr>
+            <a:r>
+              <a:rPr sz="1300" b="0" i="0">
+                <a:solidFill>
+                  <a:srgbClr val="1C1B19"/>
+                </a:solidFill>
+                <a:latin typeface="Source Serif 4"/>
+              </a:rPr>
+              <a:t/>
+            </a:r>
+          </a:p>
+          <a:p>
+            <a:pPr algn="l">
+              <a:spcAft>
+                <a:spcPts val="585"/>
+              </a:spcAft>
+            </a:pPr>
+            <a:r>
+              <a:rPr sz="1500" b="1" i="0">
+                <a:solidFill>
+                  <a:srgbClr val="1C1B19"/>
+                </a:solidFill>
+                <a:latin typeface="Source Serif 4"/>
+              </a:rPr>
+              <a:t>Who students can tell.</a:t>
+            </a:r>
+          </a:p>
+          <a:p>
+            <a:pPr algn="l">
+              <a:spcAft>
+                <a:spcPts val="585"/>
+              </a:spcAft>
+            </a:pPr>
+            <a:r>
+              <a:rPr sz="1300" b="0" i="0">
+                <a:solidFill>
+                  <a:srgbClr val="1C1B19"/>
+                </a:solidFill>
+                <a:latin typeface="Source Serif 4"/>
+              </a:rPr>
+              <a:t>"Tell one person the real version" can mean a sibling, a cousin, a grandparent, a coach, or a parent or caregiver. Not every student can bring this home, so always name a counselor too.</a:t>
+            </a:r>
+          </a:p>
+          <a:p>
+            <a:pPr algn="l">
+              <a:spcAft>
+                <a:spcPts val="585"/>
+              </a:spcAft>
+            </a:pPr>
+            <a:r>
+              <a:rPr sz="1300" b="0" i="0">
+                <a:solidFill>
+                  <a:srgbClr val="1C1B19"/>
+                </a:solidFill>
+                <a:latin typeface="Source Serif 4"/>
+              </a:rPr>
+              <a:t/>
+            </a:r>
+          </a:p>
+          <a:p>
+            <a:pPr algn="l">
+              <a:spcAft>
+                <a:spcPts val="585"/>
+              </a:spcAft>
+            </a:pPr>
+            <a:r>
+              <a:rPr sz="1500" b="1" i="0">
+                <a:solidFill>
+                  <a:srgbClr val="1C1B19"/>
+                </a:solidFill>
+                <a:latin typeface="Source Serif 4"/>
+              </a:rPr>
+              <a:t>Identity and friendships.</a:t>
+            </a:r>
+          </a:p>
+          <a:p>
+            <a:pPr algn="l">
+              <a:spcAft>
+                <a:spcPts val="585"/>
+              </a:spcAft>
+            </a:pPr>
+            <a:r>
+              <a:rPr sz="1300" b="0" i="0">
+                <a:solidFill>
+                  <a:srgbClr val="1C1B19"/>
+                </a:solidFill>
+                <a:latin typeface="Source Serif 4"/>
+              </a:rPr>
+              <a:t>Some friendships end around coming out, or around how a friend reacted to someone's identity. Don't ask why any friendship ended. If a student was outed or is being targeted for who they are, that's a counselor conversation that day.</a:t>
+            </a:r>
+          </a:p>
+          <a:p>
+            <a:pPr algn="l">
+              <a:spcAft>
+                <a:spcPts val="585"/>
+              </a:spcAft>
+            </a:pPr>
+            <a:r>
+              <a:rPr sz="1300" b="0" i="0">
+                <a:solidFill>
+                  <a:srgbClr val="1C1B19"/>
+                </a:solidFill>
+                <a:latin typeface="Source Serif 4"/>
+              </a:rPr>
+              <a:t/>
+            </a:r>
+          </a:p>
+        </p:txBody>
+      </p:sp>
+      <p:sp>
+        <p:nvSpPr>
+          <p:cNvPr id="7" name="TextBox 6"/>
+          <p:cNvSpPr txBox="1"/>
+          <p:nvPr/>
+        </p:nvSpPr>
+        <p:spPr>
+          <a:xfrm>
+            <a:off x="6217920" y="1828800"/>
+            <a:ext cx="5394960" cy="4572000"/>
+          </a:xfrm>
+          <a:prstGeom prst="rect">
+            <a:avLst/>
+          </a:prstGeom>
+          <a:noFill/>
+        </p:spPr>
+        <p:txBody>
+          <a:bodyPr wrap="square" anchor="t" lIns="0" rIns="0" tIns="0" bIns="0">
+            <a:spAutoFit/>
+          </a:bodyPr>
+          <a:lstStyle/>
+          <a:p>
+            <a:pPr algn="l">
+              <a:spcAft>
+                <a:spcPts val="585"/>
+              </a:spcAft>
+            </a:pPr>
+            <a:r>
+              <a:rPr sz="1500" b="1" i="0">
+                <a:solidFill>
+                  <a:srgbClr val="1C1B19"/>
+                </a:solidFill>
+                <a:latin typeface="Source Serif 4"/>
+              </a:rPr>
+              <a:t>Friendship looks different for different brains.</a:t>
+            </a:r>
+          </a:p>
+          <a:p>
+            <a:pPr algn="l">
+              <a:spcAft>
+                <a:spcPts val="585"/>
+              </a:spcAft>
+            </a:pPr>
+            <a:r>
+              <a:rPr sz="1300" b="0" i="0">
+                <a:solidFill>
+                  <a:srgbClr val="1C1B19"/>
+                </a:solidFill>
+                <a:latin typeface="Source Serif 4"/>
+              </a:rPr>
+              <a:t>Autistic students and students with social anxiety may have fewer close friends, so one ending can take out most of their social world. The run-in plan gives a script. Don't measure a good friend by how social someone is.</a:t>
+            </a:r>
+          </a:p>
+          <a:p>
+            <a:pPr algn="l">
+              <a:spcAft>
+                <a:spcPts val="585"/>
+              </a:spcAft>
+            </a:pPr>
+            <a:r>
+              <a:rPr sz="1300" b="0" i="0">
+                <a:solidFill>
+                  <a:srgbClr val="1C1B19"/>
+                </a:solidFill>
+                <a:latin typeface="Source Serif 4"/>
+              </a:rPr>
+              <a:t/>
+            </a:r>
+          </a:p>
+          <a:p>
+            <a:pPr algn="l">
+              <a:spcAft>
+                <a:spcPts val="585"/>
+              </a:spcAft>
+            </a:pPr>
+            <a:r>
+              <a:rPr sz="1500" b="1" i="0">
+                <a:solidFill>
+                  <a:srgbClr val="1C1B19"/>
+                </a:solidFill>
+                <a:latin typeface="Source Serif 4"/>
+              </a:rPr>
+              <a:t>Anyone can grieve a friendship.</a:t>
+            </a:r>
+          </a:p>
+          <a:p>
+            <a:pPr algn="l">
+              <a:spcAft>
+                <a:spcPts val="585"/>
+              </a:spcAft>
+            </a:pPr>
+            <a:r>
+              <a:rPr sz="1300" b="0" i="0">
+                <a:solidFill>
+                  <a:srgbClr val="1C1B19"/>
+                </a:solidFill>
+                <a:latin typeface="Source Serif 4"/>
+              </a:rPr>
+              <a:t>Students may hear that only girls have friendship drama. Say plainly that losing a close friend hurts anyone, and mix genders in your examples, as Maya and Jordan do.</a:t>
+            </a:r>
+          </a:p>
+          <a:p>
+            <a:pPr algn="l">
+              <a:spcAft>
+                <a:spcPts val="585"/>
+              </a:spcAft>
+            </a:pPr>
+            <a:r>
+              <a:rPr sz="1300" b="0" i="0">
+                <a:solidFill>
+                  <a:srgbClr val="1C1B19"/>
+                </a:solidFill>
+                <a:latin typeface="Source Serif 4"/>
+              </a:rPr>
+              <a:t/>
+            </a:r>
+          </a:p>
+          <a:p>
+            <a:pPr algn="l">
+              <a:spcAft>
+                <a:spcPts val="585"/>
+              </a:spcAft>
+            </a:pPr>
+            <a:r>
+              <a:rPr sz="1500" b="1" i="0">
+                <a:solidFill>
+                  <a:srgbClr val="1C1B19"/>
+                </a:solidFill>
+                <a:latin typeface="Source Serif 4"/>
+              </a:rPr>
+              <a:t>Moving and distance.</a:t>
+            </a:r>
+          </a:p>
+          <a:p>
+            <a:pPr algn="l">
+              <a:spcAft>
+                <a:spcPts val="585"/>
+              </a:spcAft>
+            </a:pPr>
+            <a:r>
+              <a:rPr sz="1300" b="0" i="0">
+                <a:solidFill>
+                  <a:srgbClr val="1C1B19"/>
+                </a:solidFill>
+                <a:latin typeface="Source Serif 4"/>
+              </a:rPr>
+              <a:t>Students who moved schools, cities or countries may have lost friendships to distance, and may be grieving friends who speak another language. Drift counts, and staying in touch across time zones is a real form of repair.</a:t>
+            </a:r>
+          </a:p>
+          <a:p>
+            <a:pPr algn="l">
+              <a:spcAft>
+                <a:spcPts val="585"/>
+              </a:spcAft>
+            </a:pPr>
+            <a:r>
+              <a:rPr sz="1300" b="0" i="0">
+                <a:solidFill>
+                  <a:srgbClr val="1C1B19"/>
+                </a:solidFill>
+                <a:latin typeface="Source Serif 4"/>
+              </a:rPr>
+              <a:t/>
+            </a:r>
+          </a:p>
+        </p:txBody>
+      </p:sp>
+    </p:spTree>
+  </p:cSld>
+  <p:clrMapOvr>
+    <a:masterClrMapping/>
+  </p:clrMapOvr>
+</p:sld>
+</file>
+
+<file path=ppt/slides/slide13.xml><?xml version="1.0" encoding="utf-8"?>
+<p:sld xmlns:a="http://schemas.openxmlformats.org/drawingml/2006/main" xmlns:p="http://schemas.openxmlformats.org/presentationml/2006/main" xmlns:r="http://schemas.openxmlformats.org/officeDocument/2006/relationships" show="0">
+  <p:cSld>
+    <p:bg>
+      <p:bgPr>
+        <a:solidFill>
+          <a:srgbClr val="EEEBE4"/>
+        </a:solidFill>
+        <a:effectLst/>
+      </p:bgPr>
+    </p:bg>
+    <p:spTree>
+      <p:nvGrpSpPr>
+        <p:cNvPr id="1" name=""/>
+        <p:cNvGrpSpPr/>
+        <p:nvPr/>
+      </p:nvGrpSpPr>
+      <p:grpSpPr/>
+      <p:sp>
+        <p:nvSpPr>
+          <p:cNvPr id="2" name="Rectangle 1"/>
+          <p:cNvSpPr/>
+          <p:nvPr/>
+        </p:nvSpPr>
+        <p:spPr>
+          <a:xfrm>
+            <a:off x="0" y="0"/>
+            <a:ext cx="12191695" cy="384048"/>
+          </a:xfrm>
+          <a:prstGeom prst="rect">
+            <a:avLst/>
+          </a:prstGeom>
+          <a:solidFill>
+            <a:srgbClr val="0B2D5B"/>
+          </a:solidFill>
+          <a:ln>
+            <a:noFill/>
+          </a:ln>
+          <a:effectLst/>
+        </p:spPr>
+        <p:style>
+          <a:lnRef idx="1">
+            <a:schemeClr val="accent1"/>
+          </a:lnRef>
+          <a:fillRef idx="3">
+            <a:schemeClr val="accent1"/>
+          </a:fillRef>
+          <a:effectRef idx="2">
+            <a:schemeClr val="accent1"/>
+          </a:effectRef>
+          <a:fontRef idx="minor">
+            <a:schemeClr val="lt1"/>
+          </a:fontRef>
+        </p:style>
+        <p:txBody>
+          <a:bodyPr rtlCol="0" anchor="ctr"/>
+          <a:lstStyle/>
+          <a:p>
+            <a:pPr algn="ctr"/>
+          </a:p>
+        </p:txBody>
+      </p:sp>
+      <p:sp>
+        <p:nvSpPr>
+          <p:cNvPr id="3" name="TextBox 2"/>
+          <p:cNvSpPr txBox="1"/>
+          <p:nvPr/>
+        </p:nvSpPr>
+        <p:spPr>
+          <a:xfrm>
+            <a:off x="548640" y="100584"/>
+            <a:ext cx="10972800" cy="274320"/>
+          </a:xfrm>
+          <a:prstGeom prst="rect">
+            <a:avLst/>
+          </a:prstGeom>
+          <a:noFill/>
+        </p:spPr>
+        <p:txBody>
+          <a:bodyPr wrap="square" anchor="t" lIns="0" rIns="0" tIns="0" bIns="0">
+            <a:spAutoFit/>
+          </a:bodyPr>
+          <a:lstStyle/>
+          <a:p>
+            <a:pPr algn="l">
+              <a:spcAft>
+                <a:spcPts val="495"/>
+              </a:spcAft>
+            </a:pPr>
+            <a:r>
+              <a:rPr sz="1100" b="1" i="0">
+                <a:solidFill>
+                  <a:srgbClr val="FFFFFF"/>
+                </a:solidFill>
+                <a:latin typeface="Inter Tight"/>
+              </a:rPr>
+              <a:t>TEACHER PAGE  ·  skipped when you present  ·  Background</a:t>
+            </a:r>
+          </a:p>
+        </p:txBody>
+      </p:sp>
+      <p:sp>
+        <p:nvSpPr>
+          <p:cNvPr id="4" name="TextBox 3"/>
+          <p:cNvSpPr txBox="1"/>
+          <p:nvPr/>
+        </p:nvSpPr>
+        <p:spPr>
+          <a:xfrm>
+            <a:off x="548640" y="685800"/>
+            <a:ext cx="10972800" cy="640080"/>
+          </a:xfrm>
+          <a:prstGeom prst="rect">
+            <a:avLst/>
+          </a:prstGeom>
+          <a:noFill/>
+        </p:spPr>
+        <p:txBody>
+          <a:bodyPr wrap="square" anchor="t" lIns="0" rIns="0" tIns="0" bIns="0">
+            <a:spAutoFit/>
+          </a:bodyPr>
+          <a:lstStyle/>
+          <a:p>
+            <a:pPr algn="l">
+              <a:spcAft>
+                <a:spcPts val="1350"/>
+              </a:spcAft>
+            </a:pPr>
+            <a:r>
+              <a:rPr sz="3000" b="1" i="0">
+                <a:solidFill>
+                  <a:srgbClr val="1C1B19"/>
+                </a:solidFill>
+                <a:latin typeface="Source Serif 4"/>
+              </a:rPr>
+              <a:t>What the research says</a:t>
+            </a:r>
+          </a:p>
+        </p:txBody>
+      </p:sp>
+      <p:sp>
+        <p:nvSpPr>
+          <p:cNvPr id="5" name="TextBox 4"/>
+          <p:cNvSpPr txBox="1"/>
+          <p:nvPr/>
+        </p:nvSpPr>
+        <p:spPr>
+          <a:xfrm>
+            <a:off x="548640" y="1463040"/>
+            <a:ext cx="5394960" cy="4937760"/>
+          </a:xfrm>
+          <a:prstGeom prst="rect">
+            <a:avLst/>
+          </a:prstGeom>
+          <a:noFill/>
+        </p:spPr>
+        <p:txBody>
+          <a:bodyPr wrap="square" anchor="t" lIns="0" rIns="0" tIns="0" bIns="0">
+            <a:spAutoFit/>
+          </a:bodyPr>
+          <a:lstStyle/>
+          <a:p>
+            <a:pPr algn="l">
+              <a:spcAft>
+                <a:spcPts val="585"/>
+              </a:spcAft>
+            </a:pPr>
+            <a:r>
+              <a:rPr sz="1300" b="0" i="0">
+                <a:solidFill>
+                  <a:srgbClr val="1C1B19"/>
+                </a:solidFill>
+                <a:latin typeface="Source Serif 4"/>
+              </a:rPr>
+              <a:t>People left out of a simple online ball-toss game showed more activity in the dorsal anterior cingulate, a region that also responds to how upsetting physical pain feels. The more it rose, the more upset they said they were.</a:t>
+            </a:r>
+          </a:p>
+          <a:p>
+            <a:pPr algn="l">
+              <a:spcAft>
+                <a:spcPts val="585"/>
+              </a:spcAft>
+            </a:pPr>
+            <a:r>
+              <a:rPr sz="1050" b="0" i="0">
+                <a:solidFill>
+                  <a:srgbClr val="5D5A54"/>
+                </a:solidFill>
+                <a:latin typeface="Inter Tight"/>
+              </a:rPr>
+              <a:t>Eisenberger, Lieberman and Williams, Science, 2003</a:t>
+            </a:r>
+          </a:p>
+          <a:p>
+            <a:pPr algn="l">
+              <a:spcAft>
+                <a:spcPts val="585"/>
+              </a:spcAft>
+            </a:pPr>
+            <a:r>
+              <a:rPr sz="1300" b="0" i="0">
+                <a:solidFill>
+                  <a:srgbClr val="1C1B19"/>
+                </a:solidFill>
+                <a:latin typeface="Source Serif 4"/>
+              </a:rPr>
+              <a:t>In the same study, people with more activity in the right ventrolateral prefrontal cortex reported less distress. It seems to act as a brake, and it's still maturing through the teens.</a:t>
+            </a:r>
+          </a:p>
+          <a:p>
+            <a:pPr algn="l">
+              <a:spcAft>
+                <a:spcPts val="585"/>
+              </a:spcAft>
+            </a:pPr>
+            <a:r>
+              <a:rPr sz="1050" b="0" i="0">
+                <a:solidFill>
+                  <a:srgbClr val="5D5A54"/>
+                </a:solidFill>
+                <a:latin typeface="Inter Tight"/>
+              </a:rPr>
+              <a:t>Eisenberger, Lieberman and Williams, 2003</a:t>
+            </a:r>
+          </a:p>
+          <a:p>
+            <a:pPr algn="l">
+              <a:spcAft>
+                <a:spcPts val="585"/>
+              </a:spcAft>
+            </a:pPr>
+            <a:r>
+              <a:rPr sz="1300" b="0" i="0">
+                <a:solidFill>
+                  <a:srgbClr val="1C1B19"/>
+                </a:solidFill>
+                <a:latin typeface="Source Serif 4"/>
+              </a:rPr>
+              <a:t>When people who had been through an unwanted breakup looked at a photo of their ex, areas that process physical pain became active. Other scientists argue these areas respond to anything intense, so the overlap is debated.</a:t>
+            </a:r>
+          </a:p>
+          <a:p>
+            <a:pPr algn="l">
+              <a:spcAft>
+                <a:spcPts val="585"/>
+              </a:spcAft>
+            </a:pPr>
+            <a:r>
+              <a:rPr sz="1050" b="0" i="0">
+                <a:solidFill>
+                  <a:srgbClr val="5D5A54"/>
+                </a:solidFill>
+                <a:latin typeface="Inter Tight"/>
+              </a:rPr>
+              <a:t>Kross et al., Proceedings of the National Academy of Sciences, 2011</a:t>
+            </a:r>
+          </a:p>
+          <a:p>
+            <a:pPr algn="l">
+              <a:spcAft>
+                <a:spcPts val="585"/>
+              </a:spcAft>
+            </a:pPr>
+            <a:r>
+              <a:rPr sz="1300" b="0" i="0">
+                <a:solidFill>
+                  <a:srgbClr val="1C1B19"/>
+                </a:solidFill>
+                <a:latin typeface="Source Serif 4"/>
+              </a:rPr>
+              <a:t>Putting a feeling into words reduced the amygdala's response and raised activity in the brake region.</a:t>
+            </a:r>
+          </a:p>
+          <a:p>
+            <a:pPr algn="l">
+              <a:spcAft>
+                <a:spcPts val="585"/>
+              </a:spcAft>
+            </a:pPr>
+            <a:r>
+              <a:rPr sz="1050" b="0" i="0">
+                <a:solidFill>
+                  <a:srgbClr val="5D5A54"/>
+                </a:solidFill>
+                <a:latin typeface="Inter Tight"/>
+              </a:rPr>
+              <a:t>Lieberman et al., Psychological Science, 2007</a:t>
+            </a:r>
+          </a:p>
+        </p:txBody>
+      </p:sp>
+      <p:sp>
+        <p:nvSpPr>
+          <p:cNvPr id="6" name="TextBox 5"/>
+          <p:cNvSpPr txBox="1"/>
+          <p:nvPr/>
+        </p:nvSpPr>
+        <p:spPr>
+          <a:xfrm>
+            <a:off x="6217920" y="1463040"/>
+            <a:ext cx="5394960" cy="4937760"/>
+          </a:xfrm>
+          <a:prstGeom prst="rect">
+            <a:avLst/>
+          </a:prstGeom>
+          <a:noFill/>
+        </p:spPr>
+        <p:txBody>
+          <a:bodyPr wrap="square" anchor="t" lIns="0" rIns="0" tIns="0" bIns="0">
+            <a:spAutoFit/>
+          </a:bodyPr>
+          <a:lstStyle/>
+          <a:p>
+            <a:pPr algn="l">
+              <a:spcAft>
+                <a:spcPts val="585"/>
+              </a:spcAft>
+            </a:pPr>
+            <a:r>
+              <a:rPr sz="1300" b="0" i="0">
+                <a:solidFill>
+                  <a:srgbClr val="1C1B19"/>
+                </a:solidFill>
+                <a:latin typeface="Source Serif 4"/>
+              </a:rPr>
+              <a:t>Researchers followed 410 students from seventh grade through twelfth. Fewer than 1 in 4 seventh-grade friendships lasted to the next school year, and about 1 in 100 made it to senior year.</a:t>
+            </a:r>
+          </a:p>
+          <a:p>
+            <a:pPr algn="l">
+              <a:spcAft>
+                <a:spcPts val="585"/>
+              </a:spcAft>
+            </a:pPr>
+            <a:r>
+              <a:rPr sz="1050" b="0" i="0">
+                <a:solidFill>
+                  <a:srgbClr val="5D5A54"/>
+                </a:solidFill>
+                <a:latin typeface="Inter Tight"/>
+              </a:rPr>
+              <a:t>Hartl, Laursen and Cillessen, Psychological Science, 2015</a:t>
+            </a:r>
+          </a:p>
+          <a:p>
+            <a:pPr algn="l">
+              <a:spcAft>
+                <a:spcPts val="585"/>
+              </a:spcAft>
+            </a:pPr>
+            <a:r>
+              <a:rPr sz="1300" b="0" i="0">
+                <a:solidFill>
+                  <a:srgbClr val="1C1B19"/>
+                </a:solidFill>
+                <a:latin typeface="Source Serif 4"/>
+              </a:rPr>
+              <a:t>Friendships most often ended when the two people grew different, in grades, popularity, aggression, or gender.</a:t>
+            </a:r>
+          </a:p>
+          <a:p>
+            <a:pPr algn="l">
+              <a:spcAft>
+                <a:spcPts val="585"/>
+              </a:spcAft>
+            </a:pPr>
+            <a:r>
+              <a:rPr sz="1050" b="0" i="0">
+                <a:solidFill>
+                  <a:srgbClr val="5D5A54"/>
+                </a:solidFill>
+                <a:latin typeface="Inter Tight"/>
+              </a:rPr>
+              <a:t>Hartl, Laursen and Cillessen, 2015</a:t>
+            </a:r>
+          </a:p>
+          <a:p>
+            <a:pPr algn="l">
+              <a:spcAft>
+                <a:spcPts val="585"/>
+              </a:spcAft>
+            </a:pPr>
+            <a:r>
+              <a:rPr sz="1300" b="0" i="0">
+                <a:solidFill>
+                  <a:srgbClr val="1C1B19"/>
+                </a:solidFill>
+                <a:latin typeface="Source Serif 4"/>
+              </a:rPr>
+              <a:t>Writing about a painful experience for a few short sessions is linked with better health and mood afterward. The effects are modest, and they hold up across many studies.</a:t>
+            </a:r>
+          </a:p>
+          <a:p>
+            <a:pPr algn="l">
+              <a:spcAft>
+                <a:spcPts val="585"/>
+              </a:spcAft>
+            </a:pPr>
+            <a:r>
+              <a:rPr sz="1050" b="0" i="0">
+                <a:solidFill>
+                  <a:srgbClr val="5D5A54"/>
+                </a:solidFill>
+                <a:latin typeface="Inter Tight"/>
+              </a:rPr>
+              <a:t>Pennebaker, Psychological Science, 1997</a:t>
+            </a:r>
+          </a:p>
+        </p:txBody>
+      </p:sp>
+    </p:spTree>
+  </p:cSld>
+  <p:clrMapOvr>
+    <a:masterClrMapping/>
+  </p:clrMapOvr>
+</p:sld>
+</file>
+
+<file path=ppt/slides/slide2.xml><?xml version="1.0" encoding="utf-8"?>
+<p:sld xmlns:a="http://schemas.openxmlformats.org/drawingml/2006/main" xmlns:p="http://schemas.openxmlformats.org/presentationml/2006/main" xmlns:r="http://schemas.openxmlformats.org/officeDocument/2006/relationships">
+  <p:cSld>
+    <p:bg>
+      <p:bgPr>
+        <a:solidFill>
+          <a:srgbClr val="0B2D5B"/>
+        </a:solidFill>
+        <a:effectLst/>
+      </p:bgPr>
+    </p:bg>
+    <p:spTree>
+      <p:nvGrpSpPr>
+        <p:cNvPr id="1" name=""/>
+        <p:cNvGrpSpPr/>
+        <p:nvPr/>
+      </p:nvGrpSpPr>
+      <p:grpSpPr/>
+      <p:sp>
+        <p:nvSpPr>
+          <p:cNvPr id="2" name="Rectangle 1"/>
+          <p:cNvSpPr/>
+          <p:nvPr/>
+        </p:nvSpPr>
+        <p:spPr>
+          <a:xfrm>
+            <a:off x="548640" y="502920"/>
+            <a:ext cx="457200" cy="54864"/>
+          </a:xfrm>
+          <a:prstGeom prst="rect">
+            <a:avLst/>
+          </a:prstGeom>
+          <a:solidFill>
+            <a:srgbClr val="F47B20"/>
+          </a:solidFill>
+          <a:ln>
+            <a:noFill/>
+          </a:ln>
+          <a:effectLst/>
+        </p:spPr>
+        <p:style>
+          <a:lnRef idx="1">
+            <a:schemeClr val="accent1"/>
+          </a:lnRef>
+          <a:fillRef idx="3">
+            <a:schemeClr val="accent1"/>
+          </a:fillRef>
+          <a:effectRef idx="2">
+            <a:schemeClr val="accent1"/>
+          </a:effectRef>
+          <a:fontRef idx="minor">
+            <a:schemeClr val="lt1"/>
+          </a:fontRef>
+        </p:style>
+        <p:txBody>
+          <a:bodyPr rtlCol="0" anchor="ctr"/>
+          <a:lstStyle/>
+          <a:p>
+            <a:pPr algn="ctr"/>
+          </a:p>
+        </p:txBody>
+      </p:sp>
+      <p:sp>
+        <p:nvSpPr>
+          <p:cNvPr id="3" name="TextBox 2"/>
+          <p:cNvSpPr txBox="1"/>
+          <p:nvPr/>
+        </p:nvSpPr>
+        <p:spPr>
+          <a:xfrm>
+            <a:off x="1143000" y="393192"/>
+            <a:ext cx="8229600" cy="274320"/>
+          </a:xfrm>
+          <a:prstGeom prst="rect">
+            <a:avLst/>
+          </a:prstGeom>
+          <a:noFill/>
+        </p:spPr>
+        <p:txBody>
+          <a:bodyPr wrap="square" anchor="t" lIns="0" rIns="0" tIns="0" bIns="0">
+            <a:spAutoFit/>
+          </a:bodyPr>
+          <a:lstStyle/>
+          <a:p>
+            <a:pPr algn="l">
+              <a:spcAft>
+                <a:spcPts val="540"/>
+              </a:spcAft>
+            </a:pPr>
+            <a:r>
+              <a:rPr sz="1200" b="1" i="0">
+                <a:solidFill>
+                  <a:srgbClr val="5D5A54"/>
+                </a:solidFill>
+                <a:latin typeface="Inter Tight"/>
+              </a:rPr>
+              <a:t>FRIENDSHIP BREAKUPS</a:t>
+            </a:r>
+          </a:p>
+        </p:txBody>
+      </p:sp>
+      <p:sp>
+        <p:nvSpPr>
+          <p:cNvPr id="4" name="TextBox 3"/>
+          <p:cNvSpPr txBox="1"/>
+          <p:nvPr/>
+        </p:nvSpPr>
+        <p:spPr>
+          <a:xfrm>
+            <a:off x="8229600" y="6400800"/>
+            <a:ext cx="3410712" cy="274320"/>
+          </a:xfrm>
+          <a:prstGeom prst="rect">
+            <a:avLst/>
+          </a:prstGeom>
+          <a:noFill/>
+        </p:spPr>
+        <p:txBody>
+          <a:bodyPr wrap="square" anchor="t" lIns="0" rIns="0" tIns="0" bIns="0">
+            <a:spAutoFit/>
+          </a:bodyPr>
+          <a:lstStyle/>
+          <a:p>
+            <a:pPr algn="r">
+              <a:spcAft>
+                <a:spcPts val="450"/>
+              </a:spcAft>
+            </a:pPr>
+            <a:r>
+              <a:rPr sz="1000" b="0" i="0">
+                <a:solidFill>
+                  <a:srgbClr val="5D5A54"/>
+                </a:solidFill>
+                <a:latin typeface="Inter Tight"/>
+              </a:rPr>
+              <a:t>Beaver Counseling</a:t>
+            </a:r>
+          </a:p>
+        </p:txBody>
+      </p:sp>
+      <p:sp>
+        <p:nvSpPr>
+          <p:cNvPr id="5" name="TextBox 4"/>
+          <p:cNvSpPr txBox="1"/>
+          <p:nvPr/>
+        </p:nvSpPr>
+        <p:spPr>
+          <a:xfrm>
+            <a:off x="822960" y="2011680"/>
+            <a:ext cx="10515600" cy="1463040"/>
+          </a:xfrm>
+          <a:prstGeom prst="rect">
+            <a:avLst/>
+          </a:prstGeom>
+          <a:noFill/>
+        </p:spPr>
+        <p:txBody>
+          <a:bodyPr wrap="square" anchor="b" lIns="0" rIns="0" tIns="0" bIns="0">
+            <a:spAutoFit/>
+          </a:bodyPr>
+          <a:lstStyle/>
+          <a:p>
+            <a:pPr algn="l">
+              <a:spcAft>
+                <a:spcPts val="2700"/>
+              </a:spcAft>
+            </a:pPr>
+            <a:r>
+              <a:rPr sz="6000" b="1" i="0">
+                <a:solidFill>
+                  <a:srgbClr val="FFFFFF"/>
+                </a:solidFill>
+                <a:latin typeface="Source Serif 4"/>
+              </a:rPr>
+              <a:t>Friendship Breakups</a:t>
+            </a:r>
+          </a:p>
+        </p:txBody>
+      </p:sp>
+      <p:sp>
+        <p:nvSpPr>
+          <p:cNvPr id="6" name="TextBox 5"/>
+          <p:cNvSpPr txBox="1"/>
+          <p:nvPr/>
+        </p:nvSpPr>
+        <p:spPr>
+          <a:xfrm>
+            <a:off x="822960" y="3611880"/>
+            <a:ext cx="10515600" cy="914400"/>
+          </a:xfrm>
+          <a:prstGeom prst="rect">
+            <a:avLst/>
+          </a:prstGeom>
+          <a:noFill/>
+        </p:spPr>
+        <p:txBody>
+          <a:bodyPr wrap="square" anchor="t" lIns="0" rIns="0" tIns="0" bIns="0">
+            <a:spAutoFit/>
+          </a:bodyPr>
+          <a:lstStyle/>
+          <a:p>
+            <a:pPr algn="l">
+              <a:spcAft>
+                <a:spcPts val="1080"/>
+              </a:spcAft>
+            </a:pPr>
+            <a:r>
+              <a:rPr sz="2400" b="0" i="1">
+                <a:solidFill>
+                  <a:srgbClr val="E8E4DA"/>
+                </a:solidFill>
+                <a:latin typeface="Source Serif 4"/>
+              </a:rPr>
+              <a:t>Nobody died. It still feels like grief.</a:t>
+            </a:r>
+          </a:p>
+        </p:txBody>
+      </p:sp>
+      <p:sp>
+        <p:nvSpPr>
+          <p:cNvPr id="7" name="TextBox 6"/>
+          <p:cNvSpPr txBox="1"/>
+          <p:nvPr/>
+        </p:nvSpPr>
+        <p:spPr>
+          <a:xfrm>
+            <a:off x="822960" y="6035040"/>
+            <a:ext cx="7315200" cy="365760"/>
+          </a:xfrm>
+          <a:prstGeom prst="rect">
+            <a:avLst/>
+          </a:prstGeom>
+          <a:noFill/>
+        </p:spPr>
+        <p:txBody>
+          <a:bodyPr wrap="square" anchor="t" lIns="0" rIns="0" tIns="0" bIns="0">
+            <a:spAutoFit/>
+          </a:bodyPr>
+          <a:lstStyle/>
+          <a:p>
+            <a:pPr algn="l">
+              <a:spcAft>
+                <a:spcPts val="585"/>
+              </a:spcAft>
+            </a:pPr>
+            <a:r>
+              <a:rPr sz="1300" b="0" i="0">
+                <a:solidFill>
+                  <a:srgbClr val="E8E4DA"/>
+                </a:solidFill>
+                <a:latin typeface="Inter Tight"/>
+              </a:rPr>
+              <a:t>Beaver Upper School · Counseling</a:t>
+            </a:r>
+          </a:p>
+        </p:txBody>
+      </p:sp>
+    </p:spTree>
+  </p:cSld>
+  <p:clrMapOvr>
+    <a:masterClrMapping/>
+  </p:clrMapOvr>
+</p:sld>
+</file>
+
+<file path=ppt/slides/slide3.xml><?xml version="1.0" encoding="utf-8"?>
 <p:sld xmlns:a="http://schemas.openxmlformats.org/drawingml/2006/main" xmlns:p="http://schemas.openxmlformats.org/presentationml/2006/main" xmlns:r="http://schemas.openxmlformats.org/officeDocument/2006/relationships">
   <p:cSld>
     <p:bg>
@@ -4699,7 +6746,7 @@
                 </a:solidFill>
                 <a:latin typeface="Inter Tight"/>
               </a:rPr>
-              <a:t>REPAIR, RESET, OR RELEASE?</a:t>
+              <a:t>THE GUESS</a:t>
             </a:r>
           </a:p>
         </p:txBody>
@@ -4745,64 +6792,23 @@
       </p:sp>
       <p:sp>
         <p:nvSpPr>
-          <p:cNvPr id="5" name="TextBox 4"/>
-          <p:cNvSpPr txBox="1"/>
-          <p:nvPr/>
-        </p:nvSpPr>
-        <p:spPr>
-          <a:xfrm>
-            <a:off x="822960" y="1005840"/>
-            <a:ext cx="10515600" cy="914400"/>
-          </a:xfrm>
-          <a:prstGeom prst="rect">
-            <a:avLst/>
-          </a:prstGeom>
-          <a:noFill/>
-        </p:spPr>
-        <p:txBody>
-          <a:bodyPr wrap="square" anchor="t" lIns="0" rIns="0" tIns="0" bIns="0">
-            <a:spAutoFit/>
-          </a:bodyPr>
-          <a:lstStyle/>
-          <a:p>
-            <a:pPr algn="l">
-              <a:spcAft>
-                <a:spcPts val="1530"/>
-              </a:spcAft>
-            </a:pPr>
-            <a:r>
-              <a:rPr sz="3400" b="1" i="0">
-                <a:solidFill>
-                  <a:srgbClr val="1C1B19"/>
-                </a:solidFill>
-                <a:latin typeface="Source Serif 4"/>
-              </a:rPr>
-              <a:t>Three situations. More than one answer can work.</a:t>
-            </a:r>
-          </a:p>
-        </p:txBody>
-      </p:sp>
-      <p:sp>
-        <p:nvSpPr>
-          <p:cNvPr id="6" name="Rectangle 5"/>
+          <p:cNvPr id="5" name="Rectangle 4"/>
           <p:cNvSpPr/>
           <p:nvPr/>
         </p:nvSpPr>
         <p:spPr>
           <a:xfrm>
-            <a:off x="822960" y="2103120"/>
-            <a:ext cx="3322320" cy="3840480"/>
+            <a:off x="822960" y="1371600"/>
+            <a:ext cx="73152" cy="3566160"/>
           </a:xfrm>
           <a:prstGeom prst="rect">
             <a:avLst/>
           </a:prstGeom>
           <a:solidFill>
-            <a:srgbClr val="FFFFFF"/>
+            <a:srgbClr val="F47B20"/>
           </a:solidFill>
-          <a:ln w="15875">
-            <a:solidFill>
-              <a:srgbClr val="D8D2C6"/>
-            </a:solidFill>
+          <a:ln>
+            <a:noFill/>
           </a:ln>
           <a:effectLst/>
         </p:spPr>
@@ -4830,14 +6836,53 @@
       </p:sp>
       <p:sp>
         <p:nvSpPr>
+          <p:cNvPr id="6" name="TextBox 5"/>
+          <p:cNvSpPr txBox="1"/>
+          <p:nvPr/>
+        </p:nvSpPr>
+        <p:spPr>
+          <a:xfrm>
+            <a:off x="1188720" y="1371600"/>
+            <a:ext cx="10058400" cy="3566160"/>
+          </a:xfrm>
+          <a:prstGeom prst="rect">
+            <a:avLst/>
+          </a:prstGeom>
+          <a:noFill/>
+        </p:spPr>
+        <p:txBody>
+          <a:bodyPr wrap="square" anchor="ctr" lIns="0" rIns="0" tIns="0" bIns="0">
+            <a:spAutoFit/>
+          </a:bodyPr>
+          <a:lstStyle/>
+          <a:p>
+            <a:pPr algn="l">
+              <a:spcAft>
+                <a:spcPts val="1800"/>
+              </a:spcAft>
+            </a:pPr>
+            <a:r>
+              <a:rPr sz="4000" b="0" i="1">
+                <a:solidFill>
+                  <a:srgbClr val="1C1B19"/>
+                </a:solidFill>
+                <a:latin typeface="Source Serif 4"/>
+              </a:rPr>
+              <a:t>100 friendships start in 7th grade. How many last to senior year?</a:t>
+            </a:r>
+          </a:p>
+        </p:txBody>
+      </p:sp>
+      <p:sp>
+        <p:nvSpPr>
           <p:cNvPr id="7" name="TextBox 6"/>
           <p:cNvSpPr txBox="1"/>
           <p:nvPr/>
         </p:nvSpPr>
         <p:spPr>
           <a:xfrm>
-            <a:off x="1051560" y="2286000"/>
-            <a:ext cx="2865120" cy="365760"/>
+            <a:off x="1188720" y="5120640"/>
+            <a:ext cx="10058400" cy="914400"/>
           </a:xfrm>
           <a:prstGeom prst="rect">
             <a:avLst/>
@@ -4852,304 +6897,17 @@
           <a:p>
             <a:pPr algn="l">
               <a:spcAft>
-                <a:spcPts val="585"/>
-              </a:spcAft>
-            </a:pPr>
-            <a:r>
-              <a:rPr sz="1300" b="1" i="0">
-                <a:solidFill>
-                  <a:srgbClr val="0B2D5B"/>
+                <a:spcPts val="810"/>
+              </a:spcAft>
+            </a:pPr>
+            <a:r>
+              <a:rPr sz="1800" b="0" i="0">
+                <a:solidFill>
+                  <a:srgbClr val="5D5A54"/>
                 </a:solidFill>
                 <a:latin typeface="Inter Tight"/>
               </a:rPr>
-              <a:t>MAYA AND JORDAN</a:t>
-            </a:r>
-          </a:p>
-        </p:txBody>
-      </p:sp>
-      <p:sp>
-        <p:nvSpPr>
-          <p:cNvPr id="8" name="TextBox 7"/>
-          <p:cNvSpPr txBox="1"/>
-          <p:nvPr/>
-        </p:nvSpPr>
-        <p:spPr>
-          <a:xfrm>
-            <a:off x="1051560" y="2743200"/>
-            <a:ext cx="2865120" cy="3017520"/>
-          </a:xfrm>
-          <a:prstGeom prst="rect">
-            <a:avLst/>
-          </a:prstGeom>
-          <a:noFill/>
-        </p:spPr>
-        <p:txBody>
-          <a:bodyPr wrap="square" anchor="t" lIns="0" rIns="0" tIns="0" bIns="0">
-            <a:spAutoFit/>
-          </a:bodyPr>
-          <a:lstStyle/>
-          <a:p>
-            <a:pPr algn="l">
-              <a:spcAft>
-                <a:spcPts val="810"/>
-              </a:spcAft>
-            </a:pPr>
-            <a:r>
-              <a:rPr sz="1800" b="0" i="0">
-                <a:solidFill>
-                  <a:srgbClr val="1C1B19"/>
-                </a:solidFill>
-                <a:latin typeface="Source Serif 4"/>
-              </a:rPr>
-              <a:t>Best friends since sixth grade. Junior year, Jordan starts a demanding dual-enrollment program and cancels most plans. Maya feels dropped.</a:t>
-            </a:r>
-          </a:p>
-        </p:txBody>
-      </p:sp>
-      <p:sp>
-        <p:nvSpPr>
-          <p:cNvPr id="9" name="Rectangle 8"/>
-          <p:cNvSpPr/>
-          <p:nvPr/>
-        </p:nvSpPr>
-        <p:spPr>
-          <a:xfrm>
-            <a:off x="4419600" y="2103120"/>
-            <a:ext cx="3322320" cy="3840480"/>
-          </a:xfrm>
-          <a:prstGeom prst="rect">
-            <a:avLst/>
-          </a:prstGeom>
-          <a:solidFill>
-            <a:srgbClr val="FFFFFF"/>
-          </a:solidFill>
-          <a:ln w="15875">
-            <a:solidFill>
-              <a:srgbClr val="D8D2C6"/>
-            </a:solidFill>
-          </a:ln>
-          <a:effectLst/>
-        </p:spPr>
-        <p:style>
-          <a:lnRef idx="1">
-            <a:schemeClr val="accent1"/>
-          </a:lnRef>
-          <a:fillRef idx="3">
-            <a:schemeClr val="accent1"/>
-          </a:fillRef>
-          <a:effectRef idx="2">
-            <a:schemeClr val="accent1"/>
-          </a:effectRef>
-          <a:fontRef idx="minor">
-            <a:schemeClr val="lt1"/>
-          </a:fontRef>
-        </p:style>
-        <p:txBody>
-          <a:bodyPr rtlCol="0" anchor="ctr"/>
-          <a:lstStyle/>
-          <a:p>
-            <a:pPr algn="ctr"/>
-          </a:p>
-        </p:txBody>
-      </p:sp>
-      <p:sp>
-        <p:nvSpPr>
-          <p:cNvPr id="10" name="TextBox 9"/>
-          <p:cNvSpPr txBox="1"/>
-          <p:nvPr/>
-        </p:nvSpPr>
-        <p:spPr>
-          <a:xfrm>
-            <a:off x="4648200" y="2286000"/>
-            <a:ext cx="2865120" cy="365760"/>
-          </a:xfrm>
-          <a:prstGeom prst="rect">
-            <a:avLst/>
-          </a:prstGeom>
-          <a:noFill/>
-        </p:spPr>
-        <p:txBody>
-          <a:bodyPr wrap="square" anchor="t" lIns="0" rIns="0" tIns="0" bIns="0">
-            <a:spAutoFit/>
-          </a:bodyPr>
-          <a:lstStyle/>
-          <a:p>
-            <a:pPr algn="l">
-              <a:spcAft>
-                <a:spcPts val="585"/>
-              </a:spcAft>
-            </a:pPr>
-            <a:r>
-              <a:rPr sz="1300" b="1" i="0">
-                <a:solidFill>
-                  <a:srgbClr val="0B2D5B"/>
-                </a:solidFill>
-                <a:latin typeface="Inter Tight"/>
-              </a:rPr>
-              <a:t>TARIQ</a:t>
-            </a:r>
-          </a:p>
-        </p:txBody>
-      </p:sp>
-      <p:sp>
-        <p:nvSpPr>
-          <p:cNvPr id="11" name="TextBox 10"/>
-          <p:cNvSpPr txBox="1"/>
-          <p:nvPr/>
-        </p:nvSpPr>
-        <p:spPr>
-          <a:xfrm>
-            <a:off x="4648200" y="2743200"/>
-            <a:ext cx="2865120" cy="3017520"/>
-          </a:xfrm>
-          <a:prstGeom prst="rect">
-            <a:avLst/>
-          </a:prstGeom>
-          <a:noFill/>
-        </p:spPr>
-        <p:txBody>
-          <a:bodyPr wrap="square" anchor="t" lIns="0" rIns="0" tIns="0" bIns="0">
-            <a:spAutoFit/>
-          </a:bodyPr>
-          <a:lstStyle/>
-          <a:p>
-            <a:pPr algn="l">
-              <a:spcAft>
-                <a:spcPts val="810"/>
-              </a:spcAft>
-            </a:pPr>
-            <a:r>
-              <a:rPr sz="1800" b="0" i="0">
-                <a:solidFill>
-                  <a:srgbClr val="1C1B19"/>
-                </a:solidFill>
-                <a:latin typeface="Source Serif 4"/>
-              </a:rPr>
-              <a:t>A friend screenshotted a private message Tariq sent about his family and shared it with the group. The friend apologized. Two weeks later, it happened again.</a:t>
-            </a:r>
-          </a:p>
-        </p:txBody>
-      </p:sp>
-      <p:sp>
-        <p:nvSpPr>
-          <p:cNvPr id="12" name="Rectangle 11"/>
-          <p:cNvSpPr/>
-          <p:nvPr/>
-        </p:nvSpPr>
-        <p:spPr>
-          <a:xfrm>
-            <a:off x="8016239" y="2103120"/>
-            <a:ext cx="3322320" cy="3840480"/>
-          </a:xfrm>
-          <a:prstGeom prst="rect">
-            <a:avLst/>
-          </a:prstGeom>
-          <a:solidFill>
-            <a:srgbClr val="FFFFFF"/>
-          </a:solidFill>
-          <a:ln w="15875">
-            <a:solidFill>
-              <a:srgbClr val="D8D2C6"/>
-            </a:solidFill>
-          </a:ln>
-          <a:effectLst/>
-        </p:spPr>
-        <p:style>
-          <a:lnRef idx="1">
-            <a:schemeClr val="accent1"/>
-          </a:lnRef>
-          <a:fillRef idx="3">
-            <a:schemeClr val="accent1"/>
-          </a:fillRef>
-          <a:effectRef idx="2">
-            <a:schemeClr val="accent1"/>
-          </a:effectRef>
-          <a:fontRef idx="minor">
-            <a:schemeClr val="lt1"/>
-          </a:fontRef>
-        </p:style>
-        <p:txBody>
-          <a:bodyPr rtlCol="0" anchor="ctr"/>
-          <a:lstStyle/>
-          <a:p>
-            <a:pPr algn="ctr"/>
-          </a:p>
-        </p:txBody>
-      </p:sp>
-      <p:sp>
-        <p:nvSpPr>
-          <p:cNvPr id="13" name="TextBox 12"/>
-          <p:cNvSpPr txBox="1"/>
-          <p:nvPr/>
-        </p:nvSpPr>
-        <p:spPr>
-          <a:xfrm>
-            <a:off x="8244839" y="2286000"/>
-            <a:ext cx="2865120" cy="365760"/>
-          </a:xfrm>
-          <a:prstGeom prst="rect">
-            <a:avLst/>
-          </a:prstGeom>
-          <a:noFill/>
-        </p:spPr>
-        <p:txBody>
-          <a:bodyPr wrap="square" anchor="t" lIns="0" rIns="0" tIns="0" bIns="0">
-            <a:spAutoFit/>
-          </a:bodyPr>
-          <a:lstStyle/>
-          <a:p>
-            <a:pPr algn="l">
-              <a:spcAft>
-                <a:spcPts val="585"/>
-              </a:spcAft>
-            </a:pPr>
-            <a:r>
-              <a:rPr sz="1300" b="1" i="0">
-                <a:solidFill>
-                  <a:srgbClr val="0B2D5B"/>
-                </a:solidFill>
-                <a:latin typeface="Inter Tight"/>
-              </a:rPr>
-              <a:t>LENA</a:t>
-            </a:r>
-          </a:p>
-        </p:txBody>
-      </p:sp>
-      <p:sp>
-        <p:nvSpPr>
-          <p:cNvPr id="14" name="TextBox 13"/>
-          <p:cNvSpPr txBox="1"/>
-          <p:nvPr/>
-        </p:nvSpPr>
-        <p:spPr>
-          <a:xfrm>
-            <a:off x="8244839" y="2743200"/>
-            <a:ext cx="2865120" cy="3017520"/>
-          </a:xfrm>
-          <a:prstGeom prst="rect">
-            <a:avLst/>
-          </a:prstGeom>
-          <a:noFill/>
-        </p:spPr>
-        <p:txBody>
-          <a:bodyPr wrap="square" anchor="t" lIns="0" rIns="0" tIns="0" bIns="0">
-            <a:spAutoFit/>
-          </a:bodyPr>
-          <a:lstStyle/>
-          <a:p>
-            <a:pPr algn="l">
-              <a:spcAft>
-                <a:spcPts val="810"/>
-              </a:spcAft>
-            </a:pPr>
-            <a:r>
-              <a:rPr sz="1800" b="0" i="0">
-                <a:solidFill>
-                  <a:srgbClr val="1C1B19"/>
-                </a:solidFill>
-                <a:latin typeface="Source Serif 4"/>
-              </a:rPr>
-              <a:t>Ended a friendship that had become draining. Now she feels guilty every time she sees her former friend eating alone.</a:t>
+              <a:t>Write your number on a scrap. No names.</a:t>
             </a:r>
           </a:p>
         </p:txBody>
@@ -5162,7 +6920,7 @@
 </p:sld>
 </file>
 
-<file path=ppt/slides/slide11.xml><?xml version="1.0" encoding="utf-8"?>
+<file path=ppt/slides/slide4.xml><?xml version="1.0" encoding="utf-8"?>
 <p:sld xmlns:a="http://schemas.openxmlformats.org/drawingml/2006/main" xmlns:p="http://schemas.openxmlformats.org/presentationml/2006/main" xmlns:r="http://schemas.openxmlformats.org/officeDocument/2006/relationships">
   <p:cSld>
     <p:bg>
@@ -5258,7 +7016,7 @@
                 </a:solidFill>
                 <a:latin typeface="Inter Tight"/>
               </a:rPr>
-              <a:t>PRIVATE REFLECTION</a:t>
+              <a:t>THE REAL NUMBER</a:t>
             </a:r>
           </a:p>
         </p:txBody>
@@ -5304,45 +7062,40 @@
       </p:sp>
       <p:sp>
         <p:nvSpPr>
-          <p:cNvPr id="5" name="Rectangle 4"/>
-          <p:cNvSpPr/>
+          <p:cNvPr id="5" name="TextBox 4"/>
+          <p:cNvSpPr txBox="1"/>
           <p:nvPr/>
         </p:nvSpPr>
         <p:spPr>
           <a:xfrm>
-            <a:off x="822960" y="1371600"/>
-            <a:ext cx="73152" cy="3566160"/>
-          </a:xfrm>
-          <a:prstGeom prst="rect">
-            <a:avLst/>
-          </a:prstGeom>
-          <a:solidFill>
-            <a:srgbClr val="F47B20"/>
-          </a:solidFill>
-          <a:ln>
-            <a:noFill/>
-          </a:ln>
-          <a:effectLst/>
-        </p:spPr>
-        <p:style>
-          <a:lnRef idx="1">
-            <a:schemeClr val="accent1"/>
-          </a:lnRef>
-          <a:fillRef idx="3">
-            <a:schemeClr val="accent1"/>
-          </a:fillRef>
-          <a:effectRef idx="2">
-            <a:schemeClr val="accent1"/>
-          </a:effectRef>
-          <a:fontRef idx="minor">
-            <a:schemeClr val="lt1"/>
-          </a:fontRef>
-        </p:style>
-        <p:txBody>
-          <a:bodyPr rtlCol="0" anchor="ctr"/>
-          <a:lstStyle/>
-          <a:p>
-            <a:pPr algn="ctr"/>
+            <a:off x="822960" y="1463040"/>
+            <a:ext cx="10515600" cy="3291840"/>
+          </a:xfrm>
+          <a:prstGeom prst="rect">
+            <a:avLst/>
+          </a:prstGeom>
+          <a:noFill/>
+        </p:spPr>
+        <p:txBody>
+          <a:bodyPr wrap="square" anchor="ctr" lIns="0" rIns="0" tIns="0" bIns="0">
+            <a:spAutoFit/>
+          </a:bodyPr>
+          <a:lstStyle/>
+          <a:p>
+            <a:pPr algn="l">
+              <a:spcAft>
+                <a:spcPts val="2070"/>
+              </a:spcAft>
+            </a:pPr>
+            <a:r>
+              <a:rPr sz="4600" b="1" i="0">
+                <a:solidFill>
+                  <a:srgbClr val="1C1B19"/>
+                </a:solidFill>
+                <a:latin typeface="Source Serif 4"/>
+              </a:rPr>
+              <a:t>About 1.</a:t>
+            </a:r>
           </a:p>
         </p:txBody>
       </p:sp>
@@ -5354,47 +7107,8 @@
         </p:nvSpPr>
         <p:spPr>
           <a:xfrm>
-            <a:off x="1188720" y="1371600"/>
-            <a:ext cx="10058400" cy="3566160"/>
-          </a:xfrm>
-          <a:prstGeom prst="rect">
-            <a:avLst/>
-          </a:prstGeom>
-          <a:noFill/>
-        </p:spPr>
-        <p:txBody>
-          <a:bodyPr wrap="square" anchor="ctr" lIns="0" rIns="0" tIns="0" bIns="0">
-            <a:spAutoFit/>
-          </a:bodyPr>
-          <a:lstStyle/>
-          <a:p>
-            <a:pPr algn="l">
-              <a:spcAft>
-                <a:spcPts val="1800"/>
-              </a:spcAft>
-            </a:pPr>
-            <a:r>
-              <a:rPr sz="4000" b="0" i="1">
-                <a:solidFill>
-                  <a:srgbClr val="1C1B19"/>
-                </a:solidFill>
-                <a:latin typeface="Source Serif 4"/>
-              </a:rPr>
-              <a:t>Think of a friendship that changed. What's one specific word for how it feels now?</a:t>
-            </a:r>
-          </a:p>
-        </p:txBody>
-      </p:sp>
-      <p:sp>
-        <p:nvSpPr>
-          <p:cNvPr id="7" name="TextBox 6"/>
-          <p:cNvSpPr txBox="1"/>
-          <p:nvPr/>
-        </p:nvSpPr>
-        <p:spPr>
-          <a:xfrm>
-            <a:off x="1188720" y="5120640"/>
-            <a:ext cx="10058400" cy="914400"/>
+            <a:off x="822960" y="4846320"/>
+            <a:ext cx="10515600" cy="1097280"/>
           </a:xfrm>
           <a:prstGeom prst="rect">
             <a:avLst/>
@@ -5409,17 +7123,17 @@
           <a:p>
             <a:pPr algn="l">
               <a:spcAft>
-                <a:spcPts val="810"/>
-              </a:spcAft>
-            </a:pPr>
-            <a:r>
-              <a:rPr sz="1800" b="0" i="0">
+                <a:spcPts val="990"/>
+              </a:spcAft>
+            </a:pPr>
+            <a:r>
+              <a:rPr sz="2200" b="0" i="1">
                 <a:solidFill>
                   <a:srgbClr val="5D5A54"/>
                 </a:solidFill>
-                <a:latin typeface="Inter Tight"/>
-              </a:rPr>
-              <a:t>Write it on a card for yourself. If you want, circle one: repair, reset, or release.</a:t>
+                <a:latin typeface="Source Serif 4"/>
+              </a:rPr>
+              <a:t>Fewer than 1 in 4 even lasted to the next school year. Most ended because people grew different.</a:t>
             </a:r>
           </a:p>
         </p:txBody>
@@ -5432,7 +7146,7 @@
 </p:sld>
 </file>
 
-<file path=ppt/slides/slide12.xml><?xml version="1.0" encoding="utf-8"?>
+<file path=ppt/slides/slide5.xml><?xml version="1.0" encoding="utf-8"?>
 <p:sld xmlns:a="http://schemas.openxmlformats.org/drawingml/2006/main" xmlns:p="http://schemas.openxmlformats.org/presentationml/2006/main" xmlns:r="http://schemas.openxmlformats.org/officeDocument/2006/relationships">
   <p:cSld>
     <p:bg>
@@ -5528,7 +7242,7 @@
                 </a:solidFill>
                 <a:latin typeface="Inter Tight"/>
               </a:rPr>
-              <a:t>BEFORE YOU GO</a:t>
+              <a:t>WHY IT HURTS THIS MUCH</a:t>
             </a:r>
           </a:p>
         </p:txBody>
@@ -5580,7 +7294,7 @@
         </p:nvSpPr>
         <p:spPr>
           <a:xfrm>
-            <a:off x="822960" y="1188720"/>
+            <a:off x="822960" y="1005840"/>
             <a:ext cx="10515600" cy="914400"/>
           </a:xfrm>
           <a:prstGeom prst="rect">
@@ -5596,70 +7310,31 @@
           <a:p>
             <a:pPr algn="l">
               <a:spcAft>
-                <a:spcPts val="1620"/>
-              </a:spcAft>
-            </a:pPr>
-            <a:r>
-              <a:rPr sz="3600" b="1" i="0">
+                <a:spcPts val="1530"/>
+              </a:spcAft>
+            </a:pPr>
+            <a:r>
+              <a:rPr sz="3400" b="1" i="0">
                 <a:solidFill>
                   <a:srgbClr val="1C1B19"/>
                 </a:solidFill>
                 <a:latin typeface="Source Serif 4"/>
               </a:rPr>
-              <a:t>Recovery comes in waves.</a:t>
-            </a:r>
-          </a:p>
-        </p:txBody>
-      </p:sp>
-      <p:sp>
-        <p:nvSpPr>
-          <p:cNvPr id="6" name="TextBox 5"/>
-          <p:cNvSpPr txBox="1"/>
-          <p:nvPr/>
-        </p:nvSpPr>
-        <p:spPr>
-          <a:xfrm>
-            <a:off x="822960" y="2286000"/>
-            <a:ext cx="10515600" cy="1463040"/>
-          </a:xfrm>
-          <a:prstGeom prst="rect">
-            <a:avLst/>
-          </a:prstGeom>
-          <a:noFill/>
-        </p:spPr>
-        <p:txBody>
-          <a:bodyPr wrap="square" anchor="t" lIns="0" rIns="0" tIns="0" bIns="0">
-            <a:spAutoFit/>
-          </a:bodyPr>
-          <a:lstStyle/>
-          <a:p>
-            <a:pPr algn="l">
-              <a:spcAft>
-                <a:spcPts val="1080"/>
-              </a:spcAft>
-            </a:pPr>
-            <a:r>
-              <a:rPr sz="2400" b="0" i="0">
-                <a:solidFill>
-                  <a:srgbClr val="1C1B19"/>
-                </a:solidFill>
-                <a:latin typeface="Source Serif 4"/>
-              </a:rPr>
-              <a:t>Fine for a week, then an old photo flattens you. That's how memory works. You aren't going backward.</a:t>
-            </a:r>
-          </a:p>
-        </p:txBody>
-      </p:sp>
-      <p:sp>
-        <p:nvSpPr>
-          <p:cNvPr id="7" name="Rectangle 6"/>
+              <a:t>A real loss nobody calls one</a:t>
+            </a:r>
+          </a:p>
+        </p:txBody>
+      </p:sp>
+      <p:sp>
+        <p:nvSpPr>
+          <p:cNvPr id="6" name="Rectangle 5"/>
           <p:cNvSpPr/>
           <p:nvPr/>
         </p:nvSpPr>
         <p:spPr>
           <a:xfrm>
-            <a:off x="822960" y="4023360"/>
-            <a:ext cx="10515600" cy="1371600"/>
+            <a:off x="822960" y="2103120"/>
+            <a:ext cx="5120640" cy="3931920"/>
           </a:xfrm>
           <a:prstGeom prst="rect">
             <a:avLst/>
@@ -5669,7 +7344,7 @@
           </a:solidFill>
           <a:ln w="15875">
             <a:solidFill>
-              <a:srgbClr val="1C1B19"/>
+              <a:srgbClr val="D8D2C6"/>
             </a:solidFill>
           </a:ln>
           <a:effectLst/>
@@ -5698,14 +7373,53 @@
       </p:sp>
       <p:sp>
         <p:nvSpPr>
+          <p:cNvPr id="7" name="TextBox 6"/>
+          <p:cNvSpPr txBox="1"/>
+          <p:nvPr/>
+        </p:nvSpPr>
+        <p:spPr>
+          <a:xfrm>
+            <a:off x="1097280" y="2286000"/>
+            <a:ext cx="4572000" cy="457200"/>
+          </a:xfrm>
+          <a:prstGeom prst="rect">
+            <a:avLst/>
+          </a:prstGeom>
+          <a:noFill/>
+        </p:spPr>
+        <p:txBody>
+          <a:bodyPr wrap="square" anchor="t" lIns="0" rIns="0" tIns="0" bIns="0">
+            <a:spAutoFit/>
+          </a:bodyPr>
+          <a:lstStyle/>
+          <a:p>
+            <a:pPr algn="l">
+              <a:spcAft>
+                <a:spcPts val="585"/>
+              </a:spcAft>
+            </a:pPr>
+            <a:r>
+              <a:rPr sz="1300" b="1" i="0">
+                <a:solidFill>
+                  <a:srgbClr val="0B2D5B"/>
+                </a:solidFill>
+                <a:latin typeface="Inter Tight"/>
+              </a:rPr>
+              <a:t>WHAT YOUR BRAIN DOES</a:t>
+            </a:r>
+          </a:p>
+        </p:txBody>
+      </p:sp>
+      <p:sp>
+        <p:nvSpPr>
           <p:cNvPr id="8" name="TextBox 7"/>
           <p:cNvSpPr txBox="1"/>
           <p:nvPr/>
         </p:nvSpPr>
         <p:spPr>
           <a:xfrm>
-            <a:off x="1097280" y="4206240"/>
-            <a:ext cx="10058400" cy="365760"/>
+            <a:off x="1097280" y="2788920"/>
+            <a:ext cx="4572000" cy="3108960"/>
           </a:xfrm>
           <a:prstGeom prst="rect">
             <a:avLst/>
@@ -5720,105 +7434,90 @@
           <a:p>
             <a:pPr algn="l">
               <a:spcAft>
-                <a:spcPts val="540"/>
-              </a:spcAft>
-            </a:pPr>
-            <a:r>
-              <a:rPr sz="1200" b="1" i="0">
-                <a:solidFill>
-                  <a:srgbClr val="0B2D5B"/>
-                </a:solidFill>
-                <a:latin typeface="Inter Tight"/>
-              </a:rPr>
-              <a:t>STUDENT PAGE</a:t>
-            </a:r>
-          </a:p>
-        </p:txBody>
-      </p:sp>
-      <p:sp>
-        <p:nvSpPr>
-          <p:cNvPr id="9" name="TextBox 8"/>
-          <p:cNvSpPr txBox="1"/>
-          <p:nvPr/>
-        </p:nvSpPr>
-        <p:spPr>
-          <a:xfrm>
-            <a:off x="1097280" y="4617720"/>
-            <a:ext cx="10058400" cy="640080"/>
-          </a:xfrm>
-          <a:prstGeom prst="rect">
-            <a:avLst/>
-          </a:prstGeom>
-          <a:noFill/>
-        </p:spPr>
-        <p:txBody>
-          <a:bodyPr wrap="square" anchor="t" lIns="0" rIns="0" tIns="0" bIns="0">
-            <a:spAutoFit/>
-          </a:bodyPr>
-          <a:lstStyle/>
-          <a:p>
-            <a:pPr algn="l">
-              <a:spcAft>
-                <a:spcPts val="900"/>
-              </a:spcAft>
-            </a:pPr>
-            <a:r>
-              <a:rPr sz="2000" b="0" i="0">
+                <a:spcPts val="855"/>
+              </a:spcAft>
+            </a:pPr>
+            <a:r>
+              <a:rPr sz="1900" b="0" i="0">
                 <a:solidFill>
                   <a:srgbClr val="1C1B19"/>
                 </a:solidFill>
-                <a:latin typeface="Inter Tight"/>
-              </a:rPr>
-              <a:t>https://rmwtoolkit.github.io/bcds-toolkit/friendship-breakups-high-school.html</a:t>
-            </a:r>
-          </a:p>
-        </p:txBody>
-      </p:sp>
-    </p:spTree>
-  </p:cSld>
-  <p:clrMapOvr>
-    <a:masterClrMapping/>
-  </p:clrMapOvr>
-</p:sld>
-</file>
-
-<file path=ppt/slides/slide2.xml><?xml version="1.0" encoding="utf-8"?>
-<p:sld xmlns:a="http://schemas.openxmlformats.org/drawingml/2006/main" xmlns:p="http://schemas.openxmlformats.org/presentationml/2006/main" xmlns:r="http://schemas.openxmlformats.org/officeDocument/2006/relationships" show="0">
-  <p:cSld>
-    <p:bg>
-      <p:bgPr>
-        <a:solidFill>
-          <a:srgbClr val="EEEBE4"/>
-        </a:solidFill>
-        <a:effectLst/>
-      </p:bgPr>
-    </p:bg>
-    <p:spTree>
-      <p:nvGrpSpPr>
-        <p:cNvPr id="1" name=""/>
-        <p:cNvGrpSpPr/>
-        <p:nvPr/>
-      </p:nvGrpSpPr>
-      <p:grpSpPr/>
-      <p:sp>
-        <p:nvSpPr>
-          <p:cNvPr id="2" name="Rectangle 1"/>
+                <a:latin typeface="Source Serif 4"/>
+              </a:rPr>
+              <a:t>Treats it like an injury</a:t>
+            </a:r>
+          </a:p>
+          <a:p>
+            <a:pPr algn="l">
+              <a:spcAft>
+                <a:spcPts val="855"/>
+              </a:spcAft>
+            </a:pPr>
+            <a:r>
+              <a:rPr sz="1900" b="0" i="0">
+                <a:solidFill>
+                  <a:srgbClr val="1C1B19"/>
+                </a:solidFill>
+                <a:latin typeface="Source Serif 4"/>
+              </a:rPr>
+              <a:t>The distress signal fires</a:t>
+            </a:r>
+          </a:p>
+          <a:p>
+            <a:pPr algn="l">
+              <a:spcAft>
+                <a:spcPts val="855"/>
+              </a:spcAft>
+            </a:pPr>
+            <a:r>
+              <a:rPr sz="1900" b="0" i="0">
+                <a:solidFill>
+                  <a:srgbClr val="1C1B19"/>
+                </a:solidFill>
+                <a:latin typeface="Source Serif 4"/>
+              </a:rPr>
+              <a:t>More signal, more upset</a:t>
+            </a:r>
+          </a:p>
+          <a:p>
+            <a:pPr algn="l">
+              <a:spcAft>
+                <a:spcPts val="855"/>
+              </a:spcAft>
+            </a:pPr>
+            <a:r>
+              <a:rPr sz="1900" b="0" i="0">
+                <a:solidFill>
+                  <a:srgbClr val="1C1B19"/>
+                </a:solidFill>
+                <a:latin typeface="Source Serif 4"/>
+              </a:rPr>
+              <a:t>Naming the feeling turns it down</a:t>
+            </a:r>
+          </a:p>
+        </p:txBody>
+      </p:sp>
+      <p:sp>
+        <p:nvSpPr>
+          <p:cNvPr id="9" name="Rectangle 8"/>
           <p:cNvSpPr/>
           <p:nvPr/>
         </p:nvSpPr>
         <p:spPr>
           <a:xfrm>
-            <a:off x="0" y="0"/>
-            <a:ext cx="12191695" cy="384048"/>
+            <a:off x="6309360" y="2103120"/>
+            <a:ext cx="5120640" cy="3931920"/>
           </a:xfrm>
           <a:prstGeom prst="rect">
             <a:avLst/>
           </a:prstGeom>
           <a:solidFill>
-            <a:srgbClr val="0B2D5B"/>
+            <a:srgbClr val="FFFFFF"/>
           </a:solidFill>
-          <a:ln>
-            <a:noFill/>
+          <a:ln w="15875">
+            <a:solidFill>
+              <a:srgbClr val="D8D2C6"/>
+            </a:solidFill>
           </a:ln>
           <a:effectLst/>
         </p:spPr>
@@ -5846,14 +7545,14 @@
       </p:sp>
       <p:sp>
         <p:nvSpPr>
-          <p:cNvPr id="3" name="TextBox 2"/>
+          <p:cNvPr id="10" name="TextBox 9"/>
           <p:cNvSpPr txBox="1"/>
           <p:nvPr/>
         </p:nvSpPr>
         <p:spPr>
           <a:xfrm>
-            <a:off x="548640" y="100584"/>
-            <a:ext cx="10972800" cy="274320"/>
+            <a:off x="6583680" y="2286000"/>
+            <a:ext cx="4572000" cy="457200"/>
           </a:xfrm>
           <a:prstGeom prst="rect">
             <a:avLst/>
@@ -5868,31 +7567,31 @@
           <a:p>
             <a:pPr algn="l">
               <a:spcAft>
-                <a:spcPts val="495"/>
-              </a:spcAft>
-            </a:pPr>
-            <a:r>
-              <a:rPr sz="1100" b="1" i="0">
-                <a:solidFill>
-                  <a:srgbClr val="FFFFFF"/>
+                <a:spcPts val="585"/>
+              </a:spcAft>
+            </a:pPr>
+            <a:r>
+              <a:rPr sz="1300" b="1" i="0">
+                <a:solidFill>
+                  <a:srgbClr val="0B2D5B"/>
                 </a:solidFill>
                 <a:latin typeface="Inter Tight"/>
               </a:rPr>
-              <a:t>TEACHER PAGE  ·  skipped when you present  ·  Before you teach</a:t>
-            </a:r>
-          </a:p>
-        </p:txBody>
-      </p:sp>
-      <p:sp>
-        <p:nvSpPr>
-          <p:cNvPr id="4" name="TextBox 3"/>
+              <a:t>WHY IT'S HARDER THAN IT LOOKS</a:t>
+            </a:r>
+          </a:p>
+        </p:txBody>
+      </p:sp>
+      <p:sp>
+        <p:nvSpPr>
+          <p:cNvPr id="11" name="TextBox 10"/>
           <p:cNvSpPr txBox="1"/>
           <p:nvPr/>
         </p:nvSpPr>
         <p:spPr>
           <a:xfrm>
-            <a:off x="548640" y="685800"/>
-            <a:ext cx="10972800" cy="640080"/>
+            <a:off x="6583680" y="2788920"/>
+            <a:ext cx="4572000" cy="3108960"/>
           </a:xfrm>
           <a:prstGeom prst="rect">
             <a:avLst/>
@@ -5907,1555 +7606,65 @@
           <a:p>
             <a:pPr algn="l">
               <a:spcAft>
-                <a:spcPts val="1350"/>
-              </a:spcAft>
-            </a:pPr>
-            <a:r>
-              <a:rPr sz="3000" b="1" i="0">
+                <a:spcPts val="855"/>
+              </a:spcAft>
+            </a:pPr>
+            <a:r>
+              <a:rPr sz="1900" b="0" i="0">
                 <a:solidFill>
                   <a:srgbClr val="1C1B19"/>
                 </a:solidFill>
                 <a:latin typeface="Source Serif 4"/>
               </a:rPr>
-              <a:t>Before you teach</a:t>
-            </a:r>
-          </a:p>
-        </p:txBody>
-      </p:sp>
-      <p:sp>
-        <p:nvSpPr>
-          <p:cNvPr id="5" name="TextBox 4"/>
-          <p:cNvSpPr txBox="1"/>
-          <p:nvPr/>
-        </p:nvSpPr>
-        <p:spPr>
-          <a:xfrm>
-            <a:off x="548640" y="1463040"/>
-            <a:ext cx="5394960" cy="4937760"/>
-          </a:xfrm>
-          <a:prstGeom prst="rect">
-            <a:avLst/>
-          </a:prstGeom>
-          <a:noFill/>
-        </p:spPr>
-        <p:txBody>
-          <a:bodyPr wrap="square" anchor="t" lIns="0" rIns="0" tIns="0" bIns="0">
-            <a:spAutoFit/>
-          </a:bodyPr>
-          <a:lstStyle/>
-          <a:p>
-            <a:pPr algn="l">
-              <a:spcAft>
-                <a:spcPts val="585"/>
-              </a:spcAft>
-            </a:pPr>
-            <a:r>
-              <a:rPr sz="1500" b="1" i="0">
+              <a:t>No songs, no sympathy, no script</a:t>
+            </a:r>
+          </a:p>
+          <a:p>
+            <a:pPr algn="l">
+              <a:spcAft>
+                <a:spcPts val="855"/>
+              </a:spcAft>
+            </a:pPr>
+            <a:r>
+              <a:rPr sz="1900" b="0" i="0">
                 <a:solidFill>
                   <a:srgbClr val="1C1B19"/>
                 </a:solidFill>
                 <a:latin typeface="Source Serif 4"/>
               </a:rPr>
-              <a:t>Former friends may be in the same circle.</a:t>
-            </a:r>
-          </a:p>
-          <a:p>
-            <a:pPr algn="l">
-              <a:spcAft>
-                <a:spcPts val="585"/>
-              </a:spcAft>
-            </a:pPr>
-            <a:r>
-              <a:rPr sz="1300" b="0" i="0">
+              <a:t>Tangled up with who you are</a:t>
+            </a:r>
+          </a:p>
+          <a:p>
+            <a:pPr algn="l">
+              <a:spcAft>
+                <a:spcPts val="855"/>
+              </a:spcAft>
+            </a:pPr>
+            <a:r>
+              <a:rPr sz="1900" b="0" i="0">
                 <a:solidFill>
                   <a:srgbClr val="1C1B19"/>
                 </a:solidFill>
                 <a:latin typeface="Source Serif 4"/>
               </a:rPr>
-              <a:t>Advisory groups are small, and two people who used to be close may sit across from each other. Use only the slide scenarios. Don't ask for stories, names, or what happened.</a:t>
-            </a:r>
-          </a:p>
-          <a:p>
-            <a:pPr algn="l">
-              <a:spcAft>
-                <a:spcPts val="585"/>
-              </a:spcAft>
-            </a:pPr>
-            <a:r>
-              <a:rPr sz="1300" b="0" i="0">
+              <a:t>Ripples through teams and friends</a:t>
+            </a:r>
+          </a:p>
+          <a:p>
+            <a:pPr algn="l">
+              <a:spcAft>
+                <a:spcPts val="855"/>
+              </a:spcAft>
+            </a:pPr>
+            <a:r>
+              <a:rPr sz="1900" b="0" i="0">
                 <a:solidFill>
                   <a:srgbClr val="1C1B19"/>
                 </a:solidFill>
                 <a:latin typeface="Source Serif 4"/>
               </a:rPr>
-              <a:t/>
-            </a:r>
-          </a:p>
-          <a:p>
-            <a:pPr algn="l">
-              <a:spcAft>
-                <a:spcPts val="585"/>
-              </a:spcAft>
-            </a:pPr>
-            <a:r>
-              <a:rPr sz="1500" b="1" i="0">
-                <a:solidFill>
-                  <a:srgbClr val="1C1B19"/>
-                </a:solidFill>
-                <a:latin typeface="Source Serif 4"/>
-              </a:rPr>
-              <a:t>Don't push repair.</a:t>
-            </a:r>
-          </a:p>
-          <a:p>
-            <a:pPr algn="l">
-              <a:spcAft>
-                <a:spcPts val="585"/>
-              </a:spcAft>
-            </a:pPr>
-            <a:r>
-              <a:rPr sz="1300" b="0" i="0">
-                <a:solidFill>
-                  <a:srgbClr val="1C1B19"/>
-                </a:solidFill>
-                <a:latin typeface="Source Serif 4"/>
-              </a:rPr>
-              <a:t>Some friendships should end. Present repair, reset and release as equal choices, and never suggest a student owes anyone a second chance.</a:t>
-            </a:r>
-          </a:p>
-          <a:p>
-            <a:pPr algn="l">
-              <a:spcAft>
-                <a:spcPts val="585"/>
-              </a:spcAft>
-            </a:pPr>
-            <a:r>
-              <a:rPr sz="1300" b="0" i="0">
-                <a:solidFill>
-                  <a:srgbClr val="1C1B19"/>
-                </a:solidFill>
-                <a:latin typeface="Source Serif 4"/>
-              </a:rPr>
-              <a:t/>
-            </a:r>
-          </a:p>
-          <a:p>
-            <a:pPr algn="l">
-              <a:spcAft>
-                <a:spcPts val="585"/>
-              </a:spcAft>
-            </a:pPr>
-            <a:r>
-              <a:rPr sz="1500" b="1" i="0">
-                <a:solidFill>
-                  <a:srgbClr val="1C1B19"/>
-                </a:solidFill>
-                <a:latin typeface="Source Serif 4"/>
-              </a:rPr>
-              <a:t>Unsafe friendships go to an adult.</a:t>
-            </a:r>
-          </a:p>
-          <a:p>
-            <a:pPr algn="l">
-              <a:spcAft>
-                <a:spcPts val="585"/>
-              </a:spcAft>
-            </a:pPr>
-            <a:r>
-              <a:rPr sz="1300" b="0" i="0">
-                <a:solidFill>
-                  <a:srgbClr val="1C1B19"/>
-                </a:solidFill>
-                <a:latin typeface="Source Serif 4"/>
-              </a:rPr>
-              <a:t>If a student says a friendship was controlling or threatening, or that an old group is targeting them online or in person, thank them, move on, and follow up privately that day with a counselor or dean.</a:t>
-            </a:r>
-          </a:p>
-          <a:p>
-            <a:pPr algn="l">
-              <a:spcAft>
-                <a:spcPts val="585"/>
-              </a:spcAft>
-            </a:pPr>
-            <a:r>
-              <a:rPr sz="1300" b="0" i="0">
-                <a:solidFill>
-                  <a:srgbClr val="1C1B19"/>
-                </a:solidFill>
-                <a:latin typeface="Source Serif 4"/>
-              </a:rPr>
-              <a:t/>
-            </a:r>
-          </a:p>
-        </p:txBody>
-      </p:sp>
-      <p:sp>
-        <p:nvSpPr>
-          <p:cNvPr id="6" name="TextBox 5"/>
-          <p:cNvSpPr txBox="1"/>
-          <p:nvPr/>
-        </p:nvSpPr>
-        <p:spPr>
-          <a:xfrm>
-            <a:off x="6217920" y="1463040"/>
-            <a:ext cx="5394960" cy="4937760"/>
-          </a:xfrm>
-          <a:prstGeom prst="rect">
-            <a:avLst/>
-          </a:prstGeom>
-          <a:noFill/>
-        </p:spPr>
-        <p:txBody>
-          <a:bodyPr wrap="square" anchor="t" lIns="0" rIns="0" tIns="0" bIns="0">
-            <a:spAutoFit/>
-          </a:bodyPr>
-          <a:lstStyle/>
-          <a:p>
-            <a:pPr algn="l">
-              <a:spcAft>
-                <a:spcPts val="585"/>
-              </a:spcAft>
-            </a:pPr>
-            <a:r>
-              <a:rPr sz="1500" b="1" i="0">
-                <a:solidFill>
-                  <a:srgbClr val="1C1B19"/>
-                </a:solidFill>
-                <a:latin typeface="Source Serif 4"/>
-              </a:rPr>
-              <a:t>Sadness that lasts goes to a counselor.</a:t>
-            </a:r>
-          </a:p>
-          <a:p>
-            <a:pPr algn="l">
-              <a:spcAft>
-                <a:spcPts val="585"/>
-              </a:spcAft>
-            </a:pPr>
-            <a:r>
-              <a:rPr sz="1300" b="0" i="0">
-                <a:solidFill>
-                  <a:srgbClr val="1C1B19"/>
-                </a:solidFill>
-                <a:latin typeface="Source Serif 4"/>
-              </a:rPr>
-              <a:t>The student page names sadness most days for more than two weeks, and big changes in sleep, eating or grades. Don't ask about these in the circle. Any disclosure goes to a counselor the same day.</a:t>
-            </a:r>
-          </a:p>
-          <a:p>
-            <a:pPr algn="l">
-              <a:spcAft>
-                <a:spcPts val="585"/>
-              </a:spcAft>
-            </a:pPr>
-            <a:r>
-              <a:rPr sz="1300" b="0" i="0">
-                <a:solidFill>
-                  <a:srgbClr val="1C1B19"/>
-                </a:solidFill>
-                <a:latin typeface="Source Serif 4"/>
-              </a:rPr>
-              <a:t/>
-            </a:r>
-          </a:p>
-          <a:p>
-            <a:pPr algn="l">
-              <a:spcAft>
-                <a:spcPts val="585"/>
-              </a:spcAft>
-            </a:pPr>
-            <a:r>
-              <a:rPr sz="1500" b="1" i="0">
-                <a:solidFill>
-                  <a:srgbClr val="1C1B19"/>
-                </a:solidFill>
-                <a:latin typeface="Source Serif 4"/>
-              </a:rPr>
-              <a:t>Leave room for the one who ended it.</a:t>
-            </a:r>
-          </a:p>
-          <a:p>
-            <a:pPr algn="l">
-              <a:spcAft>
-                <a:spcPts val="585"/>
-              </a:spcAft>
-            </a:pPr>
-            <a:r>
-              <a:rPr sz="1300" b="0" i="0">
-                <a:solidFill>
-                  <a:srgbClr val="1C1B19"/>
-                </a:solidFill>
-                <a:latin typeface="Source Serif 4"/>
-              </a:rPr>
-              <a:t>Students who stepped away may feel guilty or get cast as the bad guy. Lena's card gives them a way in: you can know it was right and still miss someone.</a:t>
-            </a:r>
-          </a:p>
-          <a:p>
-            <a:pPr algn="l">
-              <a:spcAft>
-                <a:spcPts val="585"/>
-              </a:spcAft>
-            </a:pPr>
-            <a:r>
-              <a:rPr sz="1300" b="0" i="0">
-                <a:solidFill>
-                  <a:srgbClr val="1C1B19"/>
-                </a:solidFill>
-                <a:latin typeface="Source Serif 4"/>
-              </a:rPr>
-              <a:t/>
-            </a:r>
-          </a:p>
-          <a:p>
-            <a:pPr algn="l">
-              <a:spcAft>
-                <a:spcPts val="585"/>
-              </a:spcAft>
-            </a:pPr>
-            <a:r>
-              <a:rPr sz="1500" b="1" i="0">
-                <a:solidFill>
-                  <a:srgbClr val="1C1B19"/>
-                </a:solidFill>
-                <a:latin typeface="Source Serif 4"/>
-              </a:rPr>
-              <a:t>Keep the brain science light.</a:t>
-            </a:r>
-          </a:p>
-          <a:p>
-            <a:pPr algn="l">
-              <a:spcAft>
-                <a:spcPts val="585"/>
-              </a:spcAft>
-            </a:pPr>
-            <a:r>
-              <a:rPr sz="1300" b="0" i="0">
-                <a:solidFill>
-                  <a:srgbClr val="1C1B19"/>
-                </a:solidFill>
-                <a:latin typeface="Source Serif 4"/>
-              </a:rPr>
-              <a:t>The point is that the hurt is real. Some of the brain findings are debated, so say "researchers found" and skip the anatomy if time is short.</a:t>
-            </a:r>
-          </a:p>
-          <a:p>
-            <a:pPr algn="l">
-              <a:spcAft>
-                <a:spcPts val="585"/>
-              </a:spcAft>
-            </a:pPr>
-            <a:r>
-              <a:rPr sz="1300" b="0" i="0">
-                <a:solidFill>
-                  <a:srgbClr val="1C1B19"/>
-                </a:solidFill>
-                <a:latin typeface="Source Serif 4"/>
-              </a:rPr>
-              <a:t/>
-            </a:r>
-          </a:p>
-        </p:txBody>
-      </p:sp>
-    </p:spTree>
-  </p:cSld>
-  <p:clrMapOvr>
-    <a:masterClrMapping/>
-  </p:clrMapOvr>
-</p:sld>
-</file>
-
-<file path=ppt/slides/slide3.xml><?xml version="1.0" encoding="utf-8"?>
-<p:sld xmlns:a="http://schemas.openxmlformats.org/drawingml/2006/main" xmlns:p="http://schemas.openxmlformats.org/presentationml/2006/main" xmlns:r="http://schemas.openxmlformats.org/officeDocument/2006/relationships" show="0">
-  <p:cSld>
-    <p:bg>
-      <p:bgPr>
-        <a:solidFill>
-          <a:srgbClr val="EEEBE4"/>
-        </a:solidFill>
-        <a:effectLst/>
-      </p:bgPr>
-    </p:bg>
-    <p:spTree>
-      <p:nvGrpSpPr>
-        <p:cNvPr id="1" name=""/>
-        <p:cNvGrpSpPr/>
-        <p:nvPr/>
-      </p:nvGrpSpPr>
-      <p:grpSpPr/>
-      <p:sp>
-        <p:nvSpPr>
-          <p:cNvPr id="2" name="Rectangle 1"/>
-          <p:cNvSpPr/>
-          <p:nvPr/>
-        </p:nvSpPr>
-        <p:spPr>
-          <a:xfrm>
-            <a:off x="0" y="0"/>
-            <a:ext cx="12191695" cy="384048"/>
-          </a:xfrm>
-          <a:prstGeom prst="rect">
-            <a:avLst/>
-          </a:prstGeom>
-          <a:solidFill>
-            <a:srgbClr val="0B2D5B"/>
-          </a:solidFill>
-          <a:ln>
-            <a:noFill/>
-          </a:ln>
-          <a:effectLst/>
-        </p:spPr>
-        <p:style>
-          <a:lnRef idx="1">
-            <a:schemeClr val="accent1"/>
-          </a:lnRef>
-          <a:fillRef idx="3">
-            <a:schemeClr val="accent1"/>
-          </a:fillRef>
-          <a:effectRef idx="2">
-            <a:schemeClr val="accent1"/>
-          </a:effectRef>
-          <a:fontRef idx="minor">
-            <a:schemeClr val="lt1"/>
-          </a:fontRef>
-        </p:style>
-        <p:txBody>
-          <a:bodyPr rtlCol="0" anchor="ctr"/>
-          <a:lstStyle/>
-          <a:p>
-            <a:pPr algn="ctr"/>
-          </a:p>
-        </p:txBody>
-      </p:sp>
-      <p:sp>
-        <p:nvSpPr>
-          <p:cNvPr id="3" name="TextBox 2"/>
-          <p:cNvSpPr txBox="1"/>
-          <p:nvPr/>
-        </p:nvSpPr>
-        <p:spPr>
-          <a:xfrm>
-            <a:off x="548640" y="100584"/>
-            <a:ext cx="10972800" cy="274320"/>
-          </a:xfrm>
-          <a:prstGeom prst="rect">
-            <a:avLst/>
-          </a:prstGeom>
-          <a:noFill/>
-        </p:spPr>
-        <p:txBody>
-          <a:bodyPr wrap="square" anchor="t" lIns="0" rIns="0" tIns="0" bIns="0">
-            <a:spAutoFit/>
-          </a:bodyPr>
-          <a:lstStyle/>
-          <a:p>
-            <a:pPr algn="l">
-              <a:spcAft>
-                <a:spcPts val="495"/>
-              </a:spcAft>
-            </a:pPr>
-            <a:r>
-              <a:rPr sz="1100" b="1" i="0">
-                <a:solidFill>
-                  <a:srgbClr val="FFFFFF"/>
-                </a:solidFill>
-                <a:latin typeface="Inter Tight"/>
-              </a:rPr>
-              <a:t>TEACHER PAGE  ·  skipped when you present  ·  Every student in the room</a:t>
-            </a:r>
-          </a:p>
-        </p:txBody>
-      </p:sp>
-      <p:sp>
-        <p:nvSpPr>
-          <p:cNvPr id="4" name="TextBox 3"/>
-          <p:cNvSpPr txBox="1"/>
-          <p:nvPr/>
-        </p:nvSpPr>
-        <p:spPr>
-          <a:xfrm>
-            <a:off x="548640" y="685800"/>
-            <a:ext cx="10972800" cy="640080"/>
-          </a:xfrm>
-          <a:prstGeom prst="rect">
-            <a:avLst/>
-          </a:prstGeom>
-          <a:noFill/>
-        </p:spPr>
-        <p:txBody>
-          <a:bodyPr wrap="square" anchor="t" lIns="0" rIns="0" tIns="0" bIns="0">
-            <a:spAutoFit/>
-          </a:bodyPr>
-          <a:lstStyle/>
-          <a:p>
-            <a:pPr algn="l">
-              <a:spcAft>
-                <a:spcPts val="1350"/>
-              </a:spcAft>
-            </a:pPr>
-            <a:r>
-              <a:rPr sz="3000" b="1" i="0">
-                <a:solidFill>
-                  <a:srgbClr val="1C1B19"/>
-                </a:solidFill>
-                <a:latin typeface="Source Serif 4"/>
-              </a:rPr>
-              <a:t>Every student in the room</a:t>
-            </a:r>
-          </a:p>
-        </p:txBody>
-      </p:sp>
-      <p:sp>
-        <p:nvSpPr>
-          <p:cNvPr id="5" name="TextBox 4"/>
-          <p:cNvSpPr txBox="1"/>
-          <p:nvPr/>
-        </p:nvSpPr>
-        <p:spPr>
-          <a:xfrm>
-            <a:off x="548640" y="1325880"/>
-            <a:ext cx="10972800" cy="365760"/>
-          </a:xfrm>
-          <a:prstGeom prst="rect">
-            <a:avLst/>
-          </a:prstGeom>
-          <a:noFill/>
-        </p:spPr>
-        <p:txBody>
-          <a:bodyPr wrap="square" anchor="t" lIns="0" rIns="0" tIns="0" bIns="0">
-            <a:spAutoFit/>
-          </a:bodyPr>
-          <a:lstStyle/>
-          <a:p>
-            <a:pPr algn="l">
-              <a:spcAft>
-                <a:spcPts val="630"/>
-              </a:spcAft>
-            </a:pPr>
-            <a:r>
-              <a:rPr sz="1400" b="0" i="0">
-                <a:solidFill>
-                  <a:srgbClr val="5D5A54"/>
-                </a:solidFill>
-                <a:latin typeface="Inter Tight"/>
-              </a:rPr>
-              <a:t>Culture, family, identity, ability and money: what to keep in mind for this topic.</a:t>
-            </a:r>
-          </a:p>
-        </p:txBody>
-      </p:sp>
-      <p:sp>
-        <p:nvSpPr>
-          <p:cNvPr id="6" name="TextBox 5"/>
-          <p:cNvSpPr txBox="1"/>
-          <p:nvPr/>
-        </p:nvSpPr>
-        <p:spPr>
-          <a:xfrm>
-            <a:off x="548640" y="1828800"/>
-            <a:ext cx="5394960" cy="4572000"/>
-          </a:xfrm>
-          <a:prstGeom prst="rect">
-            <a:avLst/>
-          </a:prstGeom>
-          <a:noFill/>
-        </p:spPr>
-        <p:txBody>
-          <a:bodyPr wrap="square" anchor="t" lIns="0" rIns="0" tIns="0" bIns="0">
-            <a:spAutoFit/>
-          </a:bodyPr>
-          <a:lstStyle/>
-          <a:p>
-            <a:pPr algn="l">
-              <a:spcAft>
-                <a:spcPts val="585"/>
-              </a:spcAft>
-            </a:pPr>
-            <a:r>
-              <a:rPr sz="1500" b="1" i="0">
-                <a:solidFill>
-                  <a:srgbClr val="1C1B19"/>
-                </a:solidFill>
-                <a:latin typeface="Source Serif 4"/>
-              </a:rPr>
-              <a:t>It ripples through shared communities.</a:t>
-            </a:r>
-          </a:p>
-          <a:p>
-            <a:pPr algn="l">
-              <a:spcAft>
-                <a:spcPts val="585"/>
-              </a:spcAft>
-            </a:pPr>
-            <a:r>
-              <a:rPr sz="1300" b="0" i="0">
-                <a:solidFill>
-                  <a:srgbClr val="1C1B19"/>
-                </a:solidFill>
-                <a:latin typeface="Source Serif 4"/>
-              </a:rPr>
-              <a:t>Two friends may share a religious community, a neighborhood, a team, or families who know each other. An ending can change where a student feels comfortable going, including a place of worship. Name that as part of the loss.</a:t>
-            </a:r>
-          </a:p>
-          <a:p>
-            <a:pPr algn="l">
-              <a:spcAft>
-                <a:spcPts val="585"/>
-              </a:spcAft>
-            </a:pPr>
-            <a:r>
-              <a:rPr sz="1300" b="0" i="0">
-                <a:solidFill>
-                  <a:srgbClr val="1C1B19"/>
-                </a:solidFill>
-                <a:latin typeface="Source Serif 4"/>
-              </a:rPr>
-              <a:t/>
-            </a:r>
-          </a:p>
-          <a:p>
-            <a:pPr algn="l">
-              <a:spcAft>
-                <a:spcPts val="585"/>
-              </a:spcAft>
-            </a:pPr>
-            <a:r>
-              <a:rPr sz="1500" b="1" i="0">
-                <a:solidFill>
-                  <a:srgbClr val="1C1B19"/>
-                </a:solidFill>
-                <a:latin typeface="Source Serif 4"/>
-              </a:rPr>
-              <a:t>Who students can tell.</a:t>
-            </a:r>
-          </a:p>
-          <a:p>
-            <a:pPr algn="l">
-              <a:spcAft>
-                <a:spcPts val="585"/>
-              </a:spcAft>
-            </a:pPr>
-            <a:r>
-              <a:rPr sz="1300" b="0" i="0">
-                <a:solidFill>
-                  <a:srgbClr val="1C1B19"/>
-                </a:solidFill>
-                <a:latin typeface="Source Serif 4"/>
-              </a:rPr>
-              <a:t>"Tell one person the real version" can mean a sibling, a cousin, a grandparent, a coach, or a parent or caregiver. Not every student can bring this home, so always name a counselor too.</a:t>
-            </a:r>
-          </a:p>
-          <a:p>
-            <a:pPr algn="l">
-              <a:spcAft>
-                <a:spcPts val="585"/>
-              </a:spcAft>
-            </a:pPr>
-            <a:r>
-              <a:rPr sz="1300" b="0" i="0">
-                <a:solidFill>
-                  <a:srgbClr val="1C1B19"/>
-                </a:solidFill>
-                <a:latin typeface="Source Serif 4"/>
-              </a:rPr>
-              <a:t/>
-            </a:r>
-          </a:p>
-          <a:p>
-            <a:pPr algn="l">
-              <a:spcAft>
-                <a:spcPts val="585"/>
-              </a:spcAft>
-            </a:pPr>
-            <a:r>
-              <a:rPr sz="1500" b="1" i="0">
-                <a:solidFill>
-                  <a:srgbClr val="1C1B19"/>
-                </a:solidFill>
-                <a:latin typeface="Source Serif 4"/>
-              </a:rPr>
-              <a:t>Identity and friendships.</a:t>
-            </a:r>
-          </a:p>
-          <a:p>
-            <a:pPr algn="l">
-              <a:spcAft>
-                <a:spcPts val="585"/>
-              </a:spcAft>
-            </a:pPr>
-            <a:r>
-              <a:rPr sz="1300" b="0" i="0">
-                <a:solidFill>
-                  <a:srgbClr val="1C1B19"/>
-                </a:solidFill>
-                <a:latin typeface="Source Serif 4"/>
-              </a:rPr>
-              <a:t>Some friendships end around coming out, or around how a friend reacted to someone's identity. Don't ask why any friendship ended. If a student was outed or is being targeted for who they are, that's a counselor conversation that day.</a:t>
-            </a:r>
-          </a:p>
-          <a:p>
-            <a:pPr algn="l">
-              <a:spcAft>
-                <a:spcPts val="585"/>
-              </a:spcAft>
-            </a:pPr>
-            <a:r>
-              <a:rPr sz="1300" b="0" i="0">
-                <a:solidFill>
-                  <a:srgbClr val="1C1B19"/>
-                </a:solidFill>
-                <a:latin typeface="Source Serif 4"/>
-              </a:rPr>
-              <a:t/>
-            </a:r>
-          </a:p>
-        </p:txBody>
-      </p:sp>
-      <p:sp>
-        <p:nvSpPr>
-          <p:cNvPr id="7" name="TextBox 6"/>
-          <p:cNvSpPr txBox="1"/>
-          <p:nvPr/>
-        </p:nvSpPr>
-        <p:spPr>
-          <a:xfrm>
-            <a:off x="6217920" y="1828800"/>
-            <a:ext cx="5394960" cy="4572000"/>
-          </a:xfrm>
-          <a:prstGeom prst="rect">
-            <a:avLst/>
-          </a:prstGeom>
-          <a:noFill/>
-        </p:spPr>
-        <p:txBody>
-          <a:bodyPr wrap="square" anchor="t" lIns="0" rIns="0" tIns="0" bIns="0">
-            <a:spAutoFit/>
-          </a:bodyPr>
-          <a:lstStyle/>
-          <a:p>
-            <a:pPr algn="l">
-              <a:spcAft>
-                <a:spcPts val="585"/>
-              </a:spcAft>
-            </a:pPr>
-            <a:r>
-              <a:rPr sz="1500" b="1" i="0">
-                <a:solidFill>
-                  <a:srgbClr val="1C1B19"/>
-                </a:solidFill>
-                <a:latin typeface="Source Serif 4"/>
-              </a:rPr>
-              <a:t>Friendship looks different for different brains.</a:t>
-            </a:r>
-          </a:p>
-          <a:p>
-            <a:pPr algn="l">
-              <a:spcAft>
-                <a:spcPts val="585"/>
-              </a:spcAft>
-            </a:pPr>
-            <a:r>
-              <a:rPr sz="1300" b="0" i="0">
-                <a:solidFill>
-                  <a:srgbClr val="1C1B19"/>
-                </a:solidFill>
-                <a:latin typeface="Source Serif 4"/>
-              </a:rPr>
-              <a:t>Autistic students and students with social anxiety may have fewer close friends, so one ending can take out most of their social world. The run-in plan gives a script. Don't measure a good friend by how social someone is.</a:t>
-            </a:r>
-          </a:p>
-          <a:p>
-            <a:pPr algn="l">
-              <a:spcAft>
-                <a:spcPts val="585"/>
-              </a:spcAft>
-            </a:pPr>
-            <a:r>
-              <a:rPr sz="1300" b="0" i="0">
-                <a:solidFill>
-                  <a:srgbClr val="1C1B19"/>
-                </a:solidFill>
-                <a:latin typeface="Source Serif 4"/>
-              </a:rPr>
-              <a:t/>
-            </a:r>
-          </a:p>
-          <a:p>
-            <a:pPr algn="l">
-              <a:spcAft>
-                <a:spcPts val="585"/>
-              </a:spcAft>
-            </a:pPr>
-            <a:r>
-              <a:rPr sz="1500" b="1" i="0">
-                <a:solidFill>
-                  <a:srgbClr val="1C1B19"/>
-                </a:solidFill>
-                <a:latin typeface="Source Serif 4"/>
-              </a:rPr>
-              <a:t>Anyone can grieve a friendship.</a:t>
-            </a:r>
-          </a:p>
-          <a:p>
-            <a:pPr algn="l">
-              <a:spcAft>
-                <a:spcPts val="585"/>
-              </a:spcAft>
-            </a:pPr>
-            <a:r>
-              <a:rPr sz="1300" b="0" i="0">
-                <a:solidFill>
-                  <a:srgbClr val="1C1B19"/>
-                </a:solidFill>
-                <a:latin typeface="Source Serif 4"/>
-              </a:rPr>
-              <a:t>Students may hear that only girls have friendship drama. Say plainly that losing a close friend hurts anyone, and mix genders in your examples, as Maya and Jordan do.</a:t>
-            </a:r>
-          </a:p>
-          <a:p>
-            <a:pPr algn="l">
-              <a:spcAft>
-                <a:spcPts val="585"/>
-              </a:spcAft>
-            </a:pPr>
-            <a:r>
-              <a:rPr sz="1300" b="0" i="0">
-                <a:solidFill>
-                  <a:srgbClr val="1C1B19"/>
-                </a:solidFill>
-                <a:latin typeface="Source Serif 4"/>
-              </a:rPr>
-              <a:t/>
-            </a:r>
-          </a:p>
-          <a:p>
-            <a:pPr algn="l">
-              <a:spcAft>
-                <a:spcPts val="585"/>
-              </a:spcAft>
-            </a:pPr>
-            <a:r>
-              <a:rPr sz="1500" b="1" i="0">
-                <a:solidFill>
-                  <a:srgbClr val="1C1B19"/>
-                </a:solidFill>
-                <a:latin typeface="Source Serif 4"/>
-              </a:rPr>
-              <a:t>Moving and distance.</a:t>
-            </a:r>
-          </a:p>
-          <a:p>
-            <a:pPr algn="l">
-              <a:spcAft>
-                <a:spcPts val="585"/>
-              </a:spcAft>
-            </a:pPr>
-            <a:r>
-              <a:rPr sz="1300" b="0" i="0">
-                <a:solidFill>
-                  <a:srgbClr val="1C1B19"/>
-                </a:solidFill>
-                <a:latin typeface="Source Serif 4"/>
-              </a:rPr>
-              <a:t>Students who moved schools, cities or countries may have lost friendships to distance, and may be grieving friends who speak another language. Drift counts, and staying in touch across time zones is a real form of repair.</a:t>
-            </a:r>
-          </a:p>
-          <a:p>
-            <a:pPr algn="l">
-              <a:spcAft>
-                <a:spcPts val="585"/>
-              </a:spcAft>
-            </a:pPr>
-            <a:r>
-              <a:rPr sz="1300" b="0" i="0">
-                <a:solidFill>
-                  <a:srgbClr val="1C1B19"/>
-                </a:solidFill>
-                <a:latin typeface="Source Serif 4"/>
-              </a:rPr>
-              <a:t/>
-            </a:r>
-          </a:p>
-        </p:txBody>
-      </p:sp>
-    </p:spTree>
-  </p:cSld>
-  <p:clrMapOvr>
-    <a:masterClrMapping/>
-  </p:clrMapOvr>
-</p:sld>
-</file>
-
-<file path=ppt/slides/slide4.xml><?xml version="1.0" encoding="utf-8"?>
-<p:sld xmlns:a="http://schemas.openxmlformats.org/drawingml/2006/main" xmlns:p="http://schemas.openxmlformats.org/presentationml/2006/main" xmlns:r="http://schemas.openxmlformats.org/officeDocument/2006/relationships" show="0">
-  <p:cSld>
-    <p:bg>
-      <p:bgPr>
-        <a:solidFill>
-          <a:srgbClr val="EEEBE4"/>
-        </a:solidFill>
-        <a:effectLst/>
-      </p:bgPr>
-    </p:bg>
-    <p:spTree>
-      <p:nvGrpSpPr>
-        <p:cNvPr id="1" name=""/>
-        <p:cNvGrpSpPr/>
-        <p:nvPr/>
-      </p:nvGrpSpPr>
-      <p:grpSpPr/>
-      <p:sp>
-        <p:nvSpPr>
-          <p:cNvPr id="2" name="Rectangle 1"/>
-          <p:cNvSpPr/>
-          <p:nvPr/>
-        </p:nvSpPr>
-        <p:spPr>
-          <a:xfrm>
-            <a:off x="0" y="0"/>
-            <a:ext cx="12191695" cy="384048"/>
-          </a:xfrm>
-          <a:prstGeom prst="rect">
-            <a:avLst/>
-          </a:prstGeom>
-          <a:solidFill>
-            <a:srgbClr val="0B2D5B"/>
-          </a:solidFill>
-          <a:ln>
-            <a:noFill/>
-          </a:ln>
-          <a:effectLst/>
-        </p:spPr>
-        <p:style>
-          <a:lnRef idx="1">
-            <a:schemeClr val="accent1"/>
-          </a:lnRef>
-          <a:fillRef idx="3">
-            <a:schemeClr val="accent1"/>
-          </a:fillRef>
-          <a:effectRef idx="2">
-            <a:schemeClr val="accent1"/>
-          </a:effectRef>
-          <a:fontRef idx="minor">
-            <a:schemeClr val="lt1"/>
-          </a:fontRef>
-        </p:style>
-        <p:txBody>
-          <a:bodyPr rtlCol="0" anchor="ctr"/>
-          <a:lstStyle/>
-          <a:p>
-            <a:pPr algn="ctr"/>
-          </a:p>
-        </p:txBody>
-      </p:sp>
-      <p:sp>
-        <p:nvSpPr>
-          <p:cNvPr id="3" name="TextBox 2"/>
-          <p:cNvSpPr txBox="1"/>
-          <p:nvPr/>
-        </p:nvSpPr>
-        <p:spPr>
-          <a:xfrm>
-            <a:off x="548640" y="100584"/>
-            <a:ext cx="10972800" cy="274320"/>
-          </a:xfrm>
-          <a:prstGeom prst="rect">
-            <a:avLst/>
-          </a:prstGeom>
-          <a:noFill/>
-        </p:spPr>
-        <p:txBody>
-          <a:bodyPr wrap="square" anchor="t" lIns="0" rIns="0" tIns="0" bIns="0">
-            <a:spAutoFit/>
-          </a:bodyPr>
-          <a:lstStyle/>
-          <a:p>
-            <a:pPr algn="l">
-              <a:spcAft>
-                <a:spcPts val="495"/>
-              </a:spcAft>
-            </a:pPr>
-            <a:r>
-              <a:rPr sz="1100" b="1" i="0">
-                <a:solidFill>
-                  <a:srgbClr val="FFFFFF"/>
-                </a:solidFill>
-                <a:latin typeface="Inter Tight"/>
-              </a:rPr>
-              <a:t>TEACHER PAGE  ·  skipped when you present  ·  Background</a:t>
-            </a:r>
-          </a:p>
-        </p:txBody>
-      </p:sp>
-      <p:sp>
-        <p:nvSpPr>
-          <p:cNvPr id="4" name="TextBox 3"/>
-          <p:cNvSpPr txBox="1"/>
-          <p:nvPr/>
-        </p:nvSpPr>
-        <p:spPr>
-          <a:xfrm>
-            <a:off x="548640" y="685800"/>
-            <a:ext cx="10972800" cy="640080"/>
-          </a:xfrm>
-          <a:prstGeom prst="rect">
-            <a:avLst/>
-          </a:prstGeom>
-          <a:noFill/>
-        </p:spPr>
-        <p:txBody>
-          <a:bodyPr wrap="square" anchor="t" lIns="0" rIns="0" tIns="0" bIns="0">
-            <a:spAutoFit/>
-          </a:bodyPr>
-          <a:lstStyle/>
-          <a:p>
-            <a:pPr algn="l">
-              <a:spcAft>
-                <a:spcPts val="1350"/>
-              </a:spcAft>
-            </a:pPr>
-            <a:r>
-              <a:rPr sz="3000" b="1" i="0">
-                <a:solidFill>
-                  <a:srgbClr val="1C1B19"/>
-                </a:solidFill>
-                <a:latin typeface="Source Serif 4"/>
-              </a:rPr>
-              <a:t>What the research says</a:t>
-            </a:r>
-          </a:p>
-        </p:txBody>
-      </p:sp>
-      <p:sp>
-        <p:nvSpPr>
-          <p:cNvPr id="5" name="TextBox 4"/>
-          <p:cNvSpPr txBox="1"/>
-          <p:nvPr/>
-        </p:nvSpPr>
-        <p:spPr>
-          <a:xfrm>
-            <a:off x="548640" y="1463040"/>
-            <a:ext cx="5394960" cy="4937760"/>
-          </a:xfrm>
-          <a:prstGeom prst="rect">
-            <a:avLst/>
-          </a:prstGeom>
-          <a:noFill/>
-        </p:spPr>
-        <p:txBody>
-          <a:bodyPr wrap="square" anchor="t" lIns="0" rIns="0" tIns="0" bIns="0">
-            <a:spAutoFit/>
-          </a:bodyPr>
-          <a:lstStyle/>
-          <a:p>
-            <a:pPr algn="l">
-              <a:spcAft>
-                <a:spcPts val="585"/>
-              </a:spcAft>
-            </a:pPr>
-            <a:r>
-              <a:rPr sz="1300" b="0" i="0">
-                <a:solidFill>
-                  <a:srgbClr val="1C1B19"/>
-                </a:solidFill>
-                <a:latin typeface="Source Serif 4"/>
-              </a:rPr>
-              <a:t>People left out of a simple online ball-toss game showed more activity in the dorsal anterior cingulate, a region that also responds to how upsetting physical pain feels. The more it rose, the more upset they said they were.</a:t>
-            </a:r>
-          </a:p>
-          <a:p>
-            <a:pPr algn="l">
-              <a:spcAft>
-                <a:spcPts val="585"/>
-              </a:spcAft>
-            </a:pPr>
-            <a:r>
-              <a:rPr sz="1050" b="0" i="0">
-                <a:solidFill>
-                  <a:srgbClr val="5D5A54"/>
-                </a:solidFill>
-                <a:latin typeface="Inter Tight"/>
-              </a:rPr>
-              <a:t>Eisenberger, Lieberman and Williams, Science, 2003</a:t>
-            </a:r>
-          </a:p>
-          <a:p>
-            <a:pPr algn="l">
-              <a:spcAft>
-                <a:spcPts val="585"/>
-              </a:spcAft>
-            </a:pPr>
-            <a:r>
-              <a:rPr sz="1300" b="0" i="0">
-                <a:solidFill>
-                  <a:srgbClr val="1C1B19"/>
-                </a:solidFill>
-                <a:latin typeface="Source Serif 4"/>
-              </a:rPr>
-              <a:t>In the same study, people with more activity in the right ventrolateral prefrontal cortex reported less distress. It seems to act as a brake, and it's still maturing through the teens.</a:t>
-            </a:r>
-          </a:p>
-          <a:p>
-            <a:pPr algn="l">
-              <a:spcAft>
-                <a:spcPts val="585"/>
-              </a:spcAft>
-            </a:pPr>
-            <a:r>
-              <a:rPr sz="1050" b="0" i="0">
-                <a:solidFill>
-                  <a:srgbClr val="5D5A54"/>
-                </a:solidFill>
-                <a:latin typeface="Inter Tight"/>
-              </a:rPr>
-              <a:t>Eisenberger, Lieberman and Williams, 2003</a:t>
-            </a:r>
-          </a:p>
-          <a:p>
-            <a:pPr algn="l">
-              <a:spcAft>
-                <a:spcPts val="585"/>
-              </a:spcAft>
-            </a:pPr>
-            <a:r>
-              <a:rPr sz="1300" b="0" i="0">
-                <a:solidFill>
-                  <a:srgbClr val="1C1B19"/>
-                </a:solidFill>
-                <a:latin typeface="Source Serif 4"/>
-              </a:rPr>
-              <a:t>When people who had been through an unwanted breakup looked at a photo of their ex, areas that process physical pain became active. Other scientists argue these areas respond to anything intense, so the overlap is debated.</a:t>
-            </a:r>
-          </a:p>
-          <a:p>
-            <a:pPr algn="l">
-              <a:spcAft>
-                <a:spcPts val="585"/>
-              </a:spcAft>
-            </a:pPr>
-            <a:r>
-              <a:rPr sz="1050" b="0" i="0">
-                <a:solidFill>
-                  <a:srgbClr val="5D5A54"/>
-                </a:solidFill>
-                <a:latin typeface="Inter Tight"/>
-              </a:rPr>
-              <a:t>Kross et al., Proceedings of the National Academy of Sciences, 2011</a:t>
-            </a:r>
-          </a:p>
-          <a:p>
-            <a:pPr algn="l">
-              <a:spcAft>
-                <a:spcPts val="585"/>
-              </a:spcAft>
-            </a:pPr>
-            <a:r>
-              <a:rPr sz="1300" b="0" i="0">
-                <a:solidFill>
-                  <a:srgbClr val="1C1B19"/>
-                </a:solidFill>
-                <a:latin typeface="Source Serif 4"/>
-              </a:rPr>
-              <a:t>Putting a feeling into words reduced the amygdala's response and raised activity in the brake region.</a:t>
-            </a:r>
-          </a:p>
-          <a:p>
-            <a:pPr algn="l">
-              <a:spcAft>
-                <a:spcPts val="585"/>
-              </a:spcAft>
-            </a:pPr>
-            <a:r>
-              <a:rPr sz="1050" b="0" i="0">
-                <a:solidFill>
-                  <a:srgbClr val="5D5A54"/>
-                </a:solidFill>
-                <a:latin typeface="Inter Tight"/>
-              </a:rPr>
-              <a:t>Lieberman et al., Psychological Science, 2007</a:t>
-            </a:r>
-          </a:p>
-        </p:txBody>
-      </p:sp>
-      <p:sp>
-        <p:nvSpPr>
-          <p:cNvPr id="6" name="TextBox 5"/>
-          <p:cNvSpPr txBox="1"/>
-          <p:nvPr/>
-        </p:nvSpPr>
-        <p:spPr>
-          <a:xfrm>
-            <a:off x="6217920" y="1463040"/>
-            <a:ext cx="5394960" cy="4937760"/>
-          </a:xfrm>
-          <a:prstGeom prst="rect">
-            <a:avLst/>
-          </a:prstGeom>
-          <a:noFill/>
-        </p:spPr>
-        <p:txBody>
-          <a:bodyPr wrap="square" anchor="t" lIns="0" rIns="0" tIns="0" bIns="0">
-            <a:spAutoFit/>
-          </a:bodyPr>
-          <a:lstStyle/>
-          <a:p>
-            <a:pPr algn="l">
-              <a:spcAft>
-                <a:spcPts val="585"/>
-              </a:spcAft>
-            </a:pPr>
-            <a:r>
-              <a:rPr sz="1300" b="0" i="0">
-                <a:solidFill>
-                  <a:srgbClr val="1C1B19"/>
-                </a:solidFill>
-                <a:latin typeface="Source Serif 4"/>
-              </a:rPr>
-              <a:t>Researchers followed 410 students from seventh grade through twelfth. Fewer than 1 in 4 seventh-grade friendships lasted to the next school year, and about 1 in 100 made it to senior year.</a:t>
-            </a:r>
-          </a:p>
-          <a:p>
-            <a:pPr algn="l">
-              <a:spcAft>
-                <a:spcPts val="585"/>
-              </a:spcAft>
-            </a:pPr>
-            <a:r>
-              <a:rPr sz="1050" b="0" i="0">
-                <a:solidFill>
-                  <a:srgbClr val="5D5A54"/>
-                </a:solidFill>
-                <a:latin typeface="Inter Tight"/>
-              </a:rPr>
-              <a:t>Hartl, Laursen and Cillessen, Psychological Science, 2015</a:t>
-            </a:r>
-          </a:p>
-          <a:p>
-            <a:pPr algn="l">
-              <a:spcAft>
-                <a:spcPts val="585"/>
-              </a:spcAft>
-            </a:pPr>
-            <a:r>
-              <a:rPr sz="1300" b="0" i="0">
-                <a:solidFill>
-                  <a:srgbClr val="1C1B19"/>
-                </a:solidFill>
-                <a:latin typeface="Source Serif 4"/>
-              </a:rPr>
-              <a:t>Friendships most often ended when the two people grew different, in grades, popularity, aggression, or gender.</a:t>
-            </a:r>
-          </a:p>
-          <a:p>
-            <a:pPr algn="l">
-              <a:spcAft>
-                <a:spcPts val="585"/>
-              </a:spcAft>
-            </a:pPr>
-            <a:r>
-              <a:rPr sz="1050" b="0" i="0">
-                <a:solidFill>
-                  <a:srgbClr val="5D5A54"/>
-                </a:solidFill>
-                <a:latin typeface="Inter Tight"/>
-              </a:rPr>
-              <a:t>Hartl, Laursen and Cillessen, 2015</a:t>
-            </a:r>
-          </a:p>
-          <a:p>
-            <a:pPr algn="l">
-              <a:spcAft>
-                <a:spcPts val="585"/>
-              </a:spcAft>
-            </a:pPr>
-            <a:r>
-              <a:rPr sz="1300" b="0" i="0">
-                <a:solidFill>
-                  <a:srgbClr val="1C1B19"/>
-                </a:solidFill>
-                <a:latin typeface="Source Serif 4"/>
-              </a:rPr>
-              <a:t>Writing about a painful experience for a few short sessions is linked with better health and mood afterward. The effects are modest, and they hold up across many studies.</a:t>
-            </a:r>
-          </a:p>
-          <a:p>
-            <a:pPr algn="l">
-              <a:spcAft>
-                <a:spcPts val="585"/>
-              </a:spcAft>
-            </a:pPr>
-            <a:r>
-              <a:rPr sz="1050" b="0" i="0">
-                <a:solidFill>
-                  <a:srgbClr val="5D5A54"/>
-                </a:solidFill>
-                <a:latin typeface="Inter Tight"/>
-              </a:rPr>
-              <a:t>Pennebaker, Psychological Science, 1997</a:t>
-            </a:r>
-          </a:p>
-        </p:txBody>
-      </p:sp>
-    </p:spTree>
-  </p:cSld>
-  <p:clrMapOvr>
-    <a:masterClrMapping/>
-  </p:clrMapOvr>
-</p:sld>
-</file>
-
-<file path=ppt/slides/slide5.xml><?xml version="1.0" encoding="utf-8"?>
-<p:sld xmlns:a="http://schemas.openxmlformats.org/drawingml/2006/main" xmlns:p="http://schemas.openxmlformats.org/presentationml/2006/main" xmlns:r="http://schemas.openxmlformats.org/officeDocument/2006/relationships">
-  <p:cSld>
-    <p:bg>
-      <p:bgPr>
-        <a:solidFill>
-          <a:srgbClr val="0B2D5B"/>
-        </a:solidFill>
-        <a:effectLst/>
-      </p:bgPr>
-    </p:bg>
-    <p:spTree>
-      <p:nvGrpSpPr>
-        <p:cNvPr id="1" name=""/>
-        <p:cNvGrpSpPr/>
-        <p:nvPr/>
-      </p:nvGrpSpPr>
-      <p:grpSpPr/>
-      <p:sp>
-        <p:nvSpPr>
-          <p:cNvPr id="2" name="Rectangle 1"/>
-          <p:cNvSpPr/>
-          <p:nvPr/>
-        </p:nvSpPr>
-        <p:spPr>
-          <a:xfrm>
-            <a:off x="548640" y="502920"/>
-            <a:ext cx="457200" cy="54864"/>
-          </a:xfrm>
-          <a:prstGeom prst="rect">
-            <a:avLst/>
-          </a:prstGeom>
-          <a:solidFill>
-            <a:srgbClr val="F47B20"/>
-          </a:solidFill>
-          <a:ln>
-            <a:noFill/>
-          </a:ln>
-          <a:effectLst/>
-        </p:spPr>
-        <p:style>
-          <a:lnRef idx="1">
-            <a:schemeClr val="accent1"/>
-          </a:lnRef>
-          <a:fillRef idx="3">
-            <a:schemeClr val="accent1"/>
-          </a:fillRef>
-          <a:effectRef idx="2">
-            <a:schemeClr val="accent1"/>
-          </a:effectRef>
-          <a:fontRef idx="minor">
-            <a:schemeClr val="lt1"/>
-          </a:fontRef>
-        </p:style>
-        <p:txBody>
-          <a:bodyPr rtlCol="0" anchor="ctr"/>
-          <a:lstStyle/>
-          <a:p>
-            <a:pPr algn="ctr"/>
-          </a:p>
-        </p:txBody>
-      </p:sp>
-      <p:sp>
-        <p:nvSpPr>
-          <p:cNvPr id="3" name="TextBox 2"/>
-          <p:cNvSpPr txBox="1"/>
-          <p:nvPr/>
-        </p:nvSpPr>
-        <p:spPr>
-          <a:xfrm>
-            <a:off x="1143000" y="393192"/>
-            <a:ext cx="8229600" cy="274320"/>
-          </a:xfrm>
-          <a:prstGeom prst="rect">
-            <a:avLst/>
-          </a:prstGeom>
-          <a:noFill/>
-        </p:spPr>
-        <p:txBody>
-          <a:bodyPr wrap="square" anchor="t" lIns="0" rIns="0" tIns="0" bIns="0">
-            <a:spAutoFit/>
-          </a:bodyPr>
-          <a:lstStyle/>
-          <a:p>
-            <a:pPr algn="l">
-              <a:spcAft>
-                <a:spcPts val="540"/>
-              </a:spcAft>
-            </a:pPr>
-            <a:r>
-              <a:rPr sz="1200" b="1" i="0">
-                <a:solidFill>
-                  <a:srgbClr val="5D5A54"/>
-                </a:solidFill>
-                <a:latin typeface="Inter Tight"/>
-              </a:rPr>
-              <a:t>FRIENDSHIP BREAKUPS</a:t>
-            </a:r>
-          </a:p>
-        </p:txBody>
-      </p:sp>
-      <p:sp>
-        <p:nvSpPr>
-          <p:cNvPr id="4" name="TextBox 3"/>
-          <p:cNvSpPr txBox="1"/>
-          <p:nvPr/>
-        </p:nvSpPr>
-        <p:spPr>
-          <a:xfrm>
-            <a:off x="8229600" y="6400800"/>
-            <a:ext cx="3410712" cy="274320"/>
-          </a:xfrm>
-          <a:prstGeom prst="rect">
-            <a:avLst/>
-          </a:prstGeom>
-          <a:noFill/>
-        </p:spPr>
-        <p:txBody>
-          <a:bodyPr wrap="square" anchor="t" lIns="0" rIns="0" tIns="0" bIns="0">
-            <a:spAutoFit/>
-          </a:bodyPr>
-          <a:lstStyle/>
-          <a:p>
-            <a:pPr algn="r">
-              <a:spcAft>
-                <a:spcPts val="450"/>
-              </a:spcAft>
-            </a:pPr>
-            <a:r>
-              <a:rPr sz="1000" b="0" i="0">
-                <a:solidFill>
-                  <a:srgbClr val="5D5A54"/>
-                </a:solidFill>
-                <a:latin typeface="Inter Tight"/>
-              </a:rPr>
-              <a:t>Beaver Counseling</a:t>
-            </a:r>
-          </a:p>
-        </p:txBody>
-      </p:sp>
-      <p:sp>
-        <p:nvSpPr>
-          <p:cNvPr id="5" name="TextBox 4"/>
-          <p:cNvSpPr txBox="1"/>
-          <p:nvPr/>
-        </p:nvSpPr>
-        <p:spPr>
-          <a:xfrm>
-            <a:off x="822960" y="2011680"/>
-            <a:ext cx="10515600" cy="1463040"/>
-          </a:xfrm>
-          <a:prstGeom prst="rect">
-            <a:avLst/>
-          </a:prstGeom>
-          <a:noFill/>
-        </p:spPr>
-        <p:txBody>
-          <a:bodyPr wrap="square" anchor="b" lIns="0" rIns="0" tIns="0" bIns="0">
-            <a:spAutoFit/>
-          </a:bodyPr>
-          <a:lstStyle/>
-          <a:p>
-            <a:pPr algn="l">
-              <a:spcAft>
-                <a:spcPts val="2700"/>
-              </a:spcAft>
-            </a:pPr>
-            <a:r>
-              <a:rPr sz="6000" b="1" i="0">
-                <a:solidFill>
-                  <a:srgbClr val="FFFFFF"/>
-                </a:solidFill>
-                <a:latin typeface="Source Serif 4"/>
-              </a:rPr>
-              <a:t>Friendship Breakups</a:t>
-            </a:r>
-          </a:p>
-        </p:txBody>
-      </p:sp>
-      <p:sp>
-        <p:nvSpPr>
-          <p:cNvPr id="6" name="TextBox 5"/>
-          <p:cNvSpPr txBox="1"/>
-          <p:nvPr/>
-        </p:nvSpPr>
-        <p:spPr>
-          <a:xfrm>
-            <a:off x="822960" y="3611880"/>
-            <a:ext cx="10515600" cy="914400"/>
-          </a:xfrm>
-          <a:prstGeom prst="rect">
-            <a:avLst/>
-          </a:prstGeom>
-          <a:noFill/>
-        </p:spPr>
-        <p:txBody>
-          <a:bodyPr wrap="square" anchor="t" lIns="0" rIns="0" tIns="0" bIns="0">
-            <a:spAutoFit/>
-          </a:bodyPr>
-          <a:lstStyle/>
-          <a:p>
-            <a:pPr algn="l">
-              <a:spcAft>
-                <a:spcPts val="1080"/>
-              </a:spcAft>
-            </a:pPr>
-            <a:r>
-              <a:rPr sz="2400" b="0" i="1">
-                <a:solidFill>
-                  <a:srgbClr val="E8E4DA"/>
-                </a:solidFill>
-                <a:latin typeface="Source Serif 4"/>
-              </a:rPr>
-              <a:t>Nobody died. It still feels like grief.</a:t>
-            </a:r>
-          </a:p>
-        </p:txBody>
-      </p:sp>
-      <p:sp>
-        <p:nvSpPr>
-          <p:cNvPr id="7" name="TextBox 6"/>
-          <p:cNvSpPr txBox="1"/>
-          <p:nvPr/>
-        </p:nvSpPr>
-        <p:spPr>
-          <a:xfrm>
-            <a:off x="822960" y="6035040"/>
-            <a:ext cx="7315200" cy="365760"/>
-          </a:xfrm>
-          <a:prstGeom prst="rect">
-            <a:avLst/>
-          </a:prstGeom>
-          <a:noFill/>
-        </p:spPr>
-        <p:txBody>
-          <a:bodyPr wrap="square" anchor="t" lIns="0" rIns="0" tIns="0" bIns="0">
-            <a:spAutoFit/>
-          </a:bodyPr>
-          <a:lstStyle/>
-          <a:p>
-            <a:pPr algn="l">
-              <a:spcAft>
-                <a:spcPts val="585"/>
-              </a:spcAft>
-            </a:pPr>
-            <a:r>
-              <a:rPr sz="1300" b="0" i="0">
-                <a:solidFill>
-                  <a:srgbClr val="E8E4DA"/>
-                </a:solidFill>
-                <a:latin typeface="Inter Tight"/>
-              </a:rPr>
-              <a:t>Beaver Upper School · Counseling</a:t>
+              <a:t>You see them every day</a:t>
             </a:r>
           </a:p>
         </p:txBody>
@@ -7564,7 +7773,7 @@
                 </a:solidFill>
                 <a:latin typeface="Inter Tight"/>
               </a:rPr>
-              <a:t>THE GUESS</a:t>
+              <a:t>WHAT HELPS</a:t>
             </a:r>
           </a:p>
         </p:txBody>
@@ -7610,45 +7819,40 @@
       </p:sp>
       <p:sp>
         <p:nvSpPr>
-          <p:cNvPr id="5" name="Rectangle 4"/>
-          <p:cNvSpPr/>
+          <p:cNvPr id="5" name="TextBox 4"/>
+          <p:cNvSpPr txBox="1"/>
           <p:nvPr/>
         </p:nvSpPr>
         <p:spPr>
           <a:xfrm>
-            <a:off x="822960" y="1371600"/>
-            <a:ext cx="73152" cy="3566160"/>
-          </a:xfrm>
-          <a:prstGeom prst="rect">
-            <a:avLst/>
-          </a:prstGeom>
-          <a:solidFill>
-            <a:srgbClr val="F47B20"/>
-          </a:solidFill>
-          <a:ln>
-            <a:noFill/>
-          </a:ln>
-          <a:effectLst/>
-        </p:spPr>
-        <p:style>
-          <a:lnRef idx="1">
-            <a:schemeClr val="accent1"/>
-          </a:lnRef>
-          <a:fillRef idx="3">
-            <a:schemeClr val="accent1"/>
-          </a:fillRef>
-          <a:effectRef idx="2">
-            <a:schemeClr val="accent1"/>
-          </a:effectRef>
-          <a:fontRef idx="minor">
-            <a:schemeClr val="lt1"/>
-          </a:fontRef>
-        </p:style>
-        <p:txBody>
-          <a:bodyPr rtlCol="0" anchor="ctr"/>
-          <a:lstStyle/>
-          <a:p>
-            <a:pPr algn="ctr"/>
+            <a:off x="822960" y="1005840"/>
+            <a:ext cx="10515600" cy="1097280"/>
+          </a:xfrm>
+          <a:prstGeom prst="rect">
+            <a:avLst/>
+          </a:prstGeom>
+          <a:noFill/>
+        </p:spPr>
+        <p:txBody>
+          <a:bodyPr wrap="square" anchor="t" lIns="0" rIns="0" tIns="0" bIns="0">
+            <a:spAutoFit/>
+          </a:bodyPr>
+          <a:lstStyle/>
+          <a:p>
+            <a:pPr algn="l">
+              <a:spcAft>
+                <a:spcPts val="1620"/>
+              </a:spcAft>
+            </a:pPr>
+            <a:r>
+              <a:rPr sz="3600" b="1" i="0">
+                <a:solidFill>
+                  <a:srgbClr val="1C1B19"/>
+                </a:solidFill>
+                <a:latin typeface="Source Serif 4"/>
+              </a:rPr>
+              <a:t>Feel it. Decide. Then rebuild.</a:t>
+            </a:r>
           </a:p>
         </p:txBody>
       </p:sp>
@@ -7660,8 +7864,8 @@
         </p:nvSpPr>
         <p:spPr>
           <a:xfrm>
-            <a:off x="1188720" y="1371600"/>
-            <a:ext cx="10058400" cy="3566160"/>
+            <a:off x="822960" y="2057400"/>
+            <a:ext cx="548640" cy="804672"/>
           </a:xfrm>
           <a:prstGeom prst="rect">
             <a:avLst/>
@@ -7669,24 +7873,24 @@
           <a:noFill/>
         </p:spPr>
         <p:txBody>
-          <a:bodyPr wrap="square" anchor="ctr" lIns="0" rIns="0" tIns="0" bIns="0">
+          <a:bodyPr wrap="square" anchor="t" lIns="0" rIns="0" tIns="0" bIns="0">
             <a:spAutoFit/>
           </a:bodyPr>
           <a:lstStyle/>
           <a:p>
             <a:pPr algn="l">
               <a:spcAft>
-                <a:spcPts val="1800"/>
-              </a:spcAft>
-            </a:pPr>
-            <a:r>
-              <a:rPr sz="4000" b="0" i="1">
-                <a:solidFill>
-                  <a:srgbClr val="1C1B19"/>
+                <a:spcPts val="1170"/>
+              </a:spcAft>
+            </a:pPr>
+            <a:r>
+              <a:rPr sz="2600" b="1" i="0">
+                <a:solidFill>
+                  <a:srgbClr val="F47B20"/>
                 </a:solidFill>
                 <a:latin typeface="Source Serif 4"/>
               </a:rPr>
-              <a:t>100 friendships start in 7th grade. How many last to senior year?</a:t>
+              <a:t>1</a:t>
             </a:r>
           </a:p>
         </p:txBody>
@@ -7699,8 +7903,8 @@
         </p:nvSpPr>
         <p:spPr>
           <a:xfrm>
-            <a:off x="1188720" y="5120640"/>
-            <a:ext cx="10058400" cy="914400"/>
+            <a:off x="1463040" y="2093976"/>
+            <a:ext cx="9875520" cy="804672"/>
           </a:xfrm>
           <a:prstGeom prst="rect">
             <a:avLst/>
@@ -7715,17 +7919,409 @@
           <a:p>
             <a:pPr algn="l">
               <a:spcAft>
-                <a:spcPts val="810"/>
-              </a:spcAft>
-            </a:pPr>
-            <a:r>
-              <a:rPr sz="1800" b="0" i="0">
+                <a:spcPts val="945"/>
+              </a:spcAft>
+            </a:pPr>
+            <a:r>
+              <a:rPr sz="2100" b="1" i="0">
+                <a:solidFill>
+                  <a:srgbClr val="1C1B19"/>
+                </a:solidFill>
+                <a:latin typeface="Source Serif 4"/>
+              </a:rPr>
+              <a:t>Name the feeling, specifically.</a:t>
+            </a:r>
+          </a:p>
+          <a:p>
+            <a:pPr algn="l">
+              <a:spcAft>
+                <a:spcPts val="945"/>
+              </a:spcAft>
+            </a:pPr>
+            <a:r>
+              <a:rPr sz="1600" b="0" i="0">
                 <a:solidFill>
                   <a:srgbClr val="5D5A54"/>
                 </a:solidFill>
-                <a:latin typeface="Inter Tight"/>
-              </a:rPr>
-              <a:t>Write your number on a scrap. No names.</a:t>
+                <a:latin typeface="Source Serif 4"/>
+              </a:rPr>
+              <a:t>"Relieved and guilty" says more than "bad."</a:t>
+            </a:r>
+          </a:p>
+        </p:txBody>
+      </p:sp>
+      <p:sp>
+        <p:nvSpPr>
+          <p:cNvPr id="8" name="TextBox 7"/>
+          <p:cNvSpPr txBox="1"/>
+          <p:nvPr/>
+        </p:nvSpPr>
+        <p:spPr>
+          <a:xfrm>
+            <a:off x="822960" y="2862072"/>
+            <a:ext cx="548640" cy="804672"/>
+          </a:xfrm>
+          <a:prstGeom prst="rect">
+            <a:avLst/>
+          </a:prstGeom>
+          <a:noFill/>
+        </p:spPr>
+        <p:txBody>
+          <a:bodyPr wrap="square" anchor="t" lIns="0" rIns="0" tIns="0" bIns="0">
+            <a:spAutoFit/>
+          </a:bodyPr>
+          <a:lstStyle/>
+          <a:p>
+            <a:pPr algn="l">
+              <a:spcAft>
+                <a:spcPts val="1170"/>
+              </a:spcAft>
+            </a:pPr>
+            <a:r>
+              <a:rPr sz="2600" b="1" i="0">
+                <a:solidFill>
+                  <a:srgbClr val="F47B20"/>
+                </a:solidFill>
+                <a:latin typeface="Source Serif 4"/>
+              </a:rPr>
+              <a:t>2</a:t>
+            </a:r>
+          </a:p>
+        </p:txBody>
+      </p:sp>
+      <p:sp>
+        <p:nvSpPr>
+          <p:cNvPr id="9" name="TextBox 8"/>
+          <p:cNvSpPr txBox="1"/>
+          <p:nvPr/>
+        </p:nvSpPr>
+        <p:spPr>
+          <a:xfrm>
+            <a:off x="1463040" y="2898648"/>
+            <a:ext cx="9875520" cy="804672"/>
+          </a:xfrm>
+          <a:prstGeom prst="rect">
+            <a:avLst/>
+          </a:prstGeom>
+          <a:noFill/>
+        </p:spPr>
+        <p:txBody>
+          <a:bodyPr wrap="square" anchor="t" lIns="0" rIns="0" tIns="0" bIns="0">
+            <a:spAutoFit/>
+          </a:bodyPr>
+          <a:lstStyle/>
+          <a:p>
+            <a:pPr algn="l">
+              <a:spcAft>
+                <a:spcPts val="945"/>
+              </a:spcAft>
+            </a:pPr>
+            <a:r>
+              <a:rPr sz="2100" b="1" i="0">
+                <a:solidFill>
+                  <a:srgbClr val="1C1B19"/>
+                </a:solidFill>
+                <a:latin typeface="Source Serif 4"/>
+              </a:rPr>
+              <a:t>Tell one person the real version.</a:t>
+            </a:r>
+          </a:p>
+          <a:p>
+            <a:pPr algn="l">
+              <a:spcAft>
+                <a:spcPts val="945"/>
+              </a:spcAft>
+            </a:pPr>
+            <a:r>
+              <a:rPr sz="1600" b="0" i="0">
+                <a:solidFill>
+                  <a:srgbClr val="5D5A54"/>
+                </a:solidFill>
+                <a:latin typeface="Source Serif 4"/>
+              </a:rPr>
+              <a:t>Someone outside the friend group.</a:t>
+            </a:r>
+          </a:p>
+        </p:txBody>
+      </p:sp>
+      <p:sp>
+        <p:nvSpPr>
+          <p:cNvPr id="10" name="TextBox 9"/>
+          <p:cNvSpPr txBox="1"/>
+          <p:nvPr/>
+        </p:nvSpPr>
+        <p:spPr>
+          <a:xfrm>
+            <a:off x="822960" y="3666744"/>
+            <a:ext cx="548640" cy="804672"/>
+          </a:xfrm>
+          <a:prstGeom prst="rect">
+            <a:avLst/>
+          </a:prstGeom>
+          <a:noFill/>
+        </p:spPr>
+        <p:txBody>
+          <a:bodyPr wrap="square" anchor="t" lIns="0" rIns="0" tIns="0" bIns="0">
+            <a:spAutoFit/>
+          </a:bodyPr>
+          <a:lstStyle/>
+          <a:p>
+            <a:pPr algn="l">
+              <a:spcAft>
+                <a:spcPts val="1170"/>
+              </a:spcAft>
+            </a:pPr>
+            <a:r>
+              <a:rPr sz="2600" b="1" i="0">
+                <a:solidFill>
+                  <a:srgbClr val="F47B20"/>
+                </a:solidFill>
+                <a:latin typeface="Source Serif 4"/>
+              </a:rPr>
+              <a:t>3</a:t>
+            </a:r>
+          </a:p>
+        </p:txBody>
+      </p:sp>
+      <p:sp>
+        <p:nvSpPr>
+          <p:cNvPr id="11" name="TextBox 10"/>
+          <p:cNvSpPr txBox="1"/>
+          <p:nvPr/>
+        </p:nvSpPr>
+        <p:spPr>
+          <a:xfrm>
+            <a:off x="1463040" y="3703320"/>
+            <a:ext cx="9875520" cy="804672"/>
+          </a:xfrm>
+          <a:prstGeom prst="rect">
+            <a:avLst/>
+          </a:prstGeom>
+          <a:noFill/>
+        </p:spPr>
+        <p:txBody>
+          <a:bodyPr wrap="square" anchor="t" lIns="0" rIns="0" tIns="0" bIns="0">
+            <a:spAutoFit/>
+          </a:bodyPr>
+          <a:lstStyle/>
+          <a:p>
+            <a:pPr algn="l">
+              <a:spcAft>
+                <a:spcPts val="945"/>
+              </a:spcAft>
+            </a:pPr>
+            <a:r>
+              <a:rPr sz="2100" b="1" i="0">
+                <a:solidFill>
+                  <a:srgbClr val="1C1B19"/>
+                </a:solidFill>
+                <a:latin typeface="Source Serif 4"/>
+              </a:rPr>
+              <a:t>Decide: repair, reset, or release.</a:t>
+            </a:r>
+          </a:p>
+          <a:p>
+            <a:pPr algn="l">
+              <a:spcAft>
+                <a:spcPts val="945"/>
+              </a:spcAft>
+            </a:pPr>
+            <a:r>
+              <a:rPr sz="1600" b="0" i="0">
+                <a:solidFill>
+                  <a:srgbClr val="5D5A54"/>
+                </a:solidFill>
+                <a:latin typeface="Source Serif 4"/>
+              </a:rPr>
+              <a:t>All three are fine. Not choosing keeps you stuck.</a:t>
+            </a:r>
+          </a:p>
+        </p:txBody>
+      </p:sp>
+      <p:sp>
+        <p:nvSpPr>
+          <p:cNvPr id="12" name="TextBox 11"/>
+          <p:cNvSpPr txBox="1"/>
+          <p:nvPr/>
+        </p:nvSpPr>
+        <p:spPr>
+          <a:xfrm>
+            <a:off x="822960" y="4471416"/>
+            <a:ext cx="548640" cy="804672"/>
+          </a:xfrm>
+          <a:prstGeom prst="rect">
+            <a:avLst/>
+          </a:prstGeom>
+          <a:noFill/>
+        </p:spPr>
+        <p:txBody>
+          <a:bodyPr wrap="square" anchor="t" lIns="0" rIns="0" tIns="0" bIns="0">
+            <a:spAutoFit/>
+          </a:bodyPr>
+          <a:lstStyle/>
+          <a:p>
+            <a:pPr algn="l">
+              <a:spcAft>
+                <a:spcPts val="1170"/>
+              </a:spcAft>
+            </a:pPr>
+            <a:r>
+              <a:rPr sz="2600" b="1" i="0">
+                <a:solidFill>
+                  <a:srgbClr val="F47B20"/>
+                </a:solidFill>
+                <a:latin typeface="Source Serif 4"/>
+              </a:rPr>
+              <a:t>4</a:t>
+            </a:r>
+          </a:p>
+        </p:txBody>
+      </p:sp>
+      <p:sp>
+        <p:nvSpPr>
+          <p:cNvPr id="13" name="TextBox 12"/>
+          <p:cNvSpPr txBox="1"/>
+          <p:nvPr/>
+        </p:nvSpPr>
+        <p:spPr>
+          <a:xfrm>
+            <a:off x="1463040" y="4507992"/>
+            <a:ext cx="9875520" cy="804672"/>
+          </a:xfrm>
+          <a:prstGeom prst="rect">
+            <a:avLst/>
+          </a:prstGeom>
+          <a:noFill/>
+        </p:spPr>
+        <p:txBody>
+          <a:bodyPr wrap="square" anchor="t" lIns="0" rIns="0" tIns="0" bIns="0">
+            <a:spAutoFit/>
+          </a:bodyPr>
+          <a:lstStyle/>
+          <a:p>
+            <a:pPr algn="l">
+              <a:spcAft>
+                <a:spcPts val="945"/>
+              </a:spcAft>
+            </a:pPr>
+            <a:r>
+              <a:rPr sz="2100" b="1" i="0">
+                <a:solidFill>
+                  <a:srgbClr val="1C1B19"/>
+                </a:solidFill>
+                <a:latin typeface="Source Serif 4"/>
+              </a:rPr>
+              <a:t>Plan for the run-ins.</a:t>
+            </a:r>
+          </a:p>
+          <a:p>
+            <a:pPr algn="l">
+              <a:spcAft>
+                <a:spcPts val="945"/>
+              </a:spcAft>
+            </a:pPr>
+            <a:r>
+              <a:rPr sz="1600" b="0" i="0">
+                <a:solidFill>
+                  <a:srgbClr val="5D5A54"/>
+                </a:solidFill>
+                <a:latin typeface="Source Serif 4"/>
+              </a:rPr>
+              <a:t>A nod, a "hey," or nothing. Decide ahead.</a:t>
+            </a:r>
+          </a:p>
+        </p:txBody>
+      </p:sp>
+      <p:sp>
+        <p:nvSpPr>
+          <p:cNvPr id="14" name="TextBox 13"/>
+          <p:cNvSpPr txBox="1"/>
+          <p:nvPr/>
+        </p:nvSpPr>
+        <p:spPr>
+          <a:xfrm>
+            <a:off x="822960" y="5276088"/>
+            <a:ext cx="548640" cy="804672"/>
+          </a:xfrm>
+          <a:prstGeom prst="rect">
+            <a:avLst/>
+          </a:prstGeom>
+          <a:noFill/>
+        </p:spPr>
+        <p:txBody>
+          <a:bodyPr wrap="square" anchor="t" lIns="0" rIns="0" tIns="0" bIns="0">
+            <a:spAutoFit/>
+          </a:bodyPr>
+          <a:lstStyle/>
+          <a:p>
+            <a:pPr algn="l">
+              <a:spcAft>
+                <a:spcPts val="1170"/>
+              </a:spcAft>
+            </a:pPr>
+            <a:r>
+              <a:rPr sz="2600" b="1" i="0">
+                <a:solidFill>
+                  <a:srgbClr val="F47B20"/>
+                </a:solidFill>
+                <a:latin typeface="Source Serif 4"/>
+              </a:rPr>
+              <a:t>5</a:t>
+            </a:r>
+          </a:p>
+        </p:txBody>
+      </p:sp>
+      <p:sp>
+        <p:nvSpPr>
+          <p:cNvPr id="15" name="TextBox 14"/>
+          <p:cNvSpPr txBox="1"/>
+          <p:nvPr/>
+        </p:nvSpPr>
+        <p:spPr>
+          <a:xfrm>
+            <a:off x="1463040" y="5312664"/>
+            <a:ext cx="9875520" cy="804672"/>
+          </a:xfrm>
+          <a:prstGeom prst="rect">
+            <a:avLst/>
+          </a:prstGeom>
+          <a:noFill/>
+        </p:spPr>
+        <p:txBody>
+          <a:bodyPr wrap="square" anchor="t" lIns="0" rIns="0" tIns="0" bIns="0">
+            <a:spAutoFit/>
+          </a:bodyPr>
+          <a:lstStyle/>
+          <a:p>
+            <a:pPr algn="l">
+              <a:spcAft>
+                <a:spcPts val="945"/>
+              </a:spcAft>
+            </a:pPr>
+            <a:r>
+              <a:rPr sz="2100" b="1" i="0">
+                <a:solidFill>
+                  <a:srgbClr val="1C1B19"/>
+                </a:solidFill>
+                <a:latin typeface="Source Serif 4"/>
+              </a:rPr>
+              <a:t>Don't let it rewrite your story.</a:t>
+            </a:r>
+          </a:p>
+          <a:p>
+            <a:pPr algn="l">
+              <a:spcAft>
+                <a:spcPts val="945"/>
+              </a:spcAft>
+            </a:pPr>
+            <a:r>
+              <a:rPr sz="1600" b="0" i="0">
+                <a:solidFill>
+                  <a:srgbClr val="5D5A54"/>
+                </a:solidFill>
+                <a:latin typeface="Source Serif 4"/>
+              </a:rPr>
+              <a:t>One ending isn't proof people always leave.</a:t>
             </a:r>
           </a:p>
         </p:txBody>
@@ -7834,7 +8430,7 @@
                 </a:solidFill>
                 <a:latin typeface="Inter Tight"/>
               </a:rPr>
-              <a:t>THE REAL NUMBER</a:t>
+              <a:t>REPAIR, RESET, OR RELEASE?</a:t>
             </a:r>
           </a:p>
         </p:txBody>
@@ -7886,47 +8482,8 @@
         </p:nvSpPr>
         <p:spPr>
           <a:xfrm>
-            <a:off x="822960" y="1463040"/>
-            <a:ext cx="10515600" cy="3291840"/>
-          </a:xfrm>
-          <a:prstGeom prst="rect">
-            <a:avLst/>
-          </a:prstGeom>
-          <a:noFill/>
-        </p:spPr>
-        <p:txBody>
-          <a:bodyPr wrap="square" anchor="ctr" lIns="0" rIns="0" tIns="0" bIns="0">
-            <a:spAutoFit/>
-          </a:bodyPr>
-          <a:lstStyle/>
-          <a:p>
-            <a:pPr algn="l">
-              <a:spcAft>
-                <a:spcPts val="2070"/>
-              </a:spcAft>
-            </a:pPr>
-            <a:r>
-              <a:rPr sz="4600" b="1" i="0">
-                <a:solidFill>
-                  <a:srgbClr val="1C1B19"/>
-                </a:solidFill>
-                <a:latin typeface="Source Serif 4"/>
-              </a:rPr>
-              <a:t>About 1.</a:t>
-            </a:r>
-          </a:p>
-        </p:txBody>
-      </p:sp>
-      <p:sp>
-        <p:nvSpPr>
-          <p:cNvPr id="6" name="TextBox 5"/>
-          <p:cNvSpPr txBox="1"/>
-          <p:nvPr/>
-        </p:nvSpPr>
-        <p:spPr>
-          <a:xfrm>
-            <a:off x="822960" y="4846320"/>
-            <a:ext cx="10515600" cy="1097280"/>
+            <a:off x="822960" y="1005840"/>
+            <a:ext cx="10515600" cy="914400"/>
           </a:xfrm>
           <a:prstGeom prst="rect">
             <a:avLst/>
@@ -7941,17 +8498,389 @@
           <a:p>
             <a:pPr algn="l">
               <a:spcAft>
-                <a:spcPts val="990"/>
-              </a:spcAft>
-            </a:pPr>
-            <a:r>
-              <a:rPr sz="2200" b="0" i="1">
-                <a:solidFill>
-                  <a:srgbClr val="5D5A54"/>
+                <a:spcPts val="1530"/>
+              </a:spcAft>
+            </a:pPr>
+            <a:r>
+              <a:rPr sz="3400" b="1" i="0">
+                <a:solidFill>
+                  <a:srgbClr val="1C1B19"/>
                 </a:solidFill>
                 <a:latin typeface="Source Serif 4"/>
               </a:rPr>
-              <a:t>Fewer than 1 in 4 even lasted to the next school year. Most ended because people grew different.</a:t>
+              <a:t>Three situations. More than one answer can work.</a:t>
+            </a:r>
+          </a:p>
+        </p:txBody>
+      </p:sp>
+      <p:sp>
+        <p:nvSpPr>
+          <p:cNvPr id="6" name="Rectangle 5"/>
+          <p:cNvSpPr/>
+          <p:nvPr/>
+        </p:nvSpPr>
+        <p:spPr>
+          <a:xfrm>
+            <a:off x="822960" y="2103120"/>
+            <a:ext cx="3322320" cy="3840480"/>
+          </a:xfrm>
+          <a:prstGeom prst="rect">
+            <a:avLst/>
+          </a:prstGeom>
+          <a:solidFill>
+            <a:srgbClr val="FFFFFF"/>
+          </a:solidFill>
+          <a:ln w="15875">
+            <a:solidFill>
+              <a:srgbClr val="D8D2C6"/>
+            </a:solidFill>
+          </a:ln>
+          <a:effectLst/>
+        </p:spPr>
+        <p:style>
+          <a:lnRef idx="1">
+            <a:schemeClr val="accent1"/>
+          </a:lnRef>
+          <a:fillRef idx="3">
+            <a:schemeClr val="accent1"/>
+          </a:fillRef>
+          <a:effectRef idx="2">
+            <a:schemeClr val="accent1"/>
+          </a:effectRef>
+          <a:fontRef idx="minor">
+            <a:schemeClr val="lt1"/>
+          </a:fontRef>
+        </p:style>
+        <p:txBody>
+          <a:bodyPr rtlCol="0" anchor="ctr"/>
+          <a:lstStyle/>
+          <a:p>
+            <a:pPr algn="ctr"/>
+          </a:p>
+        </p:txBody>
+      </p:sp>
+      <p:sp>
+        <p:nvSpPr>
+          <p:cNvPr id="7" name="TextBox 6"/>
+          <p:cNvSpPr txBox="1"/>
+          <p:nvPr/>
+        </p:nvSpPr>
+        <p:spPr>
+          <a:xfrm>
+            <a:off x="1051560" y="2286000"/>
+            <a:ext cx="2865120" cy="365760"/>
+          </a:xfrm>
+          <a:prstGeom prst="rect">
+            <a:avLst/>
+          </a:prstGeom>
+          <a:noFill/>
+        </p:spPr>
+        <p:txBody>
+          <a:bodyPr wrap="square" anchor="t" lIns="0" rIns="0" tIns="0" bIns="0">
+            <a:spAutoFit/>
+          </a:bodyPr>
+          <a:lstStyle/>
+          <a:p>
+            <a:pPr algn="l">
+              <a:spcAft>
+                <a:spcPts val="585"/>
+              </a:spcAft>
+            </a:pPr>
+            <a:r>
+              <a:rPr sz="1300" b="1" i="0">
+                <a:solidFill>
+                  <a:srgbClr val="0B2D5B"/>
+                </a:solidFill>
+                <a:latin typeface="Inter Tight"/>
+              </a:rPr>
+              <a:t>MAYA AND JORDAN</a:t>
+            </a:r>
+          </a:p>
+        </p:txBody>
+      </p:sp>
+      <p:sp>
+        <p:nvSpPr>
+          <p:cNvPr id="8" name="TextBox 7"/>
+          <p:cNvSpPr txBox="1"/>
+          <p:nvPr/>
+        </p:nvSpPr>
+        <p:spPr>
+          <a:xfrm>
+            <a:off x="1051560" y="2743200"/>
+            <a:ext cx="2865120" cy="3017520"/>
+          </a:xfrm>
+          <a:prstGeom prst="rect">
+            <a:avLst/>
+          </a:prstGeom>
+          <a:noFill/>
+        </p:spPr>
+        <p:txBody>
+          <a:bodyPr wrap="square" anchor="t" lIns="0" rIns="0" tIns="0" bIns="0">
+            <a:spAutoFit/>
+          </a:bodyPr>
+          <a:lstStyle/>
+          <a:p>
+            <a:pPr algn="l">
+              <a:spcAft>
+                <a:spcPts val="810"/>
+              </a:spcAft>
+            </a:pPr>
+            <a:r>
+              <a:rPr sz="1800" b="0" i="0">
+                <a:solidFill>
+                  <a:srgbClr val="1C1B19"/>
+                </a:solidFill>
+                <a:latin typeface="Source Serif 4"/>
+              </a:rPr>
+              <a:t>Best friends since sixth grade. Junior year, Jordan starts a demanding dual-enrollment program and cancels most plans. Maya feels dropped.</a:t>
+            </a:r>
+          </a:p>
+        </p:txBody>
+      </p:sp>
+      <p:sp>
+        <p:nvSpPr>
+          <p:cNvPr id="9" name="Rectangle 8"/>
+          <p:cNvSpPr/>
+          <p:nvPr/>
+        </p:nvSpPr>
+        <p:spPr>
+          <a:xfrm>
+            <a:off x="4419600" y="2103120"/>
+            <a:ext cx="3322320" cy="3840480"/>
+          </a:xfrm>
+          <a:prstGeom prst="rect">
+            <a:avLst/>
+          </a:prstGeom>
+          <a:solidFill>
+            <a:srgbClr val="FFFFFF"/>
+          </a:solidFill>
+          <a:ln w="15875">
+            <a:solidFill>
+              <a:srgbClr val="D8D2C6"/>
+            </a:solidFill>
+          </a:ln>
+          <a:effectLst/>
+        </p:spPr>
+        <p:style>
+          <a:lnRef idx="1">
+            <a:schemeClr val="accent1"/>
+          </a:lnRef>
+          <a:fillRef idx="3">
+            <a:schemeClr val="accent1"/>
+          </a:fillRef>
+          <a:effectRef idx="2">
+            <a:schemeClr val="accent1"/>
+          </a:effectRef>
+          <a:fontRef idx="minor">
+            <a:schemeClr val="lt1"/>
+          </a:fontRef>
+        </p:style>
+        <p:txBody>
+          <a:bodyPr rtlCol="0" anchor="ctr"/>
+          <a:lstStyle/>
+          <a:p>
+            <a:pPr algn="ctr"/>
+          </a:p>
+        </p:txBody>
+      </p:sp>
+      <p:sp>
+        <p:nvSpPr>
+          <p:cNvPr id="10" name="TextBox 9"/>
+          <p:cNvSpPr txBox="1"/>
+          <p:nvPr/>
+        </p:nvSpPr>
+        <p:spPr>
+          <a:xfrm>
+            <a:off x="4648200" y="2286000"/>
+            <a:ext cx="2865120" cy="365760"/>
+          </a:xfrm>
+          <a:prstGeom prst="rect">
+            <a:avLst/>
+          </a:prstGeom>
+          <a:noFill/>
+        </p:spPr>
+        <p:txBody>
+          <a:bodyPr wrap="square" anchor="t" lIns="0" rIns="0" tIns="0" bIns="0">
+            <a:spAutoFit/>
+          </a:bodyPr>
+          <a:lstStyle/>
+          <a:p>
+            <a:pPr algn="l">
+              <a:spcAft>
+                <a:spcPts val="585"/>
+              </a:spcAft>
+            </a:pPr>
+            <a:r>
+              <a:rPr sz="1300" b="1" i="0">
+                <a:solidFill>
+                  <a:srgbClr val="0B2D5B"/>
+                </a:solidFill>
+                <a:latin typeface="Inter Tight"/>
+              </a:rPr>
+              <a:t>TARIQ</a:t>
+            </a:r>
+          </a:p>
+        </p:txBody>
+      </p:sp>
+      <p:sp>
+        <p:nvSpPr>
+          <p:cNvPr id="11" name="TextBox 10"/>
+          <p:cNvSpPr txBox="1"/>
+          <p:nvPr/>
+        </p:nvSpPr>
+        <p:spPr>
+          <a:xfrm>
+            <a:off x="4648200" y="2743200"/>
+            <a:ext cx="2865120" cy="3017520"/>
+          </a:xfrm>
+          <a:prstGeom prst="rect">
+            <a:avLst/>
+          </a:prstGeom>
+          <a:noFill/>
+        </p:spPr>
+        <p:txBody>
+          <a:bodyPr wrap="square" anchor="t" lIns="0" rIns="0" tIns="0" bIns="0">
+            <a:spAutoFit/>
+          </a:bodyPr>
+          <a:lstStyle/>
+          <a:p>
+            <a:pPr algn="l">
+              <a:spcAft>
+                <a:spcPts val="810"/>
+              </a:spcAft>
+            </a:pPr>
+            <a:r>
+              <a:rPr sz="1800" b="0" i="0">
+                <a:solidFill>
+                  <a:srgbClr val="1C1B19"/>
+                </a:solidFill>
+                <a:latin typeface="Source Serif 4"/>
+              </a:rPr>
+              <a:t>A friend screenshotted a private message Tariq sent about his family and shared it with the group. The friend apologized. Two weeks later, it happened again.</a:t>
+            </a:r>
+          </a:p>
+        </p:txBody>
+      </p:sp>
+      <p:sp>
+        <p:nvSpPr>
+          <p:cNvPr id="12" name="Rectangle 11"/>
+          <p:cNvSpPr/>
+          <p:nvPr/>
+        </p:nvSpPr>
+        <p:spPr>
+          <a:xfrm>
+            <a:off x="8016239" y="2103120"/>
+            <a:ext cx="3322320" cy="3840480"/>
+          </a:xfrm>
+          <a:prstGeom prst="rect">
+            <a:avLst/>
+          </a:prstGeom>
+          <a:solidFill>
+            <a:srgbClr val="FFFFFF"/>
+          </a:solidFill>
+          <a:ln w="15875">
+            <a:solidFill>
+              <a:srgbClr val="D8D2C6"/>
+            </a:solidFill>
+          </a:ln>
+          <a:effectLst/>
+        </p:spPr>
+        <p:style>
+          <a:lnRef idx="1">
+            <a:schemeClr val="accent1"/>
+          </a:lnRef>
+          <a:fillRef idx="3">
+            <a:schemeClr val="accent1"/>
+          </a:fillRef>
+          <a:effectRef idx="2">
+            <a:schemeClr val="accent1"/>
+          </a:effectRef>
+          <a:fontRef idx="minor">
+            <a:schemeClr val="lt1"/>
+          </a:fontRef>
+        </p:style>
+        <p:txBody>
+          <a:bodyPr rtlCol="0" anchor="ctr"/>
+          <a:lstStyle/>
+          <a:p>
+            <a:pPr algn="ctr"/>
+          </a:p>
+        </p:txBody>
+      </p:sp>
+      <p:sp>
+        <p:nvSpPr>
+          <p:cNvPr id="13" name="TextBox 12"/>
+          <p:cNvSpPr txBox="1"/>
+          <p:nvPr/>
+        </p:nvSpPr>
+        <p:spPr>
+          <a:xfrm>
+            <a:off x="8244839" y="2286000"/>
+            <a:ext cx="2865120" cy="365760"/>
+          </a:xfrm>
+          <a:prstGeom prst="rect">
+            <a:avLst/>
+          </a:prstGeom>
+          <a:noFill/>
+        </p:spPr>
+        <p:txBody>
+          <a:bodyPr wrap="square" anchor="t" lIns="0" rIns="0" tIns="0" bIns="0">
+            <a:spAutoFit/>
+          </a:bodyPr>
+          <a:lstStyle/>
+          <a:p>
+            <a:pPr algn="l">
+              <a:spcAft>
+                <a:spcPts val="585"/>
+              </a:spcAft>
+            </a:pPr>
+            <a:r>
+              <a:rPr sz="1300" b="1" i="0">
+                <a:solidFill>
+                  <a:srgbClr val="0B2D5B"/>
+                </a:solidFill>
+                <a:latin typeface="Inter Tight"/>
+              </a:rPr>
+              <a:t>LENA</a:t>
+            </a:r>
+          </a:p>
+        </p:txBody>
+      </p:sp>
+      <p:sp>
+        <p:nvSpPr>
+          <p:cNvPr id="14" name="TextBox 13"/>
+          <p:cNvSpPr txBox="1"/>
+          <p:nvPr/>
+        </p:nvSpPr>
+        <p:spPr>
+          <a:xfrm>
+            <a:off x="8244839" y="2743200"/>
+            <a:ext cx="2865120" cy="3017520"/>
+          </a:xfrm>
+          <a:prstGeom prst="rect">
+            <a:avLst/>
+          </a:prstGeom>
+          <a:noFill/>
+        </p:spPr>
+        <p:txBody>
+          <a:bodyPr wrap="square" anchor="t" lIns="0" rIns="0" tIns="0" bIns="0">
+            <a:spAutoFit/>
+          </a:bodyPr>
+          <a:lstStyle/>
+          <a:p>
+            <a:pPr algn="l">
+              <a:spcAft>
+                <a:spcPts val="810"/>
+              </a:spcAft>
+            </a:pPr>
+            <a:r>
+              <a:rPr sz="1800" b="0" i="0">
+                <a:solidFill>
+                  <a:srgbClr val="1C1B19"/>
+                </a:solidFill>
+                <a:latin typeface="Source Serif 4"/>
+              </a:rPr>
+              <a:t>Ended a friendship that had become draining. Now she feels guilty every time she sees her former friend eating alone.</a:t>
             </a:r>
           </a:p>
         </p:txBody>
@@ -8060,7 +8989,7 @@
                 </a:solidFill>
                 <a:latin typeface="Inter Tight"/>
               </a:rPr>
-              <a:t>WHY IT HURTS THIS MUCH</a:t>
+              <a:t>PRIVATE REFLECTION</a:t>
             </a:r>
           </a:p>
         </p:txBody>
@@ -8106,64 +9035,23 @@
       </p:sp>
       <p:sp>
         <p:nvSpPr>
-          <p:cNvPr id="5" name="TextBox 4"/>
-          <p:cNvSpPr txBox="1"/>
-          <p:nvPr/>
-        </p:nvSpPr>
-        <p:spPr>
-          <a:xfrm>
-            <a:off x="822960" y="1005840"/>
-            <a:ext cx="10515600" cy="914400"/>
-          </a:xfrm>
-          <a:prstGeom prst="rect">
-            <a:avLst/>
-          </a:prstGeom>
-          <a:noFill/>
-        </p:spPr>
-        <p:txBody>
-          <a:bodyPr wrap="square" anchor="t" lIns="0" rIns="0" tIns="0" bIns="0">
-            <a:spAutoFit/>
-          </a:bodyPr>
-          <a:lstStyle/>
-          <a:p>
-            <a:pPr algn="l">
-              <a:spcAft>
-                <a:spcPts val="1530"/>
-              </a:spcAft>
-            </a:pPr>
-            <a:r>
-              <a:rPr sz="3400" b="1" i="0">
-                <a:solidFill>
-                  <a:srgbClr val="1C1B19"/>
-                </a:solidFill>
-                <a:latin typeface="Source Serif 4"/>
-              </a:rPr>
-              <a:t>A real loss nobody calls one</a:t>
-            </a:r>
-          </a:p>
-        </p:txBody>
-      </p:sp>
-      <p:sp>
-        <p:nvSpPr>
-          <p:cNvPr id="6" name="Rectangle 5"/>
+          <p:cNvPr id="5" name="Rectangle 4"/>
           <p:cNvSpPr/>
           <p:nvPr/>
         </p:nvSpPr>
         <p:spPr>
           <a:xfrm>
-            <a:off x="822960" y="2103120"/>
-            <a:ext cx="5120640" cy="3931920"/>
+            <a:off x="822960" y="1371600"/>
+            <a:ext cx="73152" cy="3566160"/>
           </a:xfrm>
           <a:prstGeom prst="rect">
             <a:avLst/>
           </a:prstGeom>
           <a:solidFill>
-            <a:srgbClr val="FFFFFF"/>
+            <a:srgbClr val="F47B20"/>
           </a:solidFill>
-          <a:ln w="15875">
-            <a:solidFill>
-              <a:srgbClr val="D8D2C6"/>
-            </a:solidFill>
+          <a:ln>
+            <a:noFill/>
           </a:ln>
           <a:effectLst/>
         </p:spPr>
@@ -8191,14 +9079,53 @@
       </p:sp>
       <p:sp>
         <p:nvSpPr>
+          <p:cNvPr id="6" name="TextBox 5"/>
+          <p:cNvSpPr txBox="1"/>
+          <p:nvPr/>
+        </p:nvSpPr>
+        <p:spPr>
+          <a:xfrm>
+            <a:off x="1188720" y="1371600"/>
+            <a:ext cx="10058400" cy="3566160"/>
+          </a:xfrm>
+          <a:prstGeom prst="rect">
+            <a:avLst/>
+          </a:prstGeom>
+          <a:noFill/>
+        </p:spPr>
+        <p:txBody>
+          <a:bodyPr wrap="square" anchor="ctr" lIns="0" rIns="0" tIns="0" bIns="0">
+            <a:spAutoFit/>
+          </a:bodyPr>
+          <a:lstStyle/>
+          <a:p>
+            <a:pPr algn="l">
+              <a:spcAft>
+                <a:spcPts val="1800"/>
+              </a:spcAft>
+            </a:pPr>
+            <a:r>
+              <a:rPr sz="4000" b="0" i="1">
+                <a:solidFill>
+                  <a:srgbClr val="1C1B19"/>
+                </a:solidFill>
+                <a:latin typeface="Source Serif 4"/>
+              </a:rPr>
+              <a:t>Think of a friendship that changed. What's one specific word for how it feels now?</a:t>
+            </a:r>
+          </a:p>
+        </p:txBody>
+      </p:sp>
+      <p:sp>
+        <p:nvSpPr>
           <p:cNvPr id="7" name="TextBox 6"/>
           <p:cNvSpPr txBox="1"/>
           <p:nvPr/>
         </p:nvSpPr>
         <p:spPr>
           <a:xfrm>
-            <a:off x="1097280" y="2286000"/>
-            <a:ext cx="4572000" cy="457200"/>
+            <a:off x="1188720" y="5120640"/>
+            <a:ext cx="10058400" cy="914400"/>
           </a:xfrm>
           <a:prstGeom prst="rect">
             <a:avLst/>
@@ -8213,276 +9140,17 @@
           <a:p>
             <a:pPr algn="l">
               <a:spcAft>
-                <a:spcPts val="585"/>
-              </a:spcAft>
-            </a:pPr>
-            <a:r>
-              <a:rPr sz="1300" b="1" i="0">
-                <a:solidFill>
-                  <a:srgbClr val="0B2D5B"/>
+                <a:spcPts val="810"/>
+              </a:spcAft>
+            </a:pPr>
+            <a:r>
+              <a:rPr sz="1800" b="0" i="0">
+                <a:solidFill>
+                  <a:srgbClr val="5D5A54"/>
                 </a:solidFill>
                 <a:latin typeface="Inter Tight"/>
               </a:rPr>
-              <a:t>WHAT YOUR BRAIN DOES</a:t>
-            </a:r>
-          </a:p>
-        </p:txBody>
-      </p:sp>
-      <p:sp>
-        <p:nvSpPr>
-          <p:cNvPr id="8" name="TextBox 7"/>
-          <p:cNvSpPr txBox="1"/>
-          <p:nvPr/>
-        </p:nvSpPr>
-        <p:spPr>
-          <a:xfrm>
-            <a:off x="1097280" y="2788920"/>
-            <a:ext cx="4572000" cy="3108960"/>
-          </a:xfrm>
-          <a:prstGeom prst="rect">
-            <a:avLst/>
-          </a:prstGeom>
-          <a:noFill/>
-        </p:spPr>
-        <p:txBody>
-          <a:bodyPr wrap="square" anchor="t" lIns="0" rIns="0" tIns="0" bIns="0">
-            <a:spAutoFit/>
-          </a:bodyPr>
-          <a:lstStyle/>
-          <a:p>
-            <a:pPr algn="l">
-              <a:spcAft>
-                <a:spcPts val="855"/>
-              </a:spcAft>
-            </a:pPr>
-            <a:r>
-              <a:rPr sz="1900" b="0" i="0">
-                <a:solidFill>
-                  <a:srgbClr val="1C1B19"/>
-                </a:solidFill>
-                <a:latin typeface="Source Serif 4"/>
-              </a:rPr>
-              <a:t>Treats it like an injury</a:t>
-            </a:r>
-          </a:p>
-          <a:p>
-            <a:pPr algn="l">
-              <a:spcAft>
-                <a:spcPts val="855"/>
-              </a:spcAft>
-            </a:pPr>
-            <a:r>
-              <a:rPr sz="1900" b="0" i="0">
-                <a:solidFill>
-                  <a:srgbClr val="1C1B19"/>
-                </a:solidFill>
-                <a:latin typeface="Source Serif 4"/>
-              </a:rPr>
-              <a:t>The distress signal fires</a:t>
-            </a:r>
-          </a:p>
-          <a:p>
-            <a:pPr algn="l">
-              <a:spcAft>
-                <a:spcPts val="855"/>
-              </a:spcAft>
-            </a:pPr>
-            <a:r>
-              <a:rPr sz="1900" b="0" i="0">
-                <a:solidFill>
-                  <a:srgbClr val="1C1B19"/>
-                </a:solidFill>
-                <a:latin typeface="Source Serif 4"/>
-              </a:rPr>
-              <a:t>More signal, more upset</a:t>
-            </a:r>
-          </a:p>
-          <a:p>
-            <a:pPr algn="l">
-              <a:spcAft>
-                <a:spcPts val="855"/>
-              </a:spcAft>
-            </a:pPr>
-            <a:r>
-              <a:rPr sz="1900" b="0" i="0">
-                <a:solidFill>
-                  <a:srgbClr val="1C1B19"/>
-                </a:solidFill>
-                <a:latin typeface="Source Serif 4"/>
-              </a:rPr>
-              <a:t>Naming the feeling turns it down</a:t>
-            </a:r>
-          </a:p>
-        </p:txBody>
-      </p:sp>
-      <p:sp>
-        <p:nvSpPr>
-          <p:cNvPr id="9" name="Rectangle 8"/>
-          <p:cNvSpPr/>
-          <p:nvPr/>
-        </p:nvSpPr>
-        <p:spPr>
-          <a:xfrm>
-            <a:off x="6309360" y="2103120"/>
-            <a:ext cx="5120640" cy="3931920"/>
-          </a:xfrm>
-          <a:prstGeom prst="rect">
-            <a:avLst/>
-          </a:prstGeom>
-          <a:solidFill>
-            <a:srgbClr val="FFFFFF"/>
-          </a:solidFill>
-          <a:ln w="15875">
-            <a:solidFill>
-              <a:srgbClr val="D8D2C6"/>
-            </a:solidFill>
-          </a:ln>
-          <a:effectLst/>
-        </p:spPr>
-        <p:style>
-          <a:lnRef idx="1">
-            <a:schemeClr val="accent1"/>
-          </a:lnRef>
-          <a:fillRef idx="3">
-            <a:schemeClr val="accent1"/>
-          </a:fillRef>
-          <a:effectRef idx="2">
-            <a:schemeClr val="accent1"/>
-          </a:effectRef>
-          <a:fontRef idx="minor">
-            <a:schemeClr val="lt1"/>
-          </a:fontRef>
-        </p:style>
-        <p:txBody>
-          <a:bodyPr rtlCol="0" anchor="ctr"/>
-          <a:lstStyle/>
-          <a:p>
-            <a:pPr algn="ctr"/>
-          </a:p>
-        </p:txBody>
-      </p:sp>
-      <p:sp>
-        <p:nvSpPr>
-          <p:cNvPr id="10" name="TextBox 9"/>
-          <p:cNvSpPr txBox="1"/>
-          <p:nvPr/>
-        </p:nvSpPr>
-        <p:spPr>
-          <a:xfrm>
-            <a:off x="6583680" y="2286000"/>
-            <a:ext cx="4572000" cy="457200"/>
-          </a:xfrm>
-          <a:prstGeom prst="rect">
-            <a:avLst/>
-          </a:prstGeom>
-          <a:noFill/>
-        </p:spPr>
-        <p:txBody>
-          <a:bodyPr wrap="square" anchor="t" lIns="0" rIns="0" tIns="0" bIns="0">
-            <a:spAutoFit/>
-          </a:bodyPr>
-          <a:lstStyle/>
-          <a:p>
-            <a:pPr algn="l">
-              <a:spcAft>
-                <a:spcPts val="585"/>
-              </a:spcAft>
-            </a:pPr>
-            <a:r>
-              <a:rPr sz="1300" b="1" i="0">
-                <a:solidFill>
-                  <a:srgbClr val="0B2D5B"/>
-                </a:solidFill>
-                <a:latin typeface="Inter Tight"/>
-              </a:rPr>
-              <a:t>WHY IT'S HARDER THAN IT LOOKS</a:t>
-            </a:r>
-          </a:p>
-        </p:txBody>
-      </p:sp>
-      <p:sp>
-        <p:nvSpPr>
-          <p:cNvPr id="11" name="TextBox 10"/>
-          <p:cNvSpPr txBox="1"/>
-          <p:nvPr/>
-        </p:nvSpPr>
-        <p:spPr>
-          <a:xfrm>
-            <a:off x="6583680" y="2788920"/>
-            <a:ext cx="4572000" cy="3108960"/>
-          </a:xfrm>
-          <a:prstGeom prst="rect">
-            <a:avLst/>
-          </a:prstGeom>
-          <a:noFill/>
-        </p:spPr>
-        <p:txBody>
-          <a:bodyPr wrap="square" anchor="t" lIns="0" rIns="0" tIns="0" bIns="0">
-            <a:spAutoFit/>
-          </a:bodyPr>
-          <a:lstStyle/>
-          <a:p>
-            <a:pPr algn="l">
-              <a:spcAft>
-                <a:spcPts val="855"/>
-              </a:spcAft>
-            </a:pPr>
-            <a:r>
-              <a:rPr sz="1900" b="0" i="0">
-                <a:solidFill>
-                  <a:srgbClr val="1C1B19"/>
-                </a:solidFill>
-                <a:latin typeface="Source Serif 4"/>
-              </a:rPr>
-              <a:t>No songs, no sympathy, no script</a:t>
-            </a:r>
-          </a:p>
-          <a:p>
-            <a:pPr algn="l">
-              <a:spcAft>
-                <a:spcPts val="855"/>
-              </a:spcAft>
-            </a:pPr>
-            <a:r>
-              <a:rPr sz="1900" b="0" i="0">
-                <a:solidFill>
-                  <a:srgbClr val="1C1B19"/>
-                </a:solidFill>
-                <a:latin typeface="Source Serif 4"/>
-              </a:rPr>
-              <a:t>Tangled up with who you are</a:t>
-            </a:r>
-          </a:p>
-          <a:p>
-            <a:pPr algn="l">
-              <a:spcAft>
-                <a:spcPts val="855"/>
-              </a:spcAft>
-            </a:pPr>
-            <a:r>
-              <a:rPr sz="1900" b="0" i="0">
-                <a:solidFill>
-                  <a:srgbClr val="1C1B19"/>
-                </a:solidFill>
-                <a:latin typeface="Source Serif 4"/>
-              </a:rPr>
-              <a:t>Ripples through teams and friends</a:t>
-            </a:r>
-          </a:p>
-          <a:p>
-            <a:pPr algn="l">
-              <a:spcAft>
-                <a:spcPts val="855"/>
-              </a:spcAft>
-            </a:pPr>
-            <a:r>
-              <a:rPr sz="1900" b="0" i="0">
-                <a:solidFill>
-                  <a:srgbClr val="1C1B19"/>
-                </a:solidFill>
-                <a:latin typeface="Source Serif 4"/>
-              </a:rPr>
-              <a:t>You see them every day</a:t>
+              <a:t>Write it on a card for yourself. If you want, circle one: repair, reset, or release.</a:t>
             </a:r>
           </a:p>
         </p:txBody>
@@ -8591,7 +9259,7 @@
                 </a:solidFill>
                 <a:latin typeface="Inter Tight"/>
               </a:rPr>
-              <a:t>WHAT HELPS</a:t>
+              <a:t>BEFORE YOU GO</a:t>
             </a:r>
           </a:p>
         </p:txBody>
@@ -8643,8 +9311,8 @@
         </p:nvSpPr>
         <p:spPr>
           <a:xfrm>
-            <a:off x="822960" y="1005840"/>
-            <a:ext cx="10515600" cy="1097280"/>
+            <a:off x="822960" y="1188720"/>
+            <a:ext cx="10515600" cy="914400"/>
           </a:xfrm>
           <a:prstGeom prst="rect">
             <a:avLst/>
@@ -8669,7 +9337,7 @@
                 </a:solidFill>
                 <a:latin typeface="Source Serif 4"/>
               </a:rPr>
-              <a:t>Feel it. Decide. Then rebuild.</a:t>
+              <a:t>Recovery comes in waves.</a:t>
             </a:r>
           </a:p>
         </p:txBody>
@@ -8682,8 +9350,8 @@
         </p:nvSpPr>
         <p:spPr>
           <a:xfrm>
-            <a:off x="822960" y="2057400"/>
-            <a:ext cx="548640" cy="804672"/>
+            <a:off x="822960" y="2286000"/>
+            <a:ext cx="10515600" cy="1463040"/>
           </a:xfrm>
           <a:prstGeom prst="rect">
             <a:avLst/>
@@ -8698,31 +9366,77 @@
           <a:p>
             <a:pPr algn="l">
               <a:spcAft>
-                <a:spcPts val="1170"/>
-              </a:spcAft>
-            </a:pPr>
-            <a:r>
-              <a:rPr sz="2600" b="1" i="0">
-                <a:solidFill>
-                  <a:srgbClr val="F47B20"/>
+                <a:spcPts val="1080"/>
+              </a:spcAft>
+            </a:pPr>
+            <a:r>
+              <a:rPr sz="2400" b="0" i="0">
+                <a:solidFill>
+                  <a:srgbClr val="1C1B19"/>
                 </a:solidFill>
                 <a:latin typeface="Source Serif 4"/>
               </a:rPr>
-              <a:t>1</a:t>
-            </a:r>
-          </a:p>
-        </p:txBody>
-      </p:sp>
-      <p:sp>
-        <p:nvSpPr>
-          <p:cNvPr id="7" name="TextBox 6"/>
+              <a:t>Fine for a week, then an old photo flattens you. That's how memory works. You aren't going backward.</a:t>
+            </a:r>
+          </a:p>
+        </p:txBody>
+      </p:sp>
+      <p:sp>
+        <p:nvSpPr>
+          <p:cNvPr id="7" name="Rectangle 6"/>
+          <p:cNvSpPr/>
+          <p:nvPr/>
+        </p:nvSpPr>
+        <p:spPr>
+          <a:xfrm>
+            <a:off x="822960" y="4023360"/>
+            <a:ext cx="10515600" cy="1371600"/>
+          </a:xfrm>
+          <a:prstGeom prst="rect">
+            <a:avLst/>
+          </a:prstGeom>
+          <a:solidFill>
+            <a:srgbClr val="FFFFFF"/>
+          </a:solidFill>
+          <a:ln w="15875">
+            <a:solidFill>
+              <a:srgbClr val="1C1B19"/>
+            </a:solidFill>
+          </a:ln>
+          <a:effectLst/>
+        </p:spPr>
+        <p:style>
+          <a:lnRef idx="1">
+            <a:schemeClr val="accent1"/>
+          </a:lnRef>
+          <a:fillRef idx="3">
+            <a:schemeClr val="accent1"/>
+          </a:fillRef>
+          <a:effectRef idx="2">
+            <a:schemeClr val="accent1"/>
+          </a:effectRef>
+          <a:fontRef idx="minor">
+            <a:schemeClr val="lt1"/>
+          </a:fontRef>
+        </p:style>
+        <p:txBody>
+          <a:bodyPr rtlCol="0" anchor="ctr"/>
+          <a:lstStyle/>
+          <a:p>
+            <a:pPr algn="ctr"/>
+          </a:p>
+        </p:txBody>
+      </p:sp>
+      <p:sp>
+        <p:nvSpPr>
+          <p:cNvPr id="8" name="TextBox 7"/>
           <p:cNvSpPr txBox="1"/>
           <p:nvPr/>
         </p:nvSpPr>
         <p:spPr>
           <a:xfrm>
-            <a:off x="1463040" y="2093976"/>
-            <a:ext cx="9875520" cy="804672"/>
+            <a:off x="1097280" y="4206240"/>
+            <a:ext cx="10058400" cy="365760"/>
           </a:xfrm>
           <a:prstGeom prst="rect">
             <a:avLst/>
@@ -8737,47 +9451,31 @@
           <a:p>
             <a:pPr algn="l">
               <a:spcAft>
-                <a:spcPts val="945"/>
-              </a:spcAft>
-            </a:pPr>
-            <a:r>
-              <a:rPr sz="2100" b="1" i="0">
-                <a:solidFill>
-                  <a:srgbClr val="1C1B19"/>
-                </a:solidFill>
-                <a:latin typeface="Source Serif 4"/>
-              </a:rPr>
-              <a:t>Name the feeling, specifically.</a:t>
-            </a:r>
-          </a:p>
-          <a:p>
-            <a:pPr algn="l">
-              <a:spcAft>
-                <a:spcPts val="945"/>
-              </a:spcAft>
-            </a:pPr>
-            <a:r>
-              <a:rPr sz="1600" b="0" i="0">
-                <a:solidFill>
-                  <a:srgbClr val="5D5A54"/>
-                </a:solidFill>
-                <a:latin typeface="Source Serif 4"/>
-              </a:rPr>
-              <a:t>"Relieved and guilty" says more than "bad."</a:t>
-            </a:r>
-          </a:p>
-        </p:txBody>
-      </p:sp>
-      <p:sp>
-        <p:nvSpPr>
-          <p:cNvPr id="8" name="TextBox 7"/>
+                <a:spcPts val="540"/>
+              </a:spcAft>
+            </a:pPr>
+            <a:r>
+              <a:rPr sz="1200" b="1" i="0">
+                <a:solidFill>
+                  <a:srgbClr val="0B2D5B"/>
+                </a:solidFill>
+                <a:latin typeface="Inter Tight"/>
+              </a:rPr>
+              <a:t>STUDENT PAGE</a:t>
+            </a:r>
+          </a:p>
+        </p:txBody>
+      </p:sp>
+      <p:sp>
+        <p:nvSpPr>
+          <p:cNvPr id="9" name="TextBox 8"/>
           <p:cNvSpPr txBox="1"/>
           <p:nvPr/>
         </p:nvSpPr>
         <p:spPr>
           <a:xfrm>
-            <a:off x="822960" y="2862072"/>
-            <a:ext cx="548640" cy="804672"/>
+            <a:off x="1097280" y="4617720"/>
+            <a:ext cx="10058400" cy="640080"/>
           </a:xfrm>
           <a:prstGeom prst="rect">
             <a:avLst/>
@@ -8792,354 +9490,17 @@
           <a:p>
             <a:pPr algn="l">
               <a:spcAft>
-                <a:spcPts val="1170"/>
-              </a:spcAft>
-            </a:pPr>
-            <a:r>
-              <a:rPr sz="2600" b="1" i="0">
-                <a:solidFill>
-                  <a:srgbClr val="F47B20"/>
-                </a:solidFill>
-                <a:latin typeface="Source Serif 4"/>
-              </a:rPr>
-              <a:t>2</a:t>
-            </a:r>
-          </a:p>
-        </p:txBody>
-      </p:sp>
-      <p:sp>
-        <p:nvSpPr>
-          <p:cNvPr id="9" name="TextBox 8"/>
-          <p:cNvSpPr txBox="1"/>
-          <p:nvPr/>
-        </p:nvSpPr>
-        <p:spPr>
-          <a:xfrm>
-            <a:off x="1463040" y="2898648"/>
-            <a:ext cx="9875520" cy="804672"/>
-          </a:xfrm>
-          <a:prstGeom prst="rect">
-            <a:avLst/>
-          </a:prstGeom>
-          <a:noFill/>
-        </p:spPr>
-        <p:txBody>
-          <a:bodyPr wrap="square" anchor="t" lIns="0" rIns="0" tIns="0" bIns="0">
-            <a:spAutoFit/>
-          </a:bodyPr>
-          <a:lstStyle/>
-          <a:p>
-            <a:pPr algn="l">
-              <a:spcAft>
-                <a:spcPts val="945"/>
-              </a:spcAft>
-            </a:pPr>
-            <a:r>
-              <a:rPr sz="2100" b="1" i="0">
+                <a:spcPts val="900"/>
+              </a:spcAft>
+            </a:pPr>
+            <a:r>
+              <a:rPr sz="2000" b="0" i="0">
                 <a:solidFill>
                   <a:srgbClr val="1C1B19"/>
                 </a:solidFill>
-                <a:latin typeface="Source Serif 4"/>
-              </a:rPr>
-              <a:t>Tell one person the real version.</a:t>
-            </a:r>
-          </a:p>
-          <a:p>
-            <a:pPr algn="l">
-              <a:spcAft>
-                <a:spcPts val="945"/>
-              </a:spcAft>
-            </a:pPr>
-            <a:r>
-              <a:rPr sz="1600" b="0" i="0">
-                <a:solidFill>
-                  <a:srgbClr val="5D5A54"/>
-                </a:solidFill>
-                <a:latin typeface="Source Serif 4"/>
-              </a:rPr>
-              <a:t>Someone outside the friend group.</a:t>
-            </a:r>
-          </a:p>
-        </p:txBody>
-      </p:sp>
-      <p:sp>
-        <p:nvSpPr>
-          <p:cNvPr id="10" name="TextBox 9"/>
-          <p:cNvSpPr txBox="1"/>
-          <p:nvPr/>
-        </p:nvSpPr>
-        <p:spPr>
-          <a:xfrm>
-            <a:off x="822960" y="3666744"/>
-            <a:ext cx="548640" cy="804672"/>
-          </a:xfrm>
-          <a:prstGeom prst="rect">
-            <a:avLst/>
-          </a:prstGeom>
-          <a:noFill/>
-        </p:spPr>
-        <p:txBody>
-          <a:bodyPr wrap="square" anchor="t" lIns="0" rIns="0" tIns="0" bIns="0">
-            <a:spAutoFit/>
-          </a:bodyPr>
-          <a:lstStyle/>
-          <a:p>
-            <a:pPr algn="l">
-              <a:spcAft>
-                <a:spcPts val="1170"/>
-              </a:spcAft>
-            </a:pPr>
-            <a:r>
-              <a:rPr sz="2600" b="1" i="0">
-                <a:solidFill>
-                  <a:srgbClr val="F47B20"/>
-                </a:solidFill>
-                <a:latin typeface="Source Serif 4"/>
-              </a:rPr>
-              <a:t>3</a:t>
-            </a:r>
-          </a:p>
-        </p:txBody>
-      </p:sp>
-      <p:sp>
-        <p:nvSpPr>
-          <p:cNvPr id="11" name="TextBox 10"/>
-          <p:cNvSpPr txBox="1"/>
-          <p:nvPr/>
-        </p:nvSpPr>
-        <p:spPr>
-          <a:xfrm>
-            <a:off x="1463040" y="3703320"/>
-            <a:ext cx="9875520" cy="804672"/>
-          </a:xfrm>
-          <a:prstGeom prst="rect">
-            <a:avLst/>
-          </a:prstGeom>
-          <a:noFill/>
-        </p:spPr>
-        <p:txBody>
-          <a:bodyPr wrap="square" anchor="t" lIns="0" rIns="0" tIns="0" bIns="0">
-            <a:spAutoFit/>
-          </a:bodyPr>
-          <a:lstStyle/>
-          <a:p>
-            <a:pPr algn="l">
-              <a:spcAft>
-                <a:spcPts val="945"/>
-              </a:spcAft>
-            </a:pPr>
-            <a:r>
-              <a:rPr sz="2100" b="1" i="0">
-                <a:solidFill>
-                  <a:srgbClr val="1C1B19"/>
-                </a:solidFill>
-                <a:latin typeface="Source Serif 4"/>
-              </a:rPr>
-              <a:t>Decide: repair, reset, or release.</a:t>
-            </a:r>
-          </a:p>
-          <a:p>
-            <a:pPr algn="l">
-              <a:spcAft>
-                <a:spcPts val="945"/>
-              </a:spcAft>
-            </a:pPr>
-            <a:r>
-              <a:rPr sz="1600" b="0" i="0">
-                <a:solidFill>
-                  <a:srgbClr val="5D5A54"/>
-                </a:solidFill>
-                <a:latin typeface="Source Serif 4"/>
-              </a:rPr>
-              <a:t>All three are fine. Not choosing keeps you stuck.</a:t>
-            </a:r>
-          </a:p>
-        </p:txBody>
-      </p:sp>
-      <p:sp>
-        <p:nvSpPr>
-          <p:cNvPr id="12" name="TextBox 11"/>
-          <p:cNvSpPr txBox="1"/>
-          <p:nvPr/>
-        </p:nvSpPr>
-        <p:spPr>
-          <a:xfrm>
-            <a:off x="822960" y="4471416"/>
-            <a:ext cx="548640" cy="804672"/>
-          </a:xfrm>
-          <a:prstGeom prst="rect">
-            <a:avLst/>
-          </a:prstGeom>
-          <a:noFill/>
-        </p:spPr>
-        <p:txBody>
-          <a:bodyPr wrap="square" anchor="t" lIns="0" rIns="0" tIns="0" bIns="0">
-            <a:spAutoFit/>
-          </a:bodyPr>
-          <a:lstStyle/>
-          <a:p>
-            <a:pPr algn="l">
-              <a:spcAft>
-                <a:spcPts val="1170"/>
-              </a:spcAft>
-            </a:pPr>
-            <a:r>
-              <a:rPr sz="2600" b="1" i="0">
-                <a:solidFill>
-                  <a:srgbClr val="F47B20"/>
-                </a:solidFill>
-                <a:latin typeface="Source Serif 4"/>
-              </a:rPr>
-              <a:t>4</a:t>
-            </a:r>
-          </a:p>
-        </p:txBody>
-      </p:sp>
-      <p:sp>
-        <p:nvSpPr>
-          <p:cNvPr id="13" name="TextBox 12"/>
-          <p:cNvSpPr txBox="1"/>
-          <p:nvPr/>
-        </p:nvSpPr>
-        <p:spPr>
-          <a:xfrm>
-            <a:off x="1463040" y="4507992"/>
-            <a:ext cx="9875520" cy="804672"/>
-          </a:xfrm>
-          <a:prstGeom prst="rect">
-            <a:avLst/>
-          </a:prstGeom>
-          <a:noFill/>
-        </p:spPr>
-        <p:txBody>
-          <a:bodyPr wrap="square" anchor="t" lIns="0" rIns="0" tIns="0" bIns="0">
-            <a:spAutoFit/>
-          </a:bodyPr>
-          <a:lstStyle/>
-          <a:p>
-            <a:pPr algn="l">
-              <a:spcAft>
-                <a:spcPts val="945"/>
-              </a:spcAft>
-            </a:pPr>
-            <a:r>
-              <a:rPr sz="2100" b="1" i="0">
-                <a:solidFill>
-                  <a:srgbClr val="1C1B19"/>
-                </a:solidFill>
-                <a:latin typeface="Source Serif 4"/>
-              </a:rPr>
-              <a:t>Plan for the run-ins.</a:t>
-            </a:r>
-          </a:p>
-          <a:p>
-            <a:pPr algn="l">
-              <a:spcAft>
-                <a:spcPts val="945"/>
-              </a:spcAft>
-            </a:pPr>
-            <a:r>
-              <a:rPr sz="1600" b="0" i="0">
-                <a:solidFill>
-                  <a:srgbClr val="5D5A54"/>
-                </a:solidFill>
-                <a:latin typeface="Source Serif 4"/>
-              </a:rPr>
-              <a:t>A nod, a "hey," or nothing. Decide ahead.</a:t>
-            </a:r>
-          </a:p>
-        </p:txBody>
-      </p:sp>
-      <p:sp>
-        <p:nvSpPr>
-          <p:cNvPr id="14" name="TextBox 13"/>
-          <p:cNvSpPr txBox="1"/>
-          <p:nvPr/>
-        </p:nvSpPr>
-        <p:spPr>
-          <a:xfrm>
-            <a:off x="822960" y="5276088"/>
-            <a:ext cx="548640" cy="804672"/>
-          </a:xfrm>
-          <a:prstGeom prst="rect">
-            <a:avLst/>
-          </a:prstGeom>
-          <a:noFill/>
-        </p:spPr>
-        <p:txBody>
-          <a:bodyPr wrap="square" anchor="t" lIns="0" rIns="0" tIns="0" bIns="0">
-            <a:spAutoFit/>
-          </a:bodyPr>
-          <a:lstStyle/>
-          <a:p>
-            <a:pPr algn="l">
-              <a:spcAft>
-                <a:spcPts val="1170"/>
-              </a:spcAft>
-            </a:pPr>
-            <a:r>
-              <a:rPr sz="2600" b="1" i="0">
-                <a:solidFill>
-                  <a:srgbClr val="F47B20"/>
-                </a:solidFill>
-                <a:latin typeface="Source Serif 4"/>
-              </a:rPr>
-              <a:t>5</a:t>
-            </a:r>
-          </a:p>
-        </p:txBody>
-      </p:sp>
-      <p:sp>
-        <p:nvSpPr>
-          <p:cNvPr id="15" name="TextBox 14"/>
-          <p:cNvSpPr txBox="1"/>
-          <p:nvPr/>
-        </p:nvSpPr>
-        <p:spPr>
-          <a:xfrm>
-            <a:off x="1463040" y="5312664"/>
-            <a:ext cx="9875520" cy="804672"/>
-          </a:xfrm>
-          <a:prstGeom prst="rect">
-            <a:avLst/>
-          </a:prstGeom>
-          <a:noFill/>
-        </p:spPr>
-        <p:txBody>
-          <a:bodyPr wrap="square" anchor="t" lIns="0" rIns="0" tIns="0" bIns="0">
-            <a:spAutoFit/>
-          </a:bodyPr>
-          <a:lstStyle/>
-          <a:p>
-            <a:pPr algn="l">
-              <a:spcAft>
-                <a:spcPts val="945"/>
-              </a:spcAft>
-            </a:pPr>
-            <a:r>
-              <a:rPr sz="2100" b="1" i="0">
-                <a:solidFill>
-                  <a:srgbClr val="1C1B19"/>
-                </a:solidFill>
-                <a:latin typeface="Source Serif 4"/>
-              </a:rPr>
-              <a:t>Don't let it rewrite your story.</a:t>
-            </a:r>
-          </a:p>
-          <a:p>
-            <a:pPr algn="l">
-              <a:spcAft>
-                <a:spcPts val="945"/>
-              </a:spcAft>
-            </a:pPr>
-            <a:r>
-              <a:rPr sz="1600" b="0" i="0">
-                <a:solidFill>
-                  <a:srgbClr val="5D5A54"/>
-                </a:solidFill>
-                <a:latin typeface="Source Serif 4"/>
-              </a:rPr>
-              <a:t>One ending isn't proof people always leave.</a:t>
+                <a:latin typeface="Inter Tight"/>
+              </a:rPr>
+              <a:t>https://rmwtoolkit.github.io/bcds-toolkit/friendship-breakups-high-school.html</a:t>
             </a:r>
           </a:p>
         </p:txBody>

--- a/decks/friendship-breakups-lesson-v2.pptx
+++ b/decks/friendship-breakups-lesson-v2.pptx
@@ -6638,6 +6638,45 @@
                 <a:latin typeface="Inter Tight"/>
               </a:rPr>
               <a:t>Beaver Upper School · Counseling</a:t>
+            </a:r>
+          </a:p>
+        </p:txBody>
+      </p:sp>
+      <p:sp>
+        <p:nvSpPr>
+          <p:cNvPr id="8" name="TextBox 7"/>
+          <p:cNvSpPr txBox="1"/>
+          <p:nvPr/>
+        </p:nvSpPr>
+        <p:spPr>
+          <a:xfrm>
+            <a:off x="6766560" y="5897880"/>
+            <a:ext cx="4846320" cy="640080"/>
+          </a:xfrm>
+          <a:prstGeom prst="rect">
+            <a:avLst/>
+          </a:prstGeom>
+          <a:noFill/>
+        </p:spPr>
+        <p:txBody>
+          <a:bodyPr wrap="square" anchor="t" lIns="0" rIns="0" tIns="0" bIns="0">
+            <a:spAutoFit/>
+          </a:bodyPr>
+          <a:lstStyle/>
+          <a:p>
+            <a:pPr algn="r">
+              <a:spcAft>
+                <a:spcPts val="495"/>
+              </a:spcAft>
+            </a:pPr>
+            <a:r>
+              <a:rPr sz="1100" b="0" i="0">
+                <a:solidFill>
+                  <a:srgbClr val="E8E4DA"/>
+                </a:solidFill>
+                <a:latin typeface="Inter Tight"/>
+              </a:rPr>
+              <a:t>Written by Dr. Rick Wilson, with AI-assisted drafting. Every lesson is reviewed and edited by Dr. Wilson.</a:t>
             </a:r>
           </a:p>
         </p:txBody>
